--- a/resources/claude_code_vscode_tricks.pptx
+++ b/resources/claude_code_vscode_tricks.pptx
@@ -5,7 +5,7 @@
     <p:sldMasterId id="2147483648" r:id="rId1"/>
   </p:sldMasterIdLst>
   <p:notesMasterIdLst>
-    <p:notesMasterId r:id="rId33"/>
+    <p:notesMasterId r:id="rId34"/>
   </p:notesMasterIdLst>
   <p:sldIdLst>
     <p:sldId id="256" r:id="rId2"/>
@@ -26,19 +26,20 @@
     <p:sldId id="281" r:id="rId17"/>
     <p:sldId id="282" r:id="rId18"/>
     <p:sldId id="283" r:id="rId19"/>
-    <p:sldId id="284" r:id="rId20"/>
-    <p:sldId id="285" r:id="rId21"/>
-    <p:sldId id="286" r:id="rId22"/>
-    <p:sldId id="287" r:id="rId23"/>
-    <p:sldId id="288" r:id="rId24"/>
-    <p:sldId id="289" r:id="rId25"/>
-    <p:sldId id="279" r:id="rId26"/>
-    <p:sldId id="269" r:id="rId27"/>
-    <p:sldId id="270" r:id="rId28"/>
-    <p:sldId id="271" r:id="rId29"/>
-    <p:sldId id="272" r:id="rId30"/>
-    <p:sldId id="273" r:id="rId31"/>
-    <p:sldId id="274" r:id="rId32"/>
+    <p:sldId id="290" r:id="rId20"/>
+    <p:sldId id="284" r:id="rId21"/>
+    <p:sldId id="285" r:id="rId22"/>
+    <p:sldId id="286" r:id="rId23"/>
+    <p:sldId id="287" r:id="rId24"/>
+    <p:sldId id="288" r:id="rId25"/>
+    <p:sldId id="289" r:id="rId26"/>
+    <p:sldId id="279" r:id="rId27"/>
+    <p:sldId id="269" r:id="rId28"/>
+    <p:sldId id="270" r:id="rId29"/>
+    <p:sldId id="271" r:id="rId30"/>
+    <p:sldId id="272" r:id="rId31"/>
+    <p:sldId id="273" r:id="rId32"/>
+    <p:sldId id="274" r:id="rId33"/>
   </p:sldIdLst>
   <p:sldSz cx="12192000" cy="6858000"/>
   <p:notesSz cx="6858000" cy="12192000"/>
@@ -1447,7 +1448,7 @@
           <a:p>
             <a:fld id="{F7021451-1387-4CA6-816F-3879F97B5CBC}" type="slidenum">
               <a:rPr lang="en-US"/>
-              <a:t>26</a:t>
+              <a:t>27</a:t>
             </a:fld>
             <a:endParaRPr lang="en-US"/>
           </a:p>
@@ -1534,7 +1535,7 @@
           <a:p>
             <a:fld id="{F7021451-1387-4CA6-816F-3879F97B5CBC}" type="slidenum">
               <a:rPr lang="en-US"/>
-              <a:t>27</a:t>
+              <a:t>28</a:t>
             </a:fld>
             <a:endParaRPr lang="en-US"/>
           </a:p>
@@ -1620,7 +1621,7 @@
           <a:p>
             <a:fld id="{F7021451-1387-4CA6-816F-3879F97B5CBC}" type="slidenum">
               <a:rPr lang="en-US"/>
-              <a:t>28</a:t>
+              <a:t>29</a:t>
             </a:fld>
             <a:endParaRPr lang="en-US"/>
           </a:p>
@@ -1707,7 +1708,7 @@
           <a:p>
             <a:fld id="{F7021451-1387-4CA6-816F-3879F97B5CBC}" type="slidenum">
               <a:rPr lang="en-US"/>
-              <a:t>29</a:t>
+              <a:t>30</a:t>
             </a:fld>
             <a:endParaRPr lang="en-US"/>
           </a:p>
@@ -1840,7 +1841,7 @@
           <a:p>
             <a:fld id="{F7021451-1387-4CA6-816F-3879F97B5CBC}" type="slidenum">
               <a:rPr lang="en-US"/>
-              <a:t>30</a:t>
+              <a:t>31</a:t>
             </a:fld>
             <a:endParaRPr lang="en-US"/>
           </a:p>
@@ -1926,7 +1927,7 @@
           <a:p>
             <a:fld id="{F7021451-1387-4CA6-816F-3879F97B5CBC}" type="slidenum">
               <a:rPr lang="en-US"/>
-              <a:t>31</a:t>
+              <a:t>32</a:t>
             </a:fld>
             <a:endParaRPr lang="en-US"/>
           </a:p>
@@ -2504,7 +2505,7 @@
           </a:prstGeom>
           <a:extLst>
             <a:ext uri="{C572A759-6A51-4108-AA02-DFA0A04FC94B}">
-              <ma14:wrappingTextBoxFlag xmlns:ma14="http://schemas.microsoft.com/office/mac/drawingml/2011/main" xmlns="" val="0"/>
+              <ma14:wrappingTextBoxFlag xmlns="" xmlns:ma14="http://schemas.microsoft.com/office/mac/drawingml/2011/main" val="0"/>
             </a:ext>
           </a:extLst>
         </p:spPr>
@@ -2615,7 +2616,7 @@
           </a:prstGeom>
           <a:extLst>
             <a:ext uri="{C572A759-6A51-4108-AA02-DFA0A04FC94B}">
-              <ma14:wrappingTextBoxFlag xmlns:ma14="http://schemas.microsoft.com/office/mac/drawingml/2011/main" xmlns="" val="0"/>
+              <ma14:wrappingTextBoxFlag xmlns="" xmlns:ma14="http://schemas.microsoft.com/office/mac/drawingml/2011/main" val="0"/>
             </a:ext>
           </a:extLst>
         </p:spPr>
@@ -3628,7 +3629,7 @@
           </a:prstGeom>
           <a:extLst>
             <a:ext uri="{C572A759-6A51-4108-AA02-DFA0A04FC94B}">
-              <ma14:wrappingTextBoxFlag xmlns:ma14="http://schemas.microsoft.com/office/mac/drawingml/2011/main" xmlns="" val="0"/>
+              <ma14:wrappingTextBoxFlag xmlns="" xmlns:ma14="http://schemas.microsoft.com/office/mac/drawingml/2011/main" val="0"/>
             </a:ext>
           </a:extLst>
         </p:spPr>
@@ -4398,7 +4399,7 @@
           </a:prstGeom>
           <a:extLst>
             <a:ext uri="{C572A759-6A51-4108-AA02-DFA0A04FC94B}">
-              <ma14:wrappingTextBoxFlag xmlns:ma14="http://schemas.microsoft.com/office/mac/drawingml/2011/main" xmlns="" val="0"/>
+              <ma14:wrappingTextBoxFlag xmlns="" xmlns:ma14="http://schemas.microsoft.com/office/mac/drawingml/2011/main" val="0"/>
             </a:ext>
           </a:extLst>
         </p:spPr>
@@ -4704,7 +4705,7 @@
                           <a:ea typeface="Calibri" pitchFamily="34" charset="-122"/>
                           <a:cs typeface="Calibri" pitchFamily="34" charset="-120"/>
                         </a:rPr>
-                        <a:t>create-new-project</a:t>
+                        <a:t>initialize-project</a:t>
                       </a:r>
                       <a:endParaRPr lang="en-US" sz="1500" dirty="0">
                         <a:latin typeface="Calibri" charset="0"/>
@@ -4772,7 +4773,7 @@
                           <a:ea typeface="Calibri" pitchFamily="34" charset="-122"/>
                           <a:cs typeface="Calibri" pitchFamily="34" charset="-120"/>
                         </a:rPr>
-                        <a:t>Scaffolds a Python uv project with plans/, notebooks/, src/</a:t>
+                        <a:t>After the talk: README, diagrams, decisions, plans/, progress.md and folders</a:t>
                       </a:r>
                       <a:endParaRPr lang="en-US" sz="1500" dirty="0">
                         <a:latin typeface="Calibri" charset="0"/>
@@ -5893,7 +5894,7 @@
           </a:prstGeom>
           <a:extLst>
             <a:ext uri="{C572A759-6A51-4108-AA02-DFA0A04FC94B}">
-              <ma14:wrappingTextBoxFlag xmlns:ma14="http://schemas.microsoft.com/office/mac/drawingml/2011/main" xmlns="" val="0"/>
+              <ma14:wrappingTextBoxFlag xmlns="" xmlns:ma14="http://schemas.microsoft.com/office/mac/drawingml/2011/main" val="0"/>
             </a:ext>
           </a:extLst>
         </p:spPr>
@@ -6567,7 +6568,7 @@
           </a:prstGeom>
           <a:extLst>
             <a:ext uri="{C572A759-6A51-4108-AA02-DFA0A04FC94B}">
-              <ma14:wrappingTextBoxFlag xmlns:ma14="http://schemas.microsoft.com/office/mac/drawingml/2011/main" xmlns="" val="0"/>
+              <ma14:wrappingTextBoxFlag xmlns="" xmlns:ma14="http://schemas.microsoft.com/office/mac/drawingml/2011/main" val="0"/>
             </a:ext>
           </a:extLst>
         </p:spPr>
@@ -7275,7 +7276,7 @@
           </a:prstGeom>
           <a:extLst>
             <a:ext uri="{C572A759-6A51-4108-AA02-DFA0A04FC94B}">
-              <ma14:wrappingTextBoxFlag xmlns:ma14="http://schemas.microsoft.com/office/mac/drawingml/2011/main" xmlns="" val="0"/>
+              <ma14:wrappingTextBoxFlag xmlns="" xmlns:ma14="http://schemas.microsoft.com/office/mac/drawingml/2011/main" val="0"/>
             </a:ext>
           </a:extLst>
         </p:spPr>
@@ -7659,7 +7660,7 @@
         </p:nvSpPr>
         <p:spPr>
           <a:xfrm>
-            <a:off x="7132320" y="2624328"/>
+            <a:off x="7132320" y="2557400"/>
             <a:ext cx="384048" cy="384048"/>
           </a:xfrm>
           <a:prstGeom prst="ellipse">
@@ -7714,7 +7715,7 @@
         </p:nvSpPr>
         <p:spPr>
           <a:xfrm>
-            <a:off x="7699248" y="2624328"/>
+            <a:off x="7699248" y="2557400"/>
             <a:ext cx="3749039" cy="384048"/>
           </a:xfrm>
           <a:prstGeom prst="rect">
@@ -7751,7 +7752,7 @@
         </p:nvSpPr>
         <p:spPr>
           <a:xfrm>
-            <a:off x="7132320" y="3191256"/>
+            <a:off x="7132320" y="3057400"/>
             <a:ext cx="384048" cy="384048"/>
           </a:xfrm>
           <a:prstGeom prst="ellipse">
@@ -7806,7 +7807,7 @@
         </p:nvSpPr>
         <p:spPr>
           <a:xfrm>
-            <a:off x="7699248" y="3191256"/>
+            <a:off x="7699248" y="3057400"/>
             <a:ext cx="3749039" cy="384048"/>
           </a:xfrm>
           <a:prstGeom prst="rect">
@@ -7830,7 +7831,7 @@
                 </a:solidFill>
                 <a:latin typeface="Calibri"/>
               </a:rPr>
-              <a:t>Detailed plan in plans/, numbered and named</a:t>
+              <a:t>Say "initialize": docs, folders, plans</a:t>
             </a:r>
           </a:p>
         </p:txBody>
@@ -7843,7 +7844,7 @@
         </p:nvSpPr>
         <p:spPr>
           <a:xfrm>
-            <a:off x="7132320" y="3758184"/>
+            <a:off x="7132320" y="3557400"/>
             <a:ext cx="384048" cy="384048"/>
           </a:xfrm>
           <a:prstGeom prst="ellipse">
@@ -7898,7 +7899,7 @@
         </p:nvSpPr>
         <p:spPr>
           <a:xfrm>
-            <a:off x="7699248" y="3758184"/>
+            <a:off x="7699248" y="3557400"/>
             <a:ext cx="3749039" cy="384048"/>
           </a:xfrm>
           <a:prstGeom prst="rect">
@@ -7922,7 +7923,7 @@
                 </a:solidFill>
                 <a:latin typeface="Calibri"/>
               </a:rPr>
-              <a:t>progress.md tracks everything</a:t>
+              <a:t>Detailed plan in plans/, numbered</a:t>
             </a:r>
           </a:p>
         </p:txBody>
@@ -7935,7 +7936,7 @@
         </p:nvSpPr>
         <p:spPr>
           <a:xfrm>
-            <a:off x="7132320" y="4325112"/>
+            <a:off x="7132320" y="4057400"/>
             <a:ext cx="384048" cy="384048"/>
           </a:xfrm>
           <a:prstGeom prst="ellipse">
@@ -7990,7 +7991,7 @@
         </p:nvSpPr>
         <p:spPr>
           <a:xfrm>
-            <a:off x="7699248" y="4325112"/>
+            <a:off x="7699248" y="4057400"/>
             <a:ext cx="3749039" cy="384048"/>
           </a:xfrm>
           <a:prstGeom prst="rect">
@@ -8014,7 +8015,7 @@
                 </a:solidFill>
                 <a:latin typeface="Calibri"/>
               </a:rPr>
-              <a:t>Iterate: build, verify, self-correct</a:t>
+              <a:t>progress.md tracks everything</a:t>
             </a:r>
           </a:p>
         </p:txBody>
@@ -8027,7 +8028,7 @@
         </p:nvSpPr>
         <p:spPr>
           <a:xfrm>
-            <a:off x="7132320" y="4892040"/>
+            <a:off x="7132320" y="4557400"/>
             <a:ext cx="384048" cy="384048"/>
           </a:xfrm>
           <a:prstGeom prst="ellipse">
@@ -8082,7 +8083,99 @@
         </p:nvSpPr>
         <p:spPr>
           <a:xfrm>
-            <a:off x="7699248" y="4892040"/>
+            <a:off x="7699248" y="4557400"/>
+            <a:ext cx="3749039" cy="384048"/>
+          </a:xfrm>
+          <a:prstGeom prst="rect">
+            <a:avLst/>
+          </a:prstGeom>
+          <a:noFill/>
+        </p:spPr>
+        <p:txBody>
+          <a:bodyPr wrap="square" lIns="0" tIns="0" rIns="0" bIns="0" anchor="ctr">
+            <a:spAutoFit/>
+          </a:bodyPr>
+          <a:lstStyle/>
+          <a:p>
+            <a:pPr marL="0" indent="0">
+              <a:buNone/>
+            </a:pPr>
+            <a:r>
+              <a:rPr sz="1600" b="0" i="0">
+                <a:solidFill>
+                  <a:srgbClr val="F2F6FC"/>
+                </a:solidFill>
+                <a:latin typeface="Calibri"/>
+              </a:rPr>
+              <a:t>Iterate: build, verify, self-correct</a:t>
+            </a:r>
+          </a:p>
+        </p:txBody>
+      </p:sp>
+      <p:sp>
+        <p:nvSpPr>
+          <p:cNvPr id="30" name="Oval 16"/>
+          <p:cNvSpPr/>
+          <p:nvPr/>
+        </p:nvSpPr>
+        <p:spPr>
+          <a:xfrm>
+            <a:off x="7132320" y="5057400"/>
+            <a:ext cx="384048" cy="384048"/>
+          </a:xfrm>
+          <a:prstGeom prst="ellipse">
+            <a:avLst/>
+          </a:prstGeom>
+          <a:solidFill>
+            <a:srgbClr val="38BDF8"/>
+          </a:solidFill>
+          <a:ln>
+            <a:noFill/>
+          </a:ln>
+          <a:effectLst/>
+        </p:spPr>
+        <p:style>
+          <a:lnRef idx="1">
+            <a:schemeClr val="accent1"/>
+          </a:lnRef>
+          <a:fillRef idx="3">
+            <a:schemeClr val="accent1"/>
+          </a:fillRef>
+          <a:effectRef idx="2">
+            <a:schemeClr val="accent1"/>
+          </a:effectRef>
+          <a:fontRef idx="minor">
+            <a:schemeClr val="lt1"/>
+          </a:fontRef>
+        </p:style>
+        <p:txBody>
+          <a:bodyPr wrap="square" lIns="0" tIns="0" rIns="0" bIns="0" rtlCol="0" anchor="ctr"/>
+          <a:lstStyle/>
+          <a:p>
+            <a:pPr marL="0" indent="0" algn="ctr">
+              <a:buNone/>
+            </a:pPr>
+            <a:r>
+              <a:rPr sz="1600" b="1" i="0">
+                <a:solidFill>
+                  <a:srgbClr val="0B1F3A"/>
+                </a:solidFill>
+                <a:latin typeface="Calibri"/>
+              </a:rPr>
+              <a:t>7</a:t>
+            </a:r>
+          </a:p>
+        </p:txBody>
+      </p:sp>
+      <p:sp>
+        <p:nvSpPr>
+          <p:cNvPr id="31" name="TextBox 17"/>
+          <p:cNvSpPr txBox="1"/>
+          <p:nvPr/>
+        </p:nvSpPr>
+        <p:spPr>
+          <a:xfrm>
+            <a:off x="7699248" y="5057400"/>
             <a:ext cx="3749039" cy="384048"/>
           </a:xfrm>
           <a:prstGeom prst="rect">
@@ -8215,7 +8308,7 @@
           </a:prstGeom>
           <a:extLst>
             <a:ext uri="{C572A759-6A51-4108-AA02-DFA0A04FC94B}">
-              <ma14:wrappingTextBoxFlag xmlns:ma14="http://schemas.microsoft.com/office/mac/drawingml/2011/main" xmlns="" val="0"/>
+              <ma14:wrappingTextBoxFlag xmlns="" xmlns:ma14="http://schemas.microsoft.com/office/mac/drawingml/2011/main" val="0"/>
             </a:ext>
           </a:extLst>
         </p:spPr>
@@ -9396,7 +9489,7 @@
           </a:prstGeom>
           <a:extLst>
             <a:ext uri="{C572A759-6A51-4108-AA02-DFA0A04FC94B}">
-              <ma14:wrappingTextBoxFlag xmlns:ma14="http://schemas.microsoft.com/office/mac/drawingml/2011/main" xmlns="" val="0"/>
+              <ma14:wrappingTextBoxFlag xmlns="" xmlns:ma14="http://schemas.microsoft.com/office/mac/drawingml/2011/main" val="0"/>
             </a:ext>
           </a:extLst>
         </p:spPr>
@@ -10496,7 +10589,7 @@
           </a:prstGeom>
           <a:extLst>
             <a:ext uri="{C572A759-6A51-4108-AA02-DFA0A04FC94B}">
-              <ma14:wrappingTextBoxFlag xmlns:ma14="http://schemas.microsoft.com/office/mac/drawingml/2011/main" xmlns="" val="0"/>
+              <ma14:wrappingTextBoxFlag xmlns="" xmlns:ma14="http://schemas.microsoft.com/office/mac/drawingml/2011/main" val="0"/>
             </a:ext>
           </a:extLst>
         </p:spPr>
@@ -10864,7 +10957,7 @@
                 </a:solidFill>
                 <a:latin typeface="Calibri"/>
               </a:rPr>
-              <a:t>Decisions are written down, not kept in my head</a:t>
+              <a:t>Decisions are made out loud; the next step writes them down</a:t>
             </a:r>
           </a:p>
         </p:txBody>
@@ -11069,7 +11162,7 @@
                 </a:solidFill>
                 <a:latin typeface="Calibri"/>
               </a:rPr>
-              <a:t>Step 3: </a:t>
+              <a:t>Then say </a:t>
             </a:r>
             <a:r>
               <a:rPr sz="3000" b="1" i="0">
@@ -11078,16 +11171,7 @@
                 </a:solidFill>
                 <a:latin typeface="Calibri"/>
               </a:rPr>
-              <a:t>a detailed plan</a:t>
-            </a:r>
-            <a:r>
-              <a:rPr sz="3000" b="1" i="0">
-                <a:solidFill>
-                  <a:srgbClr val="F2F6FC"/>
-                </a:solidFill>
-                <a:latin typeface="Calibri"/>
-              </a:rPr>
-              <a:t>, numbered and named</a:t>
+              <a:t>“initialize”: docs and project, done</a:t>
             </a:r>
             <a:endParaRPr lang="en-US" sz="3000" dirty="0"/>
           </a:p>
@@ -11113,7 +11197,7 @@
           </a:prstGeom>
           <a:extLst>
             <a:ext uri="{C572A759-6A51-4108-AA02-DFA0A04FC94B}">
-              <ma14:wrappingTextBoxFlag xmlns:ma14="http://schemas.microsoft.com/office/mac/drawingml/2011/main" xmlns="" val="0"/>
+              <ma14:wrappingTextBoxFlag xmlns="" xmlns:ma14="http://schemas.microsoft.com/office/mac/drawingml/2011/main" val="0"/>
             </a:ext>
           </a:extLst>
         </p:spPr>
@@ -11150,20 +11234,18 @@
         <p:spPr>
           <a:xfrm>
             <a:off x="548640" y="1554480"/>
-            <a:ext cx="4754880" cy="1600200"/>
+            <a:ext cx="5394960" cy="2880360"/>
           </a:xfrm>
           <a:prstGeom prst="roundRect">
             <a:avLst>
-              <a:gd name="adj" fmla="val 5714"/>
+              <a:gd name="adj" fmla="val 4761"/>
             </a:avLst>
           </a:prstGeom>
           <a:solidFill>
-            <a:srgbClr val="081628"/>
+            <a:srgbClr val="12305A"/>
           </a:solidFill>
-          <a:ln w="12700">
-            <a:solidFill>
-              <a:srgbClr val="1E3F6F"/>
-            </a:solidFill>
+          <a:ln>
+            <a:noFill/>
           </a:ln>
           <a:effectLst/>
         </p:spPr>
@@ -11198,8 +11280,8 @@
         </p:nvSpPr>
         <p:spPr>
           <a:xfrm>
-            <a:off x="777240" y="1719072"/>
-            <a:ext cx="4297680" cy="1325880"/>
+            <a:off x="777240" y="1737360"/>
+            <a:ext cx="4937760" cy="411480"/>
           </a:xfrm>
           <a:prstGeom prst="rect">
             <a:avLst/>
@@ -11216,82 +11298,120 @@
               <a:buNone/>
             </a:pPr>
             <a:r>
-              <a:rPr sz="1600" b="0" i="0">
+              <a:rPr sz="2000" b="1" i="0">
                 <a:solidFill>
                   <a:srgbClr val="F2F6FC"/>
                 </a:solidFill>
-                <a:latin typeface="Courier New"/>
-              </a:rPr>
-              <a:t>plans/</a:t>
-            </a:r>
-          </a:p>
-          <a:p>
-            <a:pPr marL="0" indent="0">
+                <a:latin typeface="Calibri"/>
+              </a:rPr>
+              <a:t>Input: talk, files, or both</a:t>
+            </a:r>
+          </a:p>
+        </p:txBody>
+      </p:sp>
+      <p:sp>
+        <p:nvSpPr>
+          <p:cNvPr id="6" name="TextBox 27"/>
+          <p:cNvSpPr txBox="1"/>
+          <p:nvPr/>
+        </p:nvSpPr>
+        <p:spPr>
+          <a:xfrm>
+            <a:off x="777240" y="2212848"/>
+            <a:ext cx="4937760" cy="2011680"/>
+          </a:xfrm>
+          <a:prstGeom prst="rect">
+            <a:avLst/>
+          </a:prstGeom>
+          <a:noFill/>
+        </p:spPr>
+        <p:txBody>
+          <a:bodyPr wrap="square" lIns="0" tIns="0" rIns="0" bIns="0" anchor="t">
+            <a:spAutoFit/>
+          </a:bodyPr>
+          <a:lstStyle/>
+          <a:p>
+            <a:pPr marL="228600" indent="-228600">
+              <a:buChar char="•"/>
+            </a:pPr>
+            <a:r>
+              <a:rPr sz="1800" b="1" i="0">
+                <a:solidFill>
+                  <a:srgbClr val="38BDF8"/>
+                </a:solidFill>
+                <a:latin typeface="Calibri"/>
+              </a:rPr>
+              <a:t>Talked it through  </a:t>
+            </a:r>
+            <a:r>
+              <a:rPr sz="1800" b="0" i="0">
+                <a:solidFill>
+                  <a:srgbClr val="F2F6FC"/>
+                </a:solidFill>
+                <a:latin typeface="Calibri"/>
+              </a:rPr>
+              <a:t>ideas, doubts and decisions are in the chat</a:t>
+            </a:r>
+          </a:p>
+          <a:p>
+            <a:pPr marL="228600" indent="-228600">
               <a:spcBef>
-                <a:spcPts val="0"/>
+                <a:spcPts val="1000"/>
               </a:spcBef>
-              <a:buNone/>
-            </a:pPr>
-            <a:r>
-              <a:rPr sz="1600" b="0" i="0">
+              <a:buChar char="•"/>
+            </a:pPr>
+            <a:r>
+              <a:rPr sz="1800" b="1" i="0">
+                <a:solidFill>
+                  <a:srgbClr val="38BDF8"/>
+                </a:solidFill>
+                <a:latin typeface="Calibri"/>
+              </a:rPr>
+              <a:t>Or no talk at all  </a:t>
+            </a:r>
+            <a:r>
+              <a:rPr sz="1800" b="0" i="0">
                 <a:solidFill>
                   <a:srgbClr val="F2F6FC"/>
                 </a:solidFill>
-                <a:latin typeface="Courier New"/>
-              </a:rPr>
-              <a:t>  001-plan-report.md</a:t>
-            </a:r>
-          </a:p>
-          <a:p>
-            <a:pPr marL="0" indent="0">
+                <a:latin typeface="Calibri"/>
+              </a:rPr>
+              <a:t>prints, briefs and notes pasted into docs/ and data/</a:t>
+            </a:r>
+          </a:p>
+          <a:p>
+            <a:pPr marL="228600" indent="-228600">
               <a:spcBef>
-                <a:spcPts val="0"/>
+                <a:spcPts val="1000"/>
               </a:spcBef>
-              <a:buNone/>
-            </a:pPr>
-            <a:r>
-              <a:rPr sz="1600" b="0" i="0">
+              <a:buChar char="•"/>
+            </a:pPr>
+            <a:r>
+              <a:rPr sz="1800" b="0" i="0">
                 <a:solidFill>
                   <a:srgbClr val="F2F6FC"/>
                 </a:solidFill>
-                <a:latin typeface="Courier New"/>
-              </a:rPr>
-              <a:t>  002-plan-dashboard.md</a:t>
-            </a:r>
-          </a:p>
-          <a:p>
-            <a:pPr marL="0" indent="0">
-              <a:spcBef>
-                <a:spcPts val="0"/>
-              </a:spcBef>
-              <a:buNone/>
-            </a:pPr>
-            <a:r>
-              <a:rPr sz="1600" b="0" i="0">
-                <a:solidFill>
-                  <a:srgbClr val="F2F6FC"/>
-                </a:solidFill>
-                <a:latin typeface="Courier New"/>
-              </a:rPr>
-              <a:t>  progress.md</a:t>
-            </a:r>
-          </a:p>
-        </p:txBody>
-      </p:sp>
-      <p:sp>
-        <p:nvSpPr>
-          <p:cNvPr id="6" name="Rounded Rectangle 27"/>
+                <a:latin typeface="Calibri"/>
+              </a:rPr>
+              <a:t>Either is enough: I just ask Claude to initialize</a:t>
+            </a:r>
+          </a:p>
+        </p:txBody>
+      </p:sp>
+      <p:sp>
+        <p:nvSpPr>
+          <p:cNvPr id="7" name="Rounded Rectangle 28"/>
           <p:cNvSpPr/>
           <p:nvPr/>
         </p:nvSpPr>
         <p:spPr>
           <a:xfrm>
-            <a:off x="548640" y="3337560"/>
-            <a:ext cx="4754880" cy="2286000"/>
+            <a:off x="6245352" y="1554480"/>
+            <a:ext cx="5394960" cy="2880360"/>
           </a:xfrm>
           <a:prstGeom prst="roundRect">
             <a:avLst>
-              <a:gd name="adj" fmla="val 6000"/>
+              <a:gd name="adj" fmla="val 4761"/>
             </a:avLst>
           </a:prstGeom>
           <a:solidFill>
@@ -11327,14 +11447,14 @@
       </p:sp>
       <p:sp>
         <p:nvSpPr>
-          <p:cNvPr id="7" name="TextBox 28"/>
-          <p:cNvSpPr txBox="1"/>
-          <p:nvPr/>
-        </p:nvSpPr>
-        <p:spPr>
-          <a:xfrm>
-            <a:off x="777240" y="3474720"/>
-            <a:ext cx="4297680" cy="276999"/>
+          <p:cNvPr id="8" name="TextBox 29"/>
+          <p:cNvSpPr txBox="1"/>
+          <p:nvPr/>
+        </p:nvSpPr>
+        <p:spPr>
+          <a:xfrm>
+            <a:off x="6473952" y="1737360"/>
+            <a:ext cx="4937760" cy="411480"/>
           </a:xfrm>
           <a:prstGeom prst="rect">
             <a:avLst/>
@@ -11351,45 +11471,27 @@
               <a:buNone/>
             </a:pPr>
             <a:r>
-              <a:rPr sz="1800" b="1" i="0">
-                <a:solidFill>
-                  <a:srgbClr val="38BDF8"/>
+              <a:rPr sz="2000" b="1" i="0">
+                <a:solidFill>
+                  <a:srgbClr val="F2F6FC"/>
                 </a:solidFill>
                 <a:latin typeface="Calibri"/>
               </a:rPr>
-              <a:t>My </a:t>
-            </a:r>
-            <a:r>
-              <a:rPr lang="pt-BR" sz="1800" b="1" i="0">
-                <a:solidFill>
-                  <a:srgbClr val="38BDF8"/>
-                </a:solidFill>
-                <a:latin typeface="Calibri"/>
-              </a:rPr>
-              <a:t>instructions</a:t>
-            </a:r>
-            <a:r>
-              <a:rPr sz="1800" b="1" i="0">
-                <a:solidFill>
-                  <a:srgbClr val="38BDF8"/>
-                </a:solidFill>
-                <a:latin typeface="Calibri"/>
-              </a:rPr>
-              <a:t> for plans</a:t>
-            </a:r>
-          </a:p>
-        </p:txBody>
-      </p:sp>
-      <p:sp>
-        <p:nvSpPr>
-          <p:cNvPr id="8" name="TextBox 29"/>
-          <p:cNvSpPr txBox="1"/>
-          <p:nvPr/>
-        </p:nvSpPr>
-        <p:spPr>
-          <a:xfrm>
-            <a:off x="777240" y="3931920"/>
-            <a:ext cx="4297680" cy="1645920"/>
+              <a:t>Output: docs, folders, plans</a:t>
+            </a:r>
+          </a:p>
+        </p:txBody>
+      </p:sp>
+      <p:sp>
+        <p:nvSpPr>
+          <p:cNvPr id="9" name="TextBox 27"/>
+          <p:cNvSpPr txBox="1"/>
+          <p:nvPr/>
+        </p:nvSpPr>
+        <p:spPr>
+          <a:xfrm>
+            <a:off x="6473952" y="2212848"/>
+            <a:ext cx="4937760" cy="2011680"/>
           </a:xfrm>
           <a:prstGeom prst="rect">
             <a:avLst/>
@@ -11406,82 +11508,109 @@
               <a:buChar char="•"/>
             </a:pPr>
             <a:r>
-              <a:rPr sz="1600" b="0" i="0">
+              <a:rPr sz="1800" b="1" i="0">
+                <a:solidFill>
+                  <a:srgbClr val="38BDF8"/>
+                </a:solidFill>
+                <a:latin typeface="Calibri"/>
+              </a:rPr>
+              <a:t>Docs  </a:t>
+            </a:r>
+            <a:r>
+              <a:rPr sz="1800" b="0" i="0">
                 <a:solidFill>
                   <a:srgbClr val="F2F6FC"/>
                 </a:solidFill>
                 <a:latin typeface="Calibri"/>
               </a:rPr>
-              <a:t>One file per effort: 001, 002, 003...</a:t>
+              <a:t>README, architecture, flow diagrams, decisions, open questions</a:t>
             </a:r>
           </a:p>
           <a:p>
             <a:pPr marL="228600" indent="-228600">
               <a:spcBef>
-                <a:spcPts val="500"/>
+                <a:spcPts val="1000"/>
               </a:spcBef>
               <a:buChar char="•"/>
             </a:pPr>
             <a:r>
-              <a:rPr sz="1600" b="0" i="0">
+              <a:rPr sz="1800" b="1" i="0">
+                <a:solidFill>
+                  <a:srgbClr val="38BDF8"/>
+                </a:solidFill>
+                <a:latin typeface="Calibri"/>
+              </a:rPr>
+              <a:t>Folders  </a:t>
+            </a:r>
+            <a:r>
+              <a:rPr sz="1800" b="0" i="0">
                 <a:solidFill>
                   <a:srgbClr val="F2F6FC"/>
                 </a:solidFill>
                 <a:latin typeface="Calibri"/>
               </a:rPr>
-              <a:t>Never rewrite an old plan for new work</a:t>
+              <a:t>docs/ data/ src/ notebooks/ outputs/ test/ plans/</a:t>
             </a:r>
           </a:p>
           <a:p>
             <a:pPr marL="228600" indent="-228600">
               <a:spcBef>
-                <a:spcPts val="500"/>
+                <a:spcPts val="1000"/>
               </a:spcBef>
               <a:buChar char="•"/>
             </a:pPr>
             <a:r>
-              <a:rPr sz="1600" b="0" i="0">
+              <a:rPr sz="1800" b="1" i="0">
+                <a:solidFill>
+                  <a:srgbClr val="38BDF8"/>
+                </a:solidFill>
+                <a:latin typeface="Calibri"/>
+              </a:rPr>
+              <a:t>Plans  </a:t>
+            </a:r>
+            <a:r>
+              <a:rPr sz="1800" b="0" i="0">
                 <a:solidFill>
                   <a:srgbClr val="F2F6FC"/>
                 </a:solidFill>
                 <a:latin typeface="Calibri"/>
               </a:rPr>
-              <a:t>Phases, each with tests and an exit gate</a:t>
+              <a:t>001-plan-&lt;name&gt;.md and progress.md</a:t>
             </a:r>
           </a:p>
           <a:p>
             <a:pPr marL="228600" indent="-228600">
               <a:spcBef>
-                <a:spcPts val="500"/>
+                <a:spcPts val="1000"/>
               </a:spcBef>
               <a:buChar char="•"/>
             </a:pPr>
             <a:r>
-              <a:rPr sz="1600" b="0" i="0">
+              <a:rPr sz="1800" b="0" i="0">
                 <a:solidFill>
                   <a:srgbClr val="F2F6FC"/>
                 </a:solidFill>
                 <a:latin typeface="Calibri"/>
               </a:rPr>
-              <a:t>Big work also gets progress.md</a:t>
-            </a:r>
-          </a:p>
-        </p:txBody>
-      </p:sp>
-      <p:sp>
-        <p:nvSpPr>
-          <p:cNvPr id="9" name="Rounded Rectangle 30"/>
+              <a:t>Claude writes whatever the project needs</a:t>
+            </a:r>
+          </a:p>
+        </p:txBody>
+      </p:sp>
+      <p:sp>
+        <p:nvSpPr>
+          <p:cNvPr id="10" name="Rounded Rectangle 31"/>
           <p:cNvSpPr/>
           <p:nvPr/>
         </p:nvSpPr>
         <p:spPr>
           <a:xfrm>
-            <a:off x="5577840" y="1554480"/>
-            <a:ext cx="6062472" cy="4069080"/>
+            <a:off x="548640" y="4617720"/>
+            <a:ext cx="11091672" cy="1097280"/>
           </a:xfrm>
           <a:prstGeom prst="roundRect">
             <a:avLst>
-              <a:gd name="adj" fmla="val 2247"/>
+              <a:gd name="adj" fmla="val 8333"/>
             </a:avLst>
           </a:prstGeom>
           <a:solidFill>
@@ -11519,14 +11648,14 @@
       </p:sp>
       <p:sp>
         <p:nvSpPr>
-          <p:cNvPr id="10" name="TextBox 31"/>
-          <p:cNvSpPr txBox="1"/>
-          <p:nvPr/>
-        </p:nvSpPr>
-        <p:spPr>
-          <a:xfrm>
-            <a:off x="5806440" y="1719072"/>
-            <a:ext cx="5605272" cy="3794760"/>
+          <p:cNvPr id="11" name="TextBox 32"/>
+          <p:cNvSpPr txBox="1"/>
+          <p:nvPr/>
+        </p:nvSpPr>
+        <p:spPr>
+          <a:xfrm>
+            <a:off x="777240" y="4782312"/>
+            <a:ext cx="10634472" cy="822959"/>
           </a:xfrm>
           <a:prstGeom prst="rect">
             <a:avLst/>
@@ -11545,28 +11674,11 @@
             <a:r>
               <a:rPr sz="1500" b="0" i="0">
                 <a:solidFill>
-                  <a:srgbClr val="38BDF8"/>
+                  <a:srgbClr val="F2F6FC"/>
                 </a:solidFill>
                 <a:latin typeface="Courier New"/>
               </a:rPr>
-              <a:t># 001-plan-monthly-report</a:t>
-            </a:r>
-          </a:p>
-          <a:p>
-            <a:pPr marL="0" indent="0">
-              <a:spcBef>
-                <a:spcPts val="800"/>
-              </a:spcBef>
-              <a:buNone/>
-            </a:pPr>
-            <a:r>
-              <a:rPr sz="1500" b="0" i="0">
-                <a:solidFill>
-                  <a:srgbClr val="F2F6FC"/>
-                </a:solidFill>
-                <a:latin typeface="Courier New"/>
-              </a:rPr>
-              <a:t>## Phase 1: load and clean data</a:t>
+              <a:t>&gt; Initialize the project. Use our conversation and what is in docs/ and data/.</a:t>
             </a:r>
           </a:p>
           <a:p>
@@ -11583,150 +11695,14 @@
                 </a:solidFill>
                 <a:latin typeface="Courier New"/>
               </a:rPr>
-              <a:t>- Write load.py, clean the sales sheet</a:t>
-            </a:r>
-          </a:p>
-          <a:p>
-            <a:pPr marL="0" indent="0">
-              <a:spcBef>
-                <a:spcPts val="0"/>
-              </a:spcBef>
-              <a:buNone/>
-            </a:pPr>
-            <a:r>
-              <a:rPr sz="1500" b="0" i="0">
-                <a:solidFill>
-                  <a:srgbClr val="F2F6FC"/>
-                </a:solidFill>
-                <a:latin typeface="Courier New"/>
-              </a:rPr>
-              <a:t>- Tests: row count = source</a:t>
-            </a:r>
-          </a:p>
-          <a:p>
-            <a:pPr marL="0" indent="0">
-              <a:spcBef>
-                <a:spcPts val="0"/>
-              </a:spcBef>
-              <a:buNone/>
-            </a:pPr>
-            <a:r>
-              <a:rPr sz="1500" b="0" i="0">
-                <a:solidFill>
-                  <a:srgbClr val="5EEAD4"/>
-                </a:solidFill>
-                <a:latin typeface="Courier New"/>
-              </a:rPr>
-              <a:t>- Exit gate: pytest, ruff, mypy pass</a:t>
-            </a:r>
-          </a:p>
-          <a:p>
-            <a:pPr marL="0" indent="0">
-              <a:spcBef>
-                <a:spcPts val="800"/>
-              </a:spcBef>
-              <a:buNone/>
-            </a:pPr>
-            <a:r>
-              <a:rPr sz="1500" b="0" i="0">
-                <a:solidFill>
-                  <a:srgbClr val="F2F6FC"/>
-                </a:solidFill>
-                <a:latin typeface="Courier New"/>
-              </a:rPr>
-              <a:t>## Phase 2: build the Word report</a:t>
-            </a:r>
-          </a:p>
-          <a:p>
-            <a:pPr marL="0" indent="0">
-              <a:spcBef>
-                <a:spcPts val="0"/>
-              </a:spcBef>
-              <a:buNone/>
-            </a:pPr>
-            <a:r>
-              <a:rPr sz="1500" b="0" i="0">
-                <a:solidFill>
-                  <a:srgbClr val="F2F6FC"/>
-                </a:solidFill>
-                <a:latin typeface="Courier New"/>
-              </a:rPr>
-              <a:t>- Fill the template from docs/</a:t>
-            </a:r>
-          </a:p>
-          <a:p>
-            <a:pPr marL="0" indent="0">
-              <a:spcBef>
-                <a:spcPts val="0"/>
-              </a:spcBef>
-              <a:buNone/>
-            </a:pPr>
-            <a:r>
-              <a:rPr sz="1500" b="0" i="0">
-                <a:solidFill>
-                  <a:srgbClr val="5EEAD4"/>
-                </a:solidFill>
-                <a:latin typeface="Courier New"/>
-              </a:rPr>
-              <a:t>- Exit gate: all 6 fields filled,</a:t>
-            </a:r>
-          </a:p>
-          <a:p>
-            <a:pPr marL="0" indent="0">
-              <a:spcBef>
-                <a:spcPts val="0"/>
-              </a:spcBef>
-              <a:buNone/>
-            </a:pPr>
-            <a:r>
-              <a:rPr sz="1500" b="0" i="0">
-                <a:solidFill>
-                  <a:srgbClr val="5EEAD4"/>
-                </a:solidFill>
-                <a:latin typeface="Courier New"/>
-              </a:rPr>
-              <a:t>  numbers match the sheet</a:t>
-            </a:r>
-          </a:p>
-          <a:p>
-            <a:pPr marL="0" indent="0">
-              <a:spcBef>
-                <a:spcPts val="800"/>
-              </a:spcBef>
-              <a:buNone/>
-            </a:pPr>
-            <a:r>
-              <a:rPr sz="1500" b="0" i="0">
-                <a:solidFill>
-                  <a:srgbClr val="F2F6FC"/>
-                </a:solidFill>
-                <a:latin typeface="Courier New"/>
-              </a:rPr>
-              <a:t>## Phase 3: review and export</a:t>
-            </a:r>
-          </a:p>
-          <a:p>
-            <a:pPr marL="0" indent="0">
-              <a:spcBef>
-                <a:spcPts val="0"/>
-              </a:spcBef>
-              <a:buNone/>
-            </a:pPr>
-            <a:r>
-              <a:rPr sz="1500" b="0" i="0">
-                <a:solidFill>
-                  <a:srgbClr val="5EEAD4"/>
-                </a:solidFill>
-                <a:latin typeface="Courier New"/>
-              </a:rPr>
-              <a:t>- Exit gate: no TODO text left</a:t>
-            </a:r>
-          </a:p>
-        </p:txBody>
-      </p:sp>
-      <p:sp>
-        <p:nvSpPr>
-          <p:cNvPr id="11" name="TextBox 32"/>
+              <a:t>  Write the README, diagrams, decisions and open questions, then the folders and plans.</a:t>
+            </a:r>
+          </a:p>
+        </p:txBody>
+      </p:sp>
+      <p:sp>
+        <p:nvSpPr>
+          <p:cNvPr id="12" name="TextBox 33"/>
           <p:cNvSpPr txBox="1"/>
           <p:nvPr/>
         </p:nvSpPr>
@@ -11756,7 +11732,7 @@
                 </a:solidFill>
                 <a:latin typeface="Calibri"/>
               </a:rPr>
-              <a:t>Ask Claude: "Make a detailed plan in phases, with a test plan and an exit gate for each."</a:t>
+              <a:t>The skill is "initialize-project": it runs when I ask, so every project starts the same way.</a:t>
             </a:r>
           </a:p>
         </p:txBody>
@@ -12291,7 +12267,7 @@
                 <a:ea typeface="Calibri" pitchFamily="34" charset="-122"/>
                 <a:cs typeface="Calibri" pitchFamily="34" charset="-120"/>
               </a:rPr>
-              <a:t>The Ralph loop: docs, plans, progress.md, verify, self-correct</a:t>
+              <a:t>The Ralph loop: docs, initialize, plans, progress.md, verify</a:t>
             </a:r>
             <a:endParaRPr lang="en-US" sz="1800" dirty="0"/>
           </a:p>
@@ -12559,7 +12535,7 @@
                 <a:ea typeface="Calibri" pitchFamily="34" charset="-122"/>
                 <a:cs typeface="Calibri" pitchFamily="34" charset="-120"/>
               </a:rPr>
-              <a:t>Slides 15-24</a:t>
+              <a:t>Slides 15-25</a:t>
             </a:r>
             <a:endParaRPr lang="en-US" sz="1400" dirty="0"/>
           </a:p>
@@ -12598,7 +12574,7 @@
                 <a:ea typeface="Calibri" pitchFamily="34" charset="-122"/>
                 <a:cs typeface="Calibri" pitchFamily="34" charset="-120"/>
               </a:rPr>
-              <a:t>Slides 25-31</a:t>
+              <a:t>Slides 26-32</a:t>
             </a:r>
             <a:endParaRPr lang="en-US" sz="1400" dirty="0"/>
           </a:p>
@@ -12624,7 +12600,7 @@
           </a:prstGeom>
           <a:extLst>
             <a:ext uri="{C572A759-6A51-4108-AA02-DFA0A04FC94B}">
-              <ma14:wrappingTextBoxFlag xmlns:ma14="http://schemas.microsoft.com/office/mac/drawingml/2011/main" xmlns="" val="0"/>
+              <ma14:wrappingTextBoxFlag xmlns="" xmlns:ma14="http://schemas.microsoft.com/office/mac/drawingml/2011/main" val="0"/>
             </a:ext>
           </a:extLst>
         </p:spPr>
@@ -12801,11 +12777,20 @@
             <a:r>
               <a:rPr sz="3000" b="1" i="0">
                 <a:solidFill>
+                  <a:srgbClr val="F2F6FC"/>
+                </a:solidFill>
+                <a:latin typeface="Calibri"/>
+              </a:rPr>
+              <a:t>Step 4: </a:t>
+            </a:r>
+            <a:r>
+              <a:rPr sz="3000" b="1" i="0">
+                <a:solidFill>
                   <a:srgbClr val="FF8A2B"/>
                 </a:solidFill>
                 <a:latin typeface="Calibri"/>
               </a:rPr>
-              <a:t>progress.md</a:t>
+              <a:t>a detailed plan</a:t>
             </a:r>
             <a:r>
               <a:rPr sz="3000" b="1" i="0">
@@ -12814,7 +12799,7 @@
                 </a:solidFill>
                 <a:latin typeface="Calibri"/>
               </a:rPr>
-              <a:t>: the file that drives the whole loop</a:t>
+              <a:t>, numbered and named</a:t>
             </a:r>
             <a:endParaRPr lang="en-US" sz="3000" dirty="0"/>
           </a:p>
@@ -12840,7 +12825,7 @@
           </a:prstGeom>
           <a:extLst>
             <a:ext uri="{C572A759-6A51-4108-AA02-DFA0A04FC94B}">
-              <ma14:wrappingTextBoxFlag xmlns:ma14="http://schemas.microsoft.com/office/mac/drawingml/2011/main" xmlns="" val="0"/>
+              <ma14:wrappingTextBoxFlag xmlns="" xmlns:ma14="http://schemas.microsoft.com/office/mac/drawingml/2011/main" val="0"/>
             </a:ext>
           </a:extLst>
         </p:spPr>
@@ -12877,11 +12862,11 @@
         <p:spPr>
           <a:xfrm>
             <a:off x="548640" y="1554480"/>
-            <a:ext cx="5394960" cy="4617720"/>
+            <a:ext cx="4754880" cy="1600200"/>
           </a:xfrm>
           <a:prstGeom prst="roundRect">
             <a:avLst>
-              <a:gd name="adj" fmla="val 1980"/>
+              <a:gd name="adj" fmla="val 5714"/>
             </a:avLst>
           </a:prstGeom>
           <a:solidFill>
@@ -12926,7 +12911,7 @@
         <p:spPr>
           <a:xfrm>
             <a:off x="777240" y="1719072"/>
-            <a:ext cx="4937760" cy="4343400"/>
+            <a:ext cx="4297680" cy="1325880"/>
           </a:xfrm>
           <a:prstGeom prst="rect">
             <a:avLst/>
@@ -12943,13 +12928,13 @@
               <a:buNone/>
             </a:pPr>
             <a:r>
-              <a:rPr sz="1400" b="0" i="0">
-                <a:solidFill>
-                  <a:srgbClr val="38BDF8"/>
+              <a:rPr sz="1600" b="0" i="0">
+                <a:solidFill>
+                  <a:srgbClr val="F2F6FC"/>
                 </a:solidFill>
                 <a:latin typeface="Courier New"/>
               </a:rPr>
-              <a:t># progress.md</a:t>
+              <a:t>plans/</a:t>
             </a:r>
           </a:p>
           <a:p>
@@ -12960,30 +12945,13 @@
               <a:buNone/>
             </a:pPr>
             <a:r>
-              <a:rPr sz="1400" b="0" i="0">
+              <a:rPr sz="1600" b="0" i="0">
                 <a:solidFill>
                   <a:srgbClr val="F2F6FC"/>
                 </a:solidFill>
                 <a:latin typeface="Courier New"/>
               </a:rPr>
-              <a:t>Status: phase 2 of 4, in progress</a:t>
-            </a:r>
-          </a:p>
-          <a:p>
-            <a:pPr marL="0" indent="0">
-              <a:spcBef>
-                <a:spcPts val="700"/>
-              </a:spcBef>
-              <a:buNone/>
-            </a:pPr>
-            <a:r>
-              <a:rPr sz="1400" b="0" i="0">
-                <a:solidFill>
-                  <a:srgbClr val="F2F6FC"/>
-                </a:solidFill>
-                <a:latin typeface="Courier New"/>
-              </a:rPr>
-              <a:t>## Done</a:t>
+              <a:t>  001-plan-report.md</a:t>
             </a:r>
           </a:p>
           <a:p>
@@ -12994,30 +12962,13 @@
               <a:buNone/>
             </a:pPr>
             <a:r>
-              <a:rPr sz="1400" b="0" i="0">
+              <a:rPr sz="1600" b="0" i="0">
                 <a:solidFill>
                   <a:srgbClr val="F2F6FC"/>
                 </a:solidFill>
                 <a:latin typeface="Courier New"/>
               </a:rPr>
-              <a:t>- P1 data loaded and cleaned</a:t>
-            </a:r>
-          </a:p>
-          <a:p>
-            <a:pPr marL="0" indent="0">
-              <a:spcBef>
-                <a:spcPts val="700"/>
-              </a:spcBef>
-              <a:buNone/>
-            </a:pPr>
-            <a:r>
-              <a:rPr sz="1400" b="0" i="0">
-                <a:solidFill>
-                  <a:srgbClr val="F2F6FC"/>
-                </a:solidFill>
-                <a:latin typeface="Courier New"/>
-              </a:rPr>
-              <a:t>## In progress</a:t>
+              <a:t>  002-plan-dashboard.md</a:t>
             </a:r>
           </a:p>
           <a:p>
@@ -13028,149 +12979,13 @@
               <a:buNone/>
             </a:pPr>
             <a:r>
-              <a:rPr sz="1400" b="0" i="0">
+              <a:rPr sz="1600" b="0" i="0">
                 <a:solidFill>
                   <a:srgbClr val="F2F6FC"/>
                 </a:solidFill>
                 <a:latin typeface="Courier New"/>
               </a:rPr>
-              <a:t>- P2 build the Word report</a:t>
-            </a:r>
-          </a:p>
-          <a:p>
-            <a:pPr marL="0" indent="0">
-              <a:spcBef>
-                <a:spcPts val="700"/>
-              </a:spcBef>
-              <a:buNone/>
-            </a:pPr>
-            <a:r>
-              <a:rPr sz="1400" b="0" i="0">
-                <a:solidFill>
-                  <a:srgbClr val="F2F6FC"/>
-                </a:solidFill>
-                <a:latin typeface="Courier New"/>
-              </a:rPr>
-              <a:t>## Next</a:t>
-            </a:r>
-          </a:p>
-          <a:p>
-            <a:pPr marL="0" indent="0">
-              <a:spcBef>
-                <a:spcPts val="0"/>
-              </a:spcBef>
-              <a:buNone/>
-            </a:pPr>
-            <a:r>
-              <a:rPr sz="1400" b="0" i="0">
-                <a:solidFill>
-                  <a:srgbClr val="F2F6FC"/>
-                </a:solidFill>
-                <a:latin typeface="Courier New"/>
-              </a:rPr>
-              <a:t>- P3 review, P4 export</a:t>
-            </a:r>
-          </a:p>
-          <a:p>
-            <a:pPr marL="0" indent="0">
-              <a:spcBef>
-                <a:spcPts val="700"/>
-              </a:spcBef>
-              <a:buNone/>
-            </a:pPr>
-            <a:r>
-              <a:rPr sz="1400" b="0" i="0">
-                <a:solidFill>
-                  <a:srgbClr val="5EEAD4"/>
-                </a:solidFill>
-                <a:latin typeface="Courier New"/>
-              </a:rPr>
-              <a:t>## Gate results (evidence)</a:t>
-            </a:r>
-          </a:p>
-          <a:p>
-            <a:pPr marL="0" indent="0">
-              <a:spcBef>
-                <a:spcPts val="0"/>
-              </a:spcBef>
-              <a:buNone/>
-            </a:pPr>
-            <a:r>
-              <a:rPr sz="1400" b="0" i="0">
-                <a:solidFill>
-                  <a:srgbClr val="5EEAD4"/>
-                </a:solidFill>
-                <a:latin typeface="Courier New"/>
-              </a:rPr>
-              <a:t>- P1: pytest 12 passed, ruff clean</a:t>
-            </a:r>
-          </a:p>
-          <a:p>
-            <a:pPr marL="0" indent="0">
-              <a:spcBef>
-                <a:spcPts val="700"/>
-              </a:spcBef>
-              <a:buNone/>
-            </a:pPr>
-            <a:r>
-              <a:rPr sz="1400" b="0" i="0">
-                <a:solidFill>
-                  <a:srgbClr val="F2F6FC"/>
-                </a:solidFill>
-                <a:latin typeface="Courier New"/>
-              </a:rPr>
-              <a:t>## Decisions</a:t>
-            </a:r>
-          </a:p>
-          <a:p>
-            <a:pPr marL="0" indent="0">
-              <a:spcBef>
-                <a:spcPts val="0"/>
-              </a:spcBef>
-              <a:buNone/>
-            </a:pPr>
-            <a:r>
-              <a:rPr sz="1400" b="0" i="0">
-                <a:solidFill>
-                  <a:srgbClr val="F2F6FC"/>
-                </a:solidFill>
-                <a:latin typeface="Courier New"/>
-              </a:rPr>
-              <a:t>- Use the Word template in docs/</a:t>
-            </a:r>
-          </a:p>
-          <a:p>
-            <a:pPr marL="0" indent="0">
-              <a:spcBef>
-                <a:spcPts val="700"/>
-              </a:spcBef>
-              <a:buNone/>
-            </a:pPr>
-            <a:r>
-              <a:rPr sz="1400" b="0" i="0">
-                <a:solidFill>
-                  <a:srgbClr val="FBBF24"/>
-                </a:solidFill>
-                <a:latin typeface="Courier New"/>
-              </a:rPr>
-              <a:t>## Known issues</a:t>
-            </a:r>
-          </a:p>
-          <a:p>
-            <a:pPr marL="0" indent="0">
-              <a:spcBef>
-                <a:spcPts val="0"/>
-              </a:spcBef>
-              <a:buNone/>
-            </a:pPr>
-            <a:r>
-              <a:rPr sz="1400" b="0" i="0">
-                <a:solidFill>
-                  <a:srgbClr val="FBBF24"/>
-                </a:solidFill>
-                <a:latin typeface="Courier New"/>
-              </a:rPr>
-              <a:t>- 3 rows miss Client ID: fix in P2</a:t>
+              <a:t>  progress.md</a:t>
             </a:r>
           </a:p>
         </p:txBody>
@@ -13183,12 +12998,12 @@
         </p:nvSpPr>
         <p:spPr>
           <a:xfrm>
-            <a:off x="6217920" y="1554480"/>
-            <a:ext cx="5422392" cy="1051560"/>
+            <a:off x="548640" y="3337560"/>
+            <a:ext cx="4754880" cy="2286000"/>
           </a:xfrm>
           <a:prstGeom prst="roundRect">
             <a:avLst>
-              <a:gd name="adj" fmla="val 13043"/>
+              <a:gd name="adj" fmla="val 6000"/>
             </a:avLst>
           </a:prstGeom>
           <a:solidFill>
@@ -13230,8 +13045,8 @@
         </p:nvSpPr>
         <p:spPr>
           <a:xfrm>
-            <a:off x="6446520" y="1737360"/>
-            <a:ext cx="4965192" cy="347472"/>
+            <a:off x="777240" y="3474720"/>
+            <a:ext cx="4297680" cy="276999"/>
           </a:xfrm>
           <a:prstGeom prst="rect">
             <a:avLst/>
@@ -13250,11 +13065,29 @@
             <a:r>
               <a:rPr sz="1800" b="1" i="0">
                 <a:solidFill>
-                  <a:srgbClr val="F2F6FC"/>
+                  <a:srgbClr val="38BDF8"/>
                 </a:solidFill>
                 <a:latin typeface="Calibri"/>
               </a:rPr>
-              <a:t>Memory outside the chat</a:t>
+              <a:t>My </a:t>
+            </a:r>
+            <a:r>
+              <a:rPr lang="pt-BR" sz="1800" b="1" i="0">
+                <a:solidFill>
+                  <a:srgbClr val="38BDF8"/>
+                </a:solidFill>
+                <a:latin typeface="Calibri"/>
+              </a:rPr>
+              <a:t>instructions</a:t>
+            </a:r>
+            <a:r>
+              <a:rPr sz="1800" b="1" i="0">
+                <a:solidFill>
+                  <a:srgbClr val="38BDF8"/>
+                </a:solidFill>
+                <a:latin typeface="Calibri"/>
+              </a:rPr>
+              <a:t> for plans</a:t>
             </a:r>
           </a:p>
         </p:txBody>
@@ -13267,8 +13100,8 @@
         </p:nvSpPr>
         <p:spPr>
           <a:xfrm>
-            <a:off x="6446520" y="2148839"/>
-            <a:ext cx="4965192" cy="246887"/>
+            <a:off x="777240" y="3931920"/>
+            <a:ext cx="4297680" cy="1645920"/>
           </a:xfrm>
           <a:prstGeom prst="rect">
             <a:avLst/>
@@ -13281,17 +13114,68 @@
           </a:bodyPr>
           <a:lstStyle/>
           <a:p>
-            <a:pPr marL="0" indent="0">
-              <a:buNone/>
-            </a:pPr>
-            <a:r>
-              <a:rPr sz="1500" b="0" i="0">
-                <a:solidFill>
-                  <a:srgbClr val="A9BCD6"/>
+            <a:pPr marL="228600" indent="-228600">
+              <a:buChar char="•"/>
+            </a:pPr>
+            <a:r>
+              <a:rPr sz="1600" b="0" i="0">
+                <a:solidFill>
+                  <a:srgbClr val="F2F6FC"/>
                 </a:solidFill>
                 <a:latin typeface="Calibri"/>
               </a:rPr>
-              <a:t>A new chat or a new day: Claude re-reads it and continues</a:t>
+              <a:t>One file per effort: 001, 002, 003...</a:t>
+            </a:r>
+          </a:p>
+          <a:p>
+            <a:pPr marL="228600" indent="-228600">
+              <a:spcBef>
+                <a:spcPts val="500"/>
+              </a:spcBef>
+              <a:buChar char="•"/>
+            </a:pPr>
+            <a:r>
+              <a:rPr sz="1600" b="0" i="0">
+                <a:solidFill>
+                  <a:srgbClr val="F2F6FC"/>
+                </a:solidFill>
+                <a:latin typeface="Calibri"/>
+              </a:rPr>
+              <a:t>Never rewrite an old plan for new work</a:t>
+            </a:r>
+          </a:p>
+          <a:p>
+            <a:pPr marL="228600" indent="-228600">
+              <a:spcBef>
+                <a:spcPts val="500"/>
+              </a:spcBef>
+              <a:buChar char="•"/>
+            </a:pPr>
+            <a:r>
+              <a:rPr sz="1600" b="0" i="0">
+                <a:solidFill>
+                  <a:srgbClr val="F2F6FC"/>
+                </a:solidFill>
+                <a:latin typeface="Calibri"/>
+              </a:rPr>
+              <a:t>Phases, each with tests and an exit gate</a:t>
+            </a:r>
+          </a:p>
+          <a:p>
+            <a:pPr marL="228600" indent="-228600">
+              <a:spcBef>
+                <a:spcPts val="500"/>
+              </a:spcBef>
+              <a:buChar char="•"/>
+            </a:pPr>
+            <a:r>
+              <a:rPr sz="1600" b="0" i="0">
+                <a:solidFill>
+                  <a:srgbClr val="F2F6FC"/>
+                </a:solidFill>
+                <a:latin typeface="Calibri"/>
+              </a:rPr>
+              <a:t>Big work also gets progress.md</a:t>
             </a:r>
           </a:p>
         </p:txBody>
@@ -13304,19 +13188,21 @@
         </p:nvSpPr>
         <p:spPr>
           <a:xfrm>
-            <a:off x="6217920" y="2743200"/>
-            <a:ext cx="5422392" cy="1051560"/>
+            <a:off x="5577840" y="1554480"/>
+            <a:ext cx="6062472" cy="4069080"/>
           </a:xfrm>
           <a:prstGeom prst="roundRect">
             <a:avLst>
-              <a:gd name="adj" fmla="val 13043"/>
+              <a:gd name="adj" fmla="val 2247"/>
             </a:avLst>
           </a:prstGeom>
           <a:solidFill>
-            <a:srgbClr val="12305A"/>
+            <a:srgbClr val="081628"/>
           </a:solidFill>
-          <a:ln>
-            <a:noFill/>
+          <a:ln w="12700">
+            <a:solidFill>
+              <a:srgbClr val="1E3F6F"/>
+            </a:solidFill>
           </a:ln>
           <a:effectLst/>
         </p:spPr>
@@ -13351,8 +13237,8 @@
         </p:nvSpPr>
         <p:spPr>
           <a:xfrm>
-            <a:off x="6446520" y="2926080"/>
-            <a:ext cx="4965192" cy="347472"/>
+            <a:off x="5806440" y="1719072"/>
+            <a:ext cx="5605272" cy="3794760"/>
           </a:xfrm>
           <a:prstGeom prst="rect">
             <a:avLst/>
@@ -13369,13 +13255,183 @@
               <a:buNone/>
             </a:pPr>
             <a:r>
-              <a:rPr sz="1800" b="1" i="0">
+              <a:rPr sz="1500" b="0" i="0">
+                <a:solidFill>
+                  <a:srgbClr val="38BDF8"/>
+                </a:solidFill>
+                <a:latin typeface="Courier New"/>
+              </a:rPr>
+              <a:t># 001-plan-monthly-report</a:t>
+            </a:r>
+          </a:p>
+          <a:p>
+            <a:pPr marL="0" indent="0">
+              <a:spcBef>
+                <a:spcPts val="800"/>
+              </a:spcBef>
+              <a:buNone/>
+            </a:pPr>
+            <a:r>
+              <a:rPr sz="1500" b="0" i="0">
                 <a:solidFill>
                   <a:srgbClr val="F2F6FC"/>
                 </a:solidFill>
-                <a:latin typeface="Calibri"/>
-              </a:rPr>
-              <a:t>Evidence, not promises</a:t>
+                <a:latin typeface="Courier New"/>
+              </a:rPr>
+              <a:t>## Phase 1: load and clean data</a:t>
+            </a:r>
+          </a:p>
+          <a:p>
+            <a:pPr marL="0" indent="0">
+              <a:spcBef>
+                <a:spcPts val="0"/>
+              </a:spcBef>
+              <a:buNone/>
+            </a:pPr>
+            <a:r>
+              <a:rPr sz="1500" b="0" i="0">
+                <a:solidFill>
+                  <a:srgbClr val="F2F6FC"/>
+                </a:solidFill>
+                <a:latin typeface="Courier New"/>
+              </a:rPr>
+              <a:t>- Write load.py, clean the sales sheet</a:t>
+            </a:r>
+          </a:p>
+          <a:p>
+            <a:pPr marL="0" indent="0">
+              <a:spcBef>
+                <a:spcPts val="0"/>
+              </a:spcBef>
+              <a:buNone/>
+            </a:pPr>
+            <a:r>
+              <a:rPr sz="1500" b="0" i="0">
+                <a:solidFill>
+                  <a:srgbClr val="F2F6FC"/>
+                </a:solidFill>
+                <a:latin typeface="Courier New"/>
+              </a:rPr>
+              <a:t>- Tests: row count = source</a:t>
+            </a:r>
+          </a:p>
+          <a:p>
+            <a:pPr marL="0" indent="0">
+              <a:spcBef>
+                <a:spcPts val="0"/>
+              </a:spcBef>
+              <a:buNone/>
+            </a:pPr>
+            <a:r>
+              <a:rPr sz="1500" b="0" i="0">
+                <a:solidFill>
+                  <a:srgbClr val="5EEAD4"/>
+                </a:solidFill>
+                <a:latin typeface="Courier New"/>
+              </a:rPr>
+              <a:t>- Exit gate: pytest, ruff, mypy pass</a:t>
+            </a:r>
+          </a:p>
+          <a:p>
+            <a:pPr marL="0" indent="0">
+              <a:spcBef>
+                <a:spcPts val="800"/>
+              </a:spcBef>
+              <a:buNone/>
+            </a:pPr>
+            <a:r>
+              <a:rPr sz="1500" b="0" i="0">
+                <a:solidFill>
+                  <a:srgbClr val="F2F6FC"/>
+                </a:solidFill>
+                <a:latin typeface="Courier New"/>
+              </a:rPr>
+              <a:t>## Phase 2: build the Word report</a:t>
+            </a:r>
+          </a:p>
+          <a:p>
+            <a:pPr marL="0" indent="0">
+              <a:spcBef>
+                <a:spcPts val="0"/>
+              </a:spcBef>
+              <a:buNone/>
+            </a:pPr>
+            <a:r>
+              <a:rPr sz="1500" b="0" i="0">
+                <a:solidFill>
+                  <a:srgbClr val="F2F6FC"/>
+                </a:solidFill>
+                <a:latin typeface="Courier New"/>
+              </a:rPr>
+              <a:t>- Fill the template from docs/</a:t>
+            </a:r>
+          </a:p>
+          <a:p>
+            <a:pPr marL="0" indent="0">
+              <a:spcBef>
+                <a:spcPts val="0"/>
+              </a:spcBef>
+              <a:buNone/>
+            </a:pPr>
+            <a:r>
+              <a:rPr sz="1500" b="0" i="0">
+                <a:solidFill>
+                  <a:srgbClr val="5EEAD4"/>
+                </a:solidFill>
+                <a:latin typeface="Courier New"/>
+              </a:rPr>
+              <a:t>- Exit gate: all 6 fields filled,</a:t>
+            </a:r>
+          </a:p>
+          <a:p>
+            <a:pPr marL="0" indent="0">
+              <a:spcBef>
+                <a:spcPts val="0"/>
+              </a:spcBef>
+              <a:buNone/>
+            </a:pPr>
+            <a:r>
+              <a:rPr sz="1500" b="0" i="0">
+                <a:solidFill>
+                  <a:srgbClr val="5EEAD4"/>
+                </a:solidFill>
+                <a:latin typeface="Courier New"/>
+              </a:rPr>
+              <a:t>  numbers match the sheet</a:t>
+            </a:r>
+          </a:p>
+          <a:p>
+            <a:pPr marL="0" indent="0">
+              <a:spcBef>
+                <a:spcPts val="800"/>
+              </a:spcBef>
+              <a:buNone/>
+            </a:pPr>
+            <a:r>
+              <a:rPr sz="1500" b="0" i="0">
+                <a:solidFill>
+                  <a:srgbClr val="F2F6FC"/>
+                </a:solidFill>
+                <a:latin typeface="Courier New"/>
+              </a:rPr>
+              <a:t>## Phase 3: review and export</a:t>
+            </a:r>
+          </a:p>
+          <a:p>
+            <a:pPr marL="0" indent="0">
+              <a:spcBef>
+                <a:spcPts val="0"/>
+              </a:spcBef>
+              <a:buNone/>
+            </a:pPr>
+            <a:r>
+              <a:rPr sz="1500" b="0" i="0">
+                <a:solidFill>
+                  <a:srgbClr val="5EEAD4"/>
+                </a:solidFill>
+                <a:latin typeface="Courier New"/>
+              </a:rPr>
+              <a:t>- Exit gate: no TODO text left</a:t>
             </a:r>
           </a:p>
         </p:txBody>
@@ -13388,8 +13444,8 @@
         </p:nvSpPr>
         <p:spPr>
           <a:xfrm>
-            <a:off x="6446520" y="3337560"/>
-            <a:ext cx="4965192" cy="246887"/>
+            <a:off x="548640" y="5852160"/>
+            <a:ext cx="11091672" cy="365760"/>
           </a:xfrm>
           <a:prstGeom prst="rect">
             <a:avLst/>
@@ -13406,255 +13462,13 @@
               <a:buNone/>
             </a:pPr>
             <a:r>
-              <a:rPr sz="1500" b="0" i="0">
-                <a:solidFill>
-                  <a:srgbClr val="A9BCD6"/>
+              <a:rPr sz="1600" b="0" i="0">
+                <a:solidFill>
+                  <a:srgbClr val="5EEAD4"/>
                 </a:solidFill>
                 <a:latin typeface="Calibri"/>
               </a:rPr>
-              <a:t>Every "done" comes with its gate result next to it</a:t>
-            </a:r>
-          </a:p>
-        </p:txBody>
-      </p:sp>
-      <p:sp>
-        <p:nvSpPr>
-          <p:cNvPr id="12" name="Rounded Rectangle 33"/>
-          <p:cNvSpPr/>
-          <p:nvPr/>
-        </p:nvSpPr>
-        <p:spPr>
-          <a:xfrm>
-            <a:off x="6217920" y="3931920"/>
-            <a:ext cx="5422392" cy="1051560"/>
-          </a:xfrm>
-          <a:prstGeom prst="roundRect">
-            <a:avLst>
-              <a:gd name="adj" fmla="val 13043"/>
-            </a:avLst>
-          </a:prstGeom>
-          <a:solidFill>
-            <a:srgbClr val="12305A"/>
-          </a:solidFill>
-          <a:ln>
-            <a:noFill/>
-          </a:ln>
-          <a:effectLst/>
-        </p:spPr>
-        <p:style>
-          <a:lnRef idx="1">
-            <a:schemeClr val="accent1"/>
-          </a:lnRef>
-          <a:fillRef idx="3">
-            <a:schemeClr val="accent1"/>
-          </a:fillRef>
-          <a:effectRef idx="2">
-            <a:schemeClr val="accent1"/>
-          </a:effectRef>
-          <a:fontRef idx="minor">
-            <a:schemeClr val="lt1"/>
-          </a:fontRef>
-        </p:style>
-        <p:txBody>
-          <a:bodyPr rtlCol="0" anchor="ctr"/>
-          <a:lstStyle/>
-          <a:p>
-            <a:pPr algn="ctr"/>
-            <a:endParaRPr/>
-          </a:p>
-        </p:txBody>
-      </p:sp>
-      <p:sp>
-        <p:nvSpPr>
-          <p:cNvPr id="13" name="TextBox 34"/>
-          <p:cNvSpPr txBox="1"/>
-          <p:nvPr/>
-        </p:nvSpPr>
-        <p:spPr>
-          <a:xfrm>
-            <a:off x="6446520" y="4114800"/>
-            <a:ext cx="4965192" cy="347472"/>
-          </a:xfrm>
-          <a:prstGeom prst="rect">
-            <a:avLst/>
-          </a:prstGeom>
-          <a:noFill/>
-        </p:spPr>
-        <p:txBody>
-          <a:bodyPr wrap="square" lIns="0" tIns="0" rIns="0" bIns="0" anchor="t">
-            <a:spAutoFit/>
-          </a:bodyPr>
-          <a:lstStyle/>
-          <a:p>
-            <a:pPr marL="0" indent="0">
-              <a:buNone/>
-            </a:pPr>
-            <a:r>
-              <a:rPr sz="1800" b="1" i="0">
-                <a:solidFill>
-                  <a:srgbClr val="F2F6FC"/>
-                </a:solidFill>
-                <a:latin typeface="Calibri"/>
-              </a:rPr>
-              <a:t>Readable in 30 seconds</a:t>
-            </a:r>
-          </a:p>
-        </p:txBody>
-      </p:sp>
-      <p:sp>
-        <p:nvSpPr>
-          <p:cNvPr id="14" name="TextBox 35"/>
-          <p:cNvSpPr txBox="1"/>
-          <p:nvPr/>
-        </p:nvSpPr>
-        <p:spPr>
-          <a:xfrm>
-            <a:off x="6446520" y="4526280"/>
-            <a:ext cx="4965192" cy="246887"/>
-          </a:xfrm>
-          <a:prstGeom prst="rect">
-            <a:avLst/>
-          </a:prstGeom>
-          <a:noFill/>
-        </p:spPr>
-        <p:txBody>
-          <a:bodyPr wrap="square" lIns="0" tIns="0" rIns="0" bIns="0" anchor="t">
-            <a:spAutoFit/>
-          </a:bodyPr>
-          <a:lstStyle/>
-          <a:p>
-            <a:pPr marL="0" indent="0">
-              <a:buNone/>
-            </a:pPr>
-            <a:r>
-              <a:rPr sz="1500" b="0" i="0">
-                <a:solidFill>
-                  <a:srgbClr val="A9BCD6"/>
-                </a:solidFill>
-                <a:latin typeface="Calibri"/>
-              </a:rPr>
-              <a:t>I check status and evidence, then say what comes next</a:t>
-            </a:r>
-          </a:p>
-        </p:txBody>
-      </p:sp>
-      <p:sp>
-        <p:nvSpPr>
-          <p:cNvPr id="15" name="Rounded Rectangle 36"/>
-          <p:cNvSpPr/>
-          <p:nvPr/>
-        </p:nvSpPr>
-        <p:spPr>
-          <a:xfrm>
-            <a:off x="6217920" y="5120640"/>
-            <a:ext cx="5422392" cy="1051560"/>
-          </a:xfrm>
-          <a:prstGeom prst="roundRect">
-            <a:avLst>
-              <a:gd name="adj" fmla="val 13043"/>
-            </a:avLst>
-          </a:prstGeom>
-          <a:solidFill>
-            <a:srgbClr val="12305A"/>
-          </a:solidFill>
-          <a:ln>
-            <a:noFill/>
-          </a:ln>
-          <a:effectLst/>
-        </p:spPr>
-        <p:style>
-          <a:lnRef idx="1">
-            <a:schemeClr val="accent1"/>
-          </a:lnRef>
-          <a:fillRef idx="3">
-            <a:schemeClr val="accent1"/>
-          </a:fillRef>
-          <a:effectRef idx="2">
-            <a:schemeClr val="accent1"/>
-          </a:effectRef>
-          <a:fontRef idx="minor">
-            <a:schemeClr val="lt1"/>
-          </a:fontRef>
-        </p:style>
-        <p:txBody>
-          <a:bodyPr rtlCol="0" anchor="ctr"/>
-          <a:lstStyle/>
-          <a:p>
-            <a:pPr algn="ctr"/>
-            <a:endParaRPr/>
-          </a:p>
-        </p:txBody>
-      </p:sp>
-      <p:sp>
-        <p:nvSpPr>
-          <p:cNvPr id="16" name="TextBox 37"/>
-          <p:cNvSpPr txBox="1"/>
-          <p:nvPr/>
-        </p:nvSpPr>
-        <p:spPr>
-          <a:xfrm>
-            <a:off x="6446520" y="5303520"/>
-            <a:ext cx="4965192" cy="347472"/>
-          </a:xfrm>
-          <a:prstGeom prst="rect">
-            <a:avLst/>
-          </a:prstGeom>
-          <a:noFill/>
-        </p:spPr>
-        <p:txBody>
-          <a:bodyPr wrap="square" lIns="0" tIns="0" rIns="0" bIns="0" anchor="t">
-            <a:spAutoFit/>
-          </a:bodyPr>
-          <a:lstStyle/>
-          <a:p>
-            <a:pPr marL="0" indent="0">
-              <a:buNone/>
-            </a:pPr>
-            <a:r>
-              <a:rPr sz="1800" b="1" i="0">
-                <a:solidFill>
-                  <a:srgbClr val="F2F6FC"/>
-                </a:solidFill>
-                <a:latin typeface="Calibri"/>
-              </a:rPr>
-              <a:t>Fuel for self-correction</a:t>
-            </a:r>
-          </a:p>
-        </p:txBody>
-      </p:sp>
-      <p:sp>
-        <p:nvSpPr>
-          <p:cNvPr id="17" name="TextBox 38"/>
-          <p:cNvSpPr txBox="1"/>
-          <p:nvPr/>
-        </p:nvSpPr>
-        <p:spPr>
-          <a:xfrm>
-            <a:off x="6446520" y="5715000"/>
-            <a:ext cx="4965192" cy="246887"/>
-          </a:xfrm>
-          <a:prstGeom prst="rect">
-            <a:avLst/>
-          </a:prstGeom>
-          <a:noFill/>
-        </p:spPr>
-        <p:txBody>
-          <a:bodyPr wrap="square" lIns="0" tIns="0" rIns="0" bIns="0" anchor="t">
-            <a:spAutoFit/>
-          </a:bodyPr>
-          <a:lstStyle/>
-          <a:p>
-            <a:pPr marL="0" indent="0">
-              <a:buNone/>
-            </a:pPr>
-            <a:r>
-              <a:rPr sz="1500" b="0" i="0">
-                <a:solidFill>
-                  <a:srgbClr val="A9BCD6"/>
-                </a:solidFill>
-                <a:latin typeface="Calibri"/>
-              </a:rPr>
-              <a:t>Known issues and failed gates become the next pass's to-do list</a:t>
+              <a:t>Ask Claude: "Make a detailed plan in phases, with a test plan and an exit gate for each."</a:t>
             </a:r>
           </a:p>
         </p:txBody>
@@ -13715,29 +13529,20 @@
             <a:r>
               <a:rPr sz="3000" b="1" i="0">
                 <a:solidFill>
+                  <a:srgbClr val="FF8A2B"/>
+                </a:solidFill>
+                <a:latin typeface="Calibri"/>
+              </a:rPr>
+              <a:t>progress.md</a:t>
+            </a:r>
+            <a:r>
+              <a:rPr sz="3000" b="1" i="0">
+                <a:solidFill>
                   <a:srgbClr val="F2F6FC"/>
                 </a:solidFill>
                 <a:latin typeface="Calibri"/>
               </a:rPr>
-              <a:t>Each pass: build, verify, </a:t>
-            </a:r>
-            <a:r>
-              <a:rPr sz="3000" b="1" i="0">
-                <a:solidFill>
-                  <a:srgbClr val="FF8A2B"/>
-                </a:solidFill>
-                <a:latin typeface="Calibri"/>
-              </a:rPr>
-              <a:t>self-correct</a:t>
-            </a:r>
-            <a:r>
-              <a:rPr sz="3000" b="1" i="0">
-                <a:solidFill>
-                  <a:srgbClr val="F2F6FC"/>
-                </a:solidFill>
-                <a:latin typeface="Calibri"/>
-              </a:rPr>
-              <a:t>, repeat</a:t>
+              <a:t>: the file that drives the whole loop</a:t>
             </a:r>
             <a:endParaRPr lang="en-US" sz="3000" dirty="0"/>
           </a:p>
@@ -13763,7 +13568,7 @@
           </a:prstGeom>
           <a:extLst>
             <a:ext uri="{C572A759-6A51-4108-AA02-DFA0A04FC94B}">
-              <ma14:wrappingTextBoxFlag xmlns:ma14="http://schemas.microsoft.com/office/mac/drawingml/2011/main" xmlns="" val="0"/>
+              <ma14:wrappingTextBoxFlag xmlns="" xmlns:ma14="http://schemas.microsoft.com/office/mac/drawingml/2011/main" val="0"/>
             </a:ext>
           </a:extLst>
         </p:spPr>
@@ -13800,18 +13605,20 @@
         <p:spPr>
           <a:xfrm>
             <a:off x="548640" y="1554480"/>
-            <a:ext cx="3383280" cy="1508760"/>
+            <a:ext cx="5394960" cy="4617720"/>
           </a:xfrm>
           <a:prstGeom prst="roundRect">
             <a:avLst>
-              <a:gd name="adj" fmla="val 9090"/>
+              <a:gd name="adj" fmla="val 1980"/>
             </a:avLst>
           </a:prstGeom>
           <a:solidFill>
-            <a:srgbClr val="12305A"/>
+            <a:srgbClr val="081628"/>
           </a:solidFill>
-          <a:ln>
-            <a:noFill/>
+          <a:ln w="12700">
+            <a:solidFill>
+              <a:srgbClr val="1E3F6F"/>
+            </a:solidFill>
           </a:ln>
           <a:effectLst/>
         </p:spPr>
@@ -13846,8 +13653,8 @@
         </p:nvSpPr>
         <p:spPr>
           <a:xfrm>
-            <a:off x="777240" y="1737360"/>
-            <a:ext cx="2926080" cy="411480"/>
+            <a:off x="777240" y="1719072"/>
+            <a:ext cx="4937760" cy="4343400"/>
           </a:xfrm>
           <a:prstGeom prst="rect">
             <a:avLst/>
@@ -13864,68 +13671,252 @@
               <a:buNone/>
             </a:pPr>
             <a:r>
-              <a:rPr sz="2000" b="1" i="0">
+              <a:rPr sz="1400" b="0" i="0">
+                <a:solidFill>
+                  <a:srgbClr val="38BDF8"/>
+                </a:solidFill>
+                <a:latin typeface="Courier New"/>
+              </a:rPr>
+              <a:t># progress.md</a:t>
+            </a:r>
+          </a:p>
+          <a:p>
+            <a:pPr marL="0" indent="0">
+              <a:spcBef>
+                <a:spcPts val="0"/>
+              </a:spcBef>
+              <a:buNone/>
+            </a:pPr>
+            <a:r>
+              <a:rPr sz="1400" b="0" i="0">
                 <a:solidFill>
                   <a:srgbClr val="F2F6FC"/>
                 </a:solidFill>
-                <a:latin typeface="Calibri"/>
-              </a:rPr>
-              <a:t>1  Read</a:t>
-            </a:r>
-          </a:p>
-        </p:txBody>
-      </p:sp>
-      <p:sp>
-        <p:nvSpPr>
-          <p:cNvPr id="6" name="TextBox 27"/>
-          <p:cNvSpPr txBox="1"/>
-          <p:nvPr/>
-        </p:nvSpPr>
-        <p:spPr>
-          <a:xfrm>
-            <a:off x="777240" y="2212848"/>
-            <a:ext cx="2926080" cy="640080"/>
-          </a:xfrm>
-          <a:prstGeom prst="rect">
-            <a:avLst/>
-          </a:prstGeom>
-          <a:noFill/>
-        </p:spPr>
-        <p:txBody>
-          <a:bodyPr wrap="square" lIns="0" tIns="0" rIns="0" bIns="0" anchor="t">
-            <a:spAutoFit/>
-          </a:bodyPr>
-          <a:lstStyle/>
-          <a:p>
-            <a:pPr marL="0" indent="0">
-              <a:buNone/>
-            </a:pPr>
-            <a:r>
-              <a:rPr sz="1500" b="0" i="0">
-                <a:solidFill>
-                  <a:srgbClr val="A9BCD6"/>
-                </a:solidFill>
-                <a:latin typeface="Calibri"/>
-              </a:rPr>
-              <a:t>plans/ and progress.md: where am I, what is next?</a:t>
-            </a:r>
-          </a:p>
-        </p:txBody>
-      </p:sp>
-      <p:sp>
-        <p:nvSpPr>
-          <p:cNvPr id="7" name="Rounded Rectangle 28"/>
+                <a:latin typeface="Courier New"/>
+              </a:rPr>
+              <a:t>Status: phase 2 of 4, in progress</a:t>
+            </a:r>
+          </a:p>
+          <a:p>
+            <a:pPr marL="0" indent="0">
+              <a:spcBef>
+                <a:spcPts val="700"/>
+              </a:spcBef>
+              <a:buNone/>
+            </a:pPr>
+            <a:r>
+              <a:rPr sz="1400" b="0" i="0">
+                <a:solidFill>
+                  <a:srgbClr val="F2F6FC"/>
+                </a:solidFill>
+                <a:latin typeface="Courier New"/>
+              </a:rPr>
+              <a:t>## Done</a:t>
+            </a:r>
+          </a:p>
+          <a:p>
+            <a:pPr marL="0" indent="0">
+              <a:spcBef>
+                <a:spcPts val="0"/>
+              </a:spcBef>
+              <a:buNone/>
+            </a:pPr>
+            <a:r>
+              <a:rPr sz="1400" b="0" i="0">
+                <a:solidFill>
+                  <a:srgbClr val="F2F6FC"/>
+                </a:solidFill>
+                <a:latin typeface="Courier New"/>
+              </a:rPr>
+              <a:t>- P1 data loaded and cleaned</a:t>
+            </a:r>
+          </a:p>
+          <a:p>
+            <a:pPr marL="0" indent="0">
+              <a:spcBef>
+                <a:spcPts val="700"/>
+              </a:spcBef>
+              <a:buNone/>
+            </a:pPr>
+            <a:r>
+              <a:rPr sz="1400" b="0" i="0">
+                <a:solidFill>
+                  <a:srgbClr val="F2F6FC"/>
+                </a:solidFill>
+                <a:latin typeface="Courier New"/>
+              </a:rPr>
+              <a:t>## In progress</a:t>
+            </a:r>
+          </a:p>
+          <a:p>
+            <a:pPr marL="0" indent="0">
+              <a:spcBef>
+                <a:spcPts val="0"/>
+              </a:spcBef>
+              <a:buNone/>
+            </a:pPr>
+            <a:r>
+              <a:rPr sz="1400" b="0" i="0">
+                <a:solidFill>
+                  <a:srgbClr val="F2F6FC"/>
+                </a:solidFill>
+                <a:latin typeface="Courier New"/>
+              </a:rPr>
+              <a:t>- P2 build the Word report</a:t>
+            </a:r>
+          </a:p>
+          <a:p>
+            <a:pPr marL="0" indent="0">
+              <a:spcBef>
+                <a:spcPts val="700"/>
+              </a:spcBef>
+              <a:buNone/>
+            </a:pPr>
+            <a:r>
+              <a:rPr sz="1400" b="0" i="0">
+                <a:solidFill>
+                  <a:srgbClr val="F2F6FC"/>
+                </a:solidFill>
+                <a:latin typeface="Courier New"/>
+              </a:rPr>
+              <a:t>## Next</a:t>
+            </a:r>
+          </a:p>
+          <a:p>
+            <a:pPr marL="0" indent="0">
+              <a:spcBef>
+                <a:spcPts val="0"/>
+              </a:spcBef>
+              <a:buNone/>
+            </a:pPr>
+            <a:r>
+              <a:rPr sz="1400" b="0" i="0">
+                <a:solidFill>
+                  <a:srgbClr val="F2F6FC"/>
+                </a:solidFill>
+                <a:latin typeface="Courier New"/>
+              </a:rPr>
+              <a:t>- P3 review, P4 export</a:t>
+            </a:r>
+          </a:p>
+          <a:p>
+            <a:pPr marL="0" indent="0">
+              <a:spcBef>
+                <a:spcPts val="700"/>
+              </a:spcBef>
+              <a:buNone/>
+            </a:pPr>
+            <a:r>
+              <a:rPr sz="1400" b="0" i="0">
+                <a:solidFill>
+                  <a:srgbClr val="5EEAD4"/>
+                </a:solidFill>
+                <a:latin typeface="Courier New"/>
+              </a:rPr>
+              <a:t>## Gate results (evidence)</a:t>
+            </a:r>
+          </a:p>
+          <a:p>
+            <a:pPr marL="0" indent="0">
+              <a:spcBef>
+                <a:spcPts val="0"/>
+              </a:spcBef>
+              <a:buNone/>
+            </a:pPr>
+            <a:r>
+              <a:rPr sz="1400" b="0" i="0">
+                <a:solidFill>
+                  <a:srgbClr val="5EEAD4"/>
+                </a:solidFill>
+                <a:latin typeface="Courier New"/>
+              </a:rPr>
+              <a:t>- P1: pytest 12 passed, ruff clean</a:t>
+            </a:r>
+          </a:p>
+          <a:p>
+            <a:pPr marL="0" indent="0">
+              <a:spcBef>
+                <a:spcPts val="700"/>
+              </a:spcBef>
+              <a:buNone/>
+            </a:pPr>
+            <a:r>
+              <a:rPr sz="1400" b="0" i="0">
+                <a:solidFill>
+                  <a:srgbClr val="F2F6FC"/>
+                </a:solidFill>
+                <a:latin typeface="Courier New"/>
+              </a:rPr>
+              <a:t>## Decisions</a:t>
+            </a:r>
+          </a:p>
+          <a:p>
+            <a:pPr marL="0" indent="0">
+              <a:spcBef>
+                <a:spcPts val="0"/>
+              </a:spcBef>
+              <a:buNone/>
+            </a:pPr>
+            <a:r>
+              <a:rPr sz="1400" b="0" i="0">
+                <a:solidFill>
+                  <a:srgbClr val="F2F6FC"/>
+                </a:solidFill>
+                <a:latin typeface="Courier New"/>
+              </a:rPr>
+              <a:t>- Use the Word template in docs/</a:t>
+            </a:r>
+          </a:p>
+          <a:p>
+            <a:pPr marL="0" indent="0">
+              <a:spcBef>
+                <a:spcPts val="700"/>
+              </a:spcBef>
+              <a:buNone/>
+            </a:pPr>
+            <a:r>
+              <a:rPr sz="1400" b="0" i="0">
+                <a:solidFill>
+                  <a:srgbClr val="FBBF24"/>
+                </a:solidFill>
+                <a:latin typeface="Courier New"/>
+              </a:rPr>
+              <a:t>## Known issues</a:t>
+            </a:r>
+          </a:p>
+          <a:p>
+            <a:pPr marL="0" indent="0">
+              <a:spcBef>
+                <a:spcPts val="0"/>
+              </a:spcBef>
+              <a:buNone/>
+            </a:pPr>
+            <a:r>
+              <a:rPr sz="1400" b="0" i="0">
+                <a:solidFill>
+                  <a:srgbClr val="FBBF24"/>
+                </a:solidFill>
+                <a:latin typeface="Courier New"/>
+              </a:rPr>
+              <a:t>- 3 rows miss Client ID: fix in P2</a:t>
+            </a:r>
+          </a:p>
+        </p:txBody>
+      </p:sp>
+      <p:sp>
+        <p:nvSpPr>
+          <p:cNvPr id="6" name="Rounded Rectangle 27"/>
           <p:cNvSpPr/>
           <p:nvPr/>
         </p:nvSpPr>
         <p:spPr>
           <a:xfrm>
-            <a:off x="4389120" y="1554480"/>
-            <a:ext cx="3383280" cy="1508760"/>
+            <a:off x="6217920" y="1554480"/>
+            <a:ext cx="5422392" cy="1051560"/>
           </a:xfrm>
           <a:prstGeom prst="roundRect">
             <a:avLst>
-              <a:gd name="adj" fmla="val 9090"/>
+              <a:gd name="adj" fmla="val 13043"/>
             </a:avLst>
           </a:prstGeom>
           <a:solidFill>
@@ -13961,14 +13952,14 @@
       </p:sp>
       <p:sp>
         <p:nvSpPr>
-          <p:cNvPr id="8" name="TextBox 29"/>
-          <p:cNvSpPr txBox="1"/>
-          <p:nvPr/>
-        </p:nvSpPr>
-        <p:spPr>
-          <a:xfrm>
-            <a:off x="4617720" y="1737360"/>
-            <a:ext cx="2926080" cy="411480"/>
+          <p:cNvPr id="7" name="TextBox 28"/>
+          <p:cNvSpPr txBox="1"/>
+          <p:nvPr/>
+        </p:nvSpPr>
+        <p:spPr>
+          <a:xfrm>
+            <a:off x="6446520" y="1737360"/>
+            <a:ext cx="4965192" cy="347472"/>
           </a:xfrm>
           <a:prstGeom prst="rect">
             <a:avLst/>
@@ -13985,27 +13976,27 @@
               <a:buNone/>
             </a:pPr>
             <a:r>
-              <a:rPr sz="2000" b="1" i="0">
+              <a:rPr sz="1800" b="1" i="0">
                 <a:solidFill>
                   <a:srgbClr val="F2F6FC"/>
                 </a:solidFill>
                 <a:latin typeface="Calibri"/>
               </a:rPr>
-              <a:t>2  Do</a:t>
-            </a:r>
-          </a:p>
-        </p:txBody>
-      </p:sp>
-      <p:sp>
-        <p:nvSpPr>
-          <p:cNvPr id="9" name="TextBox 30"/>
-          <p:cNvSpPr txBox="1"/>
-          <p:nvPr/>
-        </p:nvSpPr>
-        <p:spPr>
-          <a:xfrm>
-            <a:off x="4617720" y="2212848"/>
-            <a:ext cx="2926080" cy="640080"/>
+              <a:t>Memory outside the chat</a:t>
+            </a:r>
+          </a:p>
+        </p:txBody>
+      </p:sp>
+      <p:sp>
+        <p:nvSpPr>
+          <p:cNvPr id="8" name="TextBox 29"/>
+          <p:cNvSpPr txBox="1"/>
+          <p:nvPr/>
+        </p:nvSpPr>
+        <p:spPr>
+          <a:xfrm>
+            <a:off x="6446520" y="2148839"/>
+            <a:ext cx="4965192" cy="246887"/>
           </a:xfrm>
           <a:prstGeom prst="rect">
             <a:avLst/>
@@ -14028,25 +14019,25 @@
                 </a:solidFill>
                 <a:latin typeface="Calibri"/>
               </a:rPr>
-              <a:t>Only the next step or phase, nothing more</a:t>
-            </a:r>
-          </a:p>
-        </p:txBody>
-      </p:sp>
-      <p:sp>
-        <p:nvSpPr>
-          <p:cNvPr id="10" name="Rounded Rectangle 31"/>
+              <a:t>A new chat or a new day: Claude re-reads it and continues</a:t>
+            </a:r>
+          </a:p>
+        </p:txBody>
+      </p:sp>
+      <p:sp>
+        <p:nvSpPr>
+          <p:cNvPr id="9" name="Rounded Rectangle 30"/>
           <p:cNvSpPr/>
           <p:nvPr/>
         </p:nvSpPr>
         <p:spPr>
           <a:xfrm>
-            <a:off x="8257031" y="1554480"/>
-            <a:ext cx="3383280" cy="1508760"/>
+            <a:off x="6217920" y="2743200"/>
+            <a:ext cx="5422392" cy="1051560"/>
           </a:xfrm>
           <a:prstGeom prst="roundRect">
             <a:avLst>
-              <a:gd name="adj" fmla="val 9090"/>
+              <a:gd name="adj" fmla="val 13043"/>
             </a:avLst>
           </a:prstGeom>
           <a:solidFill>
@@ -14082,14 +14073,14 @@
       </p:sp>
       <p:sp>
         <p:nvSpPr>
-          <p:cNvPr id="11" name="TextBox 32"/>
-          <p:cNvSpPr txBox="1"/>
-          <p:nvPr/>
-        </p:nvSpPr>
-        <p:spPr>
-          <a:xfrm>
-            <a:off x="8485632" y="1737360"/>
-            <a:ext cx="2926080" cy="411480"/>
+          <p:cNvPr id="10" name="TextBox 31"/>
+          <p:cNvSpPr txBox="1"/>
+          <p:nvPr/>
+        </p:nvSpPr>
+        <p:spPr>
+          <a:xfrm>
+            <a:off x="6446520" y="2926080"/>
+            <a:ext cx="4965192" cy="347472"/>
           </a:xfrm>
           <a:prstGeom prst="rect">
             <a:avLst/>
@@ -14106,27 +14097,27 @@
               <a:buNone/>
             </a:pPr>
             <a:r>
-              <a:rPr sz="2000" b="1" i="0">
+              <a:rPr sz="1800" b="1" i="0">
                 <a:solidFill>
                   <a:srgbClr val="F2F6FC"/>
                 </a:solidFill>
                 <a:latin typeface="Calibri"/>
               </a:rPr>
-              <a:t>3  Verify</a:t>
-            </a:r>
-          </a:p>
-        </p:txBody>
-      </p:sp>
-      <p:sp>
-        <p:nvSpPr>
-          <p:cNvPr id="12" name="TextBox 33"/>
-          <p:cNvSpPr txBox="1"/>
-          <p:nvPr/>
-        </p:nvSpPr>
-        <p:spPr>
-          <a:xfrm>
-            <a:off x="8485632" y="2212848"/>
-            <a:ext cx="2926080" cy="640080"/>
+              <a:t>Evidence, not promises</a:t>
+            </a:r>
+          </a:p>
+        </p:txBody>
+      </p:sp>
+      <p:sp>
+        <p:nvSpPr>
+          <p:cNvPr id="11" name="TextBox 32"/>
+          <p:cNvSpPr txBox="1"/>
+          <p:nvPr/>
+        </p:nvSpPr>
+        <p:spPr>
+          <a:xfrm>
+            <a:off x="6446520" y="3337560"/>
+            <a:ext cx="4965192" cy="246887"/>
           </a:xfrm>
           <a:prstGeom prst="rect">
             <a:avLst/>
@@ -14149,27 +14140,29 @@
                 </a:solidFill>
                 <a:latin typeface="Calibri"/>
               </a:rPr>
-              <a:t>Run the exit gate: tests, checks, a debug run</a:t>
-            </a:r>
-          </a:p>
-        </p:txBody>
-      </p:sp>
-      <p:sp>
-        <p:nvSpPr>
-          <p:cNvPr id="13" name="Right Arrow 34"/>
+              <a:t>Every "done" comes with its gate result next to it</a:t>
+            </a:r>
+          </a:p>
+        </p:txBody>
+      </p:sp>
+      <p:sp>
+        <p:nvSpPr>
+          <p:cNvPr id="12" name="Rounded Rectangle 33"/>
           <p:cNvSpPr/>
           <p:nvPr/>
         </p:nvSpPr>
         <p:spPr>
           <a:xfrm>
-            <a:off x="3977639" y="2148840"/>
-            <a:ext cx="365760" cy="329184"/>
-          </a:xfrm>
-          <a:prstGeom prst="rightArrow">
-            <a:avLst/>
+            <a:off x="6217920" y="3931920"/>
+            <a:ext cx="5422392" cy="1051560"/>
+          </a:xfrm>
+          <a:prstGeom prst="roundRect">
+            <a:avLst>
+              <a:gd name="adj" fmla="val 13043"/>
+            </a:avLst>
           </a:prstGeom>
           <a:solidFill>
-            <a:srgbClr val="A9BCD6"/>
+            <a:srgbClr val="12305A"/>
           </a:solidFill>
           <a:ln>
             <a:noFill/>
@@ -14201,20 +14194,96 @@
       </p:sp>
       <p:sp>
         <p:nvSpPr>
-          <p:cNvPr id="14" name="Right Arrow 35"/>
+          <p:cNvPr id="13" name="TextBox 34"/>
+          <p:cNvSpPr txBox="1"/>
+          <p:nvPr/>
+        </p:nvSpPr>
+        <p:spPr>
+          <a:xfrm>
+            <a:off x="6446520" y="4114800"/>
+            <a:ext cx="4965192" cy="347472"/>
+          </a:xfrm>
+          <a:prstGeom prst="rect">
+            <a:avLst/>
+          </a:prstGeom>
+          <a:noFill/>
+        </p:spPr>
+        <p:txBody>
+          <a:bodyPr wrap="square" lIns="0" tIns="0" rIns="0" bIns="0" anchor="t">
+            <a:spAutoFit/>
+          </a:bodyPr>
+          <a:lstStyle/>
+          <a:p>
+            <a:pPr marL="0" indent="0">
+              <a:buNone/>
+            </a:pPr>
+            <a:r>
+              <a:rPr sz="1800" b="1" i="0">
+                <a:solidFill>
+                  <a:srgbClr val="F2F6FC"/>
+                </a:solidFill>
+                <a:latin typeface="Calibri"/>
+              </a:rPr>
+              <a:t>Readable in 30 seconds</a:t>
+            </a:r>
+          </a:p>
+        </p:txBody>
+      </p:sp>
+      <p:sp>
+        <p:nvSpPr>
+          <p:cNvPr id="14" name="TextBox 35"/>
+          <p:cNvSpPr txBox="1"/>
+          <p:nvPr/>
+        </p:nvSpPr>
+        <p:spPr>
+          <a:xfrm>
+            <a:off x="6446520" y="4526280"/>
+            <a:ext cx="4965192" cy="246887"/>
+          </a:xfrm>
+          <a:prstGeom prst="rect">
+            <a:avLst/>
+          </a:prstGeom>
+          <a:noFill/>
+        </p:spPr>
+        <p:txBody>
+          <a:bodyPr wrap="square" lIns="0" tIns="0" rIns="0" bIns="0" anchor="t">
+            <a:spAutoFit/>
+          </a:bodyPr>
+          <a:lstStyle/>
+          <a:p>
+            <a:pPr marL="0" indent="0">
+              <a:buNone/>
+            </a:pPr>
+            <a:r>
+              <a:rPr sz="1500" b="0" i="0">
+                <a:solidFill>
+                  <a:srgbClr val="A9BCD6"/>
+                </a:solidFill>
+                <a:latin typeface="Calibri"/>
+              </a:rPr>
+              <a:t>I check status and evidence, then say what comes next</a:t>
+            </a:r>
+          </a:p>
+        </p:txBody>
+      </p:sp>
+      <p:sp>
+        <p:nvSpPr>
+          <p:cNvPr id="15" name="Rounded Rectangle 36"/>
           <p:cNvSpPr/>
           <p:nvPr/>
         </p:nvSpPr>
         <p:spPr>
           <a:xfrm>
-            <a:off x="7818120" y="2148840"/>
-            <a:ext cx="365760" cy="329184"/>
-          </a:xfrm>
-          <a:prstGeom prst="rightArrow">
-            <a:avLst/>
+            <a:off x="6217920" y="5120640"/>
+            <a:ext cx="5422392" cy="1051560"/>
+          </a:xfrm>
+          <a:prstGeom prst="roundRect">
+            <a:avLst>
+              <a:gd name="adj" fmla="val 13043"/>
+            </a:avLst>
           </a:prstGeom>
           <a:solidFill>
-            <a:srgbClr val="A9BCD6"/>
+            <a:srgbClr val="12305A"/>
           </a:solidFill>
           <a:ln>
             <a:noFill/>
@@ -14246,14 +14315,14 @@
       </p:sp>
       <p:sp>
         <p:nvSpPr>
-          <p:cNvPr id="15" name="TextBox 36"/>
-          <p:cNvSpPr txBox="1"/>
-          <p:nvPr/>
-        </p:nvSpPr>
-        <p:spPr>
-          <a:xfrm>
-            <a:off x="548640" y="3200400"/>
-            <a:ext cx="5394960" cy="365760"/>
+          <p:cNvPr id="16" name="TextBox 37"/>
+          <p:cNvSpPr txBox="1"/>
+          <p:nvPr/>
+        </p:nvSpPr>
+        <p:spPr>
+          <a:xfrm>
+            <a:off x="6446520" y="5303520"/>
+            <a:ext cx="4965192" cy="347472"/>
           </a:xfrm>
           <a:prstGeom prst="rect">
             <a:avLst/>
@@ -14266,31 +14335,31 @@
           </a:bodyPr>
           <a:lstStyle/>
           <a:p>
-            <a:pPr marL="0" indent="0" algn="ctr">
+            <a:pPr marL="0" indent="0">
               <a:buNone/>
             </a:pPr>
             <a:r>
               <a:rPr sz="1800" b="1" i="0">
                 <a:solidFill>
-                  <a:srgbClr val="FBBF24"/>
+                  <a:srgbClr val="F2F6FC"/>
                 </a:solidFill>
                 <a:latin typeface="Calibri"/>
               </a:rPr>
-              <a:t>Gate fails</a:t>
-            </a:r>
-          </a:p>
-        </p:txBody>
-      </p:sp>
-      <p:sp>
-        <p:nvSpPr>
-          <p:cNvPr id="16" name="TextBox 37"/>
-          <p:cNvSpPr txBox="1"/>
-          <p:nvPr/>
-        </p:nvSpPr>
-        <p:spPr>
-          <a:xfrm>
-            <a:off x="6245352" y="3200400"/>
-            <a:ext cx="5394960" cy="365760"/>
+              <a:t>Fuel for self-correction</a:t>
+            </a:r>
+          </a:p>
+        </p:txBody>
+      </p:sp>
+      <p:sp>
+        <p:nvSpPr>
+          <p:cNvPr id="17" name="TextBox 38"/>
+          <p:cNvSpPr txBox="1"/>
+          <p:nvPr/>
+        </p:nvSpPr>
+        <p:spPr>
+          <a:xfrm>
+            <a:off x="6446520" y="5715000"/>
+            <a:ext cx="4965192" cy="246887"/>
           </a:xfrm>
           <a:prstGeom prst="rect">
             <a:avLst/>
@@ -14303,386 +14372,17 @@
           </a:bodyPr>
           <a:lstStyle/>
           <a:p>
-            <a:pPr marL="0" indent="0" algn="ctr">
-              <a:buNone/>
-            </a:pPr>
-            <a:r>
-              <a:rPr sz="1800" b="1" i="0">
-                <a:solidFill>
-                  <a:srgbClr val="5EEAD4"/>
+            <a:pPr marL="0" indent="0">
+              <a:buNone/>
+            </a:pPr>
+            <a:r>
+              <a:rPr sz="1500" b="0" i="0">
+                <a:solidFill>
+                  <a:srgbClr val="A9BCD6"/>
                 </a:solidFill>
                 <a:latin typeface="Calibri"/>
               </a:rPr>
-              <a:t>Gate passes</a:t>
-            </a:r>
-          </a:p>
-        </p:txBody>
-      </p:sp>
-      <p:sp>
-        <p:nvSpPr>
-          <p:cNvPr id="17" name="Down Arrow 38"/>
-          <p:cNvSpPr/>
-          <p:nvPr/>
-        </p:nvSpPr>
-        <p:spPr>
-          <a:xfrm>
-            <a:off x="3063240" y="3566160"/>
-            <a:ext cx="365760" cy="365760"/>
-          </a:xfrm>
-          <a:prstGeom prst="downArrow">
-            <a:avLst/>
-          </a:prstGeom>
-          <a:solidFill>
-            <a:srgbClr val="FBBF24"/>
-          </a:solidFill>
-          <a:ln>
-            <a:noFill/>
-          </a:ln>
-          <a:effectLst/>
-        </p:spPr>
-        <p:style>
-          <a:lnRef idx="1">
-            <a:schemeClr val="accent1"/>
-          </a:lnRef>
-          <a:fillRef idx="3">
-            <a:schemeClr val="accent1"/>
-          </a:fillRef>
-          <a:effectRef idx="2">
-            <a:schemeClr val="accent1"/>
-          </a:effectRef>
-          <a:fontRef idx="minor">
-            <a:schemeClr val="lt1"/>
-          </a:fontRef>
-        </p:style>
-        <p:txBody>
-          <a:bodyPr rtlCol="0" anchor="ctr"/>
-          <a:lstStyle/>
-          <a:p>
-            <a:pPr algn="ctr"/>
-            <a:endParaRPr/>
-          </a:p>
-        </p:txBody>
-      </p:sp>
-      <p:sp>
-        <p:nvSpPr>
-          <p:cNvPr id="18" name="Down Arrow 39"/>
-          <p:cNvSpPr/>
-          <p:nvPr/>
-        </p:nvSpPr>
-        <p:spPr>
-          <a:xfrm>
-            <a:off x="8759952" y="3566160"/>
-            <a:ext cx="365760" cy="365760"/>
-          </a:xfrm>
-          <a:prstGeom prst="downArrow">
-            <a:avLst/>
-          </a:prstGeom>
-          <a:solidFill>
-            <a:srgbClr val="5EEAD4"/>
-          </a:solidFill>
-          <a:ln>
-            <a:noFill/>
-          </a:ln>
-          <a:effectLst/>
-        </p:spPr>
-        <p:style>
-          <a:lnRef idx="1">
-            <a:schemeClr val="accent1"/>
-          </a:lnRef>
-          <a:fillRef idx="3">
-            <a:schemeClr val="accent1"/>
-          </a:fillRef>
-          <a:effectRef idx="2">
-            <a:schemeClr val="accent1"/>
-          </a:effectRef>
-          <a:fontRef idx="minor">
-            <a:schemeClr val="lt1"/>
-          </a:fontRef>
-        </p:style>
-        <p:txBody>
-          <a:bodyPr rtlCol="0" anchor="ctr"/>
-          <a:lstStyle/>
-          <a:p>
-            <a:pPr algn="ctr"/>
-            <a:endParaRPr/>
-          </a:p>
-        </p:txBody>
-      </p:sp>
-      <p:sp>
-        <p:nvSpPr>
-          <p:cNvPr id="19" name="Rounded Rectangle 40"/>
-          <p:cNvSpPr/>
-          <p:nvPr/>
-        </p:nvSpPr>
-        <p:spPr>
-          <a:xfrm>
-            <a:off x="548640" y="4023360"/>
-            <a:ext cx="5394960" cy="1371600"/>
-          </a:xfrm>
-          <a:prstGeom prst="roundRect">
-            <a:avLst>
-              <a:gd name="adj" fmla="val 10000"/>
-            </a:avLst>
-          </a:prstGeom>
-          <a:solidFill>
-            <a:srgbClr val="12305A"/>
-          </a:solidFill>
-          <a:ln>
-            <a:noFill/>
-          </a:ln>
-          <a:effectLst/>
-        </p:spPr>
-        <p:style>
-          <a:lnRef idx="1">
-            <a:schemeClr val="accent1"/>
-          </a:lnRef>
-          <a:fillRef idx="3">
-            <a:schemeClr val="accent1"/>
-          </a:fillRef>
-          <a:effectRef idx="2">
-            <a:schemeClr val="accent1"/>
-          </a:effectRef>
-          <a:fontRef idx="minor">
-            <a:schemeClr val="lt1"/>
-          </a:fontRef>
-        </p:style>
-        <p:txBody>
-          <a:bodyPr rtlCol="0" anchor="ctr"/>
-          <a:lstStyle/>
-          <a:p>
-            <a:pPr algn="ctr"/>
-            <a:endParaRPr/>
-          </a:p>
-        </p:txBody>
-      </p:sp>
-      <p:sp>
-        <p:nvSpPr>
-          <p:cNvPr id="20" name="TextBox 41"/>
-          <p:cNvSpPr txBox="1"/>
-          <p:nvPr/>
-        </p:nvSpPr>
-        <p:spPr>
-          <a:xfrm>
-            <a:off x="777240" y="4206240"/>
-            <a:ext cx="4937760" cy="411480"/>
-          </a:xfrm>
-          <a:prstGeom prst="rect">
-            <a:avLst/>
-          </a:prstGeom>
-          <a:noFill/>
-        </p:spPr>
-        <p:txBody>
-          <a:bodyPr wrap="square" lIns="0" tIns="0" rIns="0" bIns="0" anchor="t">
-            <a:spAutoFit/>
-          </a:bodyPr>
-          <a:lstStyle/>
-          <a:p>
-            <a:pPr marL="0" indent="0">
-              <a:buNone/>
-            </a:pPr>
-            <a:r>
-              <a:rPr sz="2000" b="1" i="0">
-                <a:solidFill>
-                  <a:srgbClr val="FBBF24"/>
-                </a:solidFill>
-                <a:latin typeface="Calibri"/>
-              </a:rPr>
-              <a:t>Self-correct</a:t>
-            </a:r>
-          </a:p>
-        </p:txBody>
-      </p:sp>
-      <p:sp>
-        <p:nvSpPr>
-          <p:cNvPr id="21" name="TextBox 42"/>
-          <p:cNvSpPr txBox="1"/>
-          <p:nvPr/>
-        </p:nvSpPr>
-        <p:spPr>
-          <a:xfrm>
-            <a:off x="777240" y="4681728"/>
-            <a:ext cx="4937760" cy="502919"/>
-          </a:xfrm>
-          <a:prstGeom prst="rect">
-            <a:avLst/>
-          </a:prstGeom>
-          <a:noFill/>
-        </p:spPr>
-        <p:txBody>
-          <a:bodyPr wrap="square" lIns="0" tIns="0" rIns="0" bIns="0" anchor="t">
-            <a:spAutoFit/>
-          </a:bodyPr>
-          <a:lstStyle/>
-          <a:p>
-            <a:pPr marL="0" indent="0">
-              <a:buNone/>
-            </a:pPr>
-            <a:r>
-              <a:rPr sz="1500" b="0" i="0">
-                <a:solidFill>
-                  <a:srgbClr val="F2F6FC"/>
-                </a:solidFill>
-                <a:latin typeface="Calibri"/>
-              </a:rPr>
-              <a:t>Read the error, fix it, log it under Known issues, run the gate again</a:t>
-            </a:r>
-          </a:p>
-        </p:txBody>
-      </p:sp>
-      <p:sp>
-        <p:nvSpPr>
-          <p:cNvPr id="22" name="Rounded Rectangle 43"/>
-          <p:cNvSpPr/>
-          <p:nvPr/>
-        </p:nvSpPr>
-        <p:spPr>
-          <a:xfrm>
-            <a:off x="6245352" y="4023360"/>
-            <a:ext cx="5394960" cy="1371600"/>
-          </a:xfrm>
-          <a:prstGeom prst="roundRect">
-            <a:avLst>
-              <a:gd name="adj" fmla="val 10000"/>
-            </a:avLst>
-          </a:prstGeom>
-          <a:solidFill>
-            <a:srgbClr val="12305A"/>
-          </a:solidFill>
-          <a:ln>
-            <a:noFill/>
-          </a:ln>
-          <a:effectLst/>
-        </p:spPr>
-        <p:style>
-          <a:lnRef idx="1">
-            <a:schemeClr val="accent1"/>
-          </a:lnRef>
-          <a:fillRef idx="3">
-            <a:schemeClr val="accent1"/>
-          </a:fillRef>
-          <a:effectRef idx="2">
-            <a:schemeClr val="accent1"/>
-          </a:effectRef>
-          <a:fontRef idx="minor">
-            <a:schemeClr val="lt1"/>
-          </a:fontRef>
-        </p:style>
-        <p:txBody>
-          <a:bodyPr rtlCol="0" anchor="ctr"/>
-          <a:lstStyle/>
-          <a:p>
-            <a:pPr algn="ctr"/>
-            <a:endParaRPr/>
-          </a:p>
-        </p:txBody>
-      </p:sp>
-      <p:sp>
-        <p:nvSpPr>
-          <p:cNvPr id="23" name="TextBox 44"/>
-          <p:cNvSpPr txBox="1"/>
-          <p:nvPr/>
-        </p:nvSpPr>
-        <p:spPr>
-          <a:xfrm>
-            <a:off x="6473952" y="4206240"/>
-            <a:ext cx="4937760" cy="411480"/>
-          </a:xfrm>
-          <a:prstGeom prst="rect">
-            <a:avLst/>
-          </a:prstGeom>
-          <a:noFill/>
-        </p:spPr>
-        <p:txBody>
-          <a:bodyPr wrap="square" lIns="0" tIns="0" rIns="0" bIns="0" anchor="t">
-            <a:spAutoFit/>
-          </a:bodyPr>
-          <a:lstStyle/>
-          <a:p>
-            <a:pPr marL="0" indent="0">
-              <a:buNone/>
-            </a:pPr>
-            <a:r>
-              <a:rPr sz="2000" b="1" i="0">
-                <a:solidFill>
-                  <a:srgbClr val="5EEAD4"/>
-                </a:solidFill>
-                <a:latin typeface="Calibri"/>
-              </a:rPr>
-              <a:t>Log and move on</a:t>
-            </a:r>
-          </a:p>
-        </p:txBody>
-      </p:sp>
-      <p:sp>
-        <p:nvSpPr>
-          <p:cNvPr id="24" name="TextBox 45"/>
-          <p:cNvSpPr txBox="1"/>
-          <p:nvPr/>
-        </p:nvSpPr>
-        <p:spPr>
-          <a:xfrm>
-            <a:off x="6473952" y="4681728"/>
-            <a:ext cx="4937760" cy="502919"/>
-          </a:xfrm>
-          <a:prstGeom prst="rect">
-            <a:avLst/>
-          </a:prstGeom>
-          <a:noFill/>
-        </p:spPr>
-        <p:txBody>
-          <a:bodyPr wrap="square" lIns="0" tIns="0" rIns="0" bIns="0" anchor="t">
-            <a:spAutoFit/>
-          </a:bodyPr>
-          <a:lstStyle/>
-          <a:p>
-            <a:pPr marL="0" indent="0">
-              <a:buNone/>
-            </a:pPr>
-            <a:r>
-              <a:rPr sz="1500" b="0" i="0">
-                <a:solidFill>
-                  <a:srgbClr val="F2F6FC"/>
-                </a:solidFill>
-                <a:latin typeface="Calibri"/>
-              </a:rPr>
-              <a:t>Write the evidence in progress.md, mark the phase done, next phase</a:t>
-            </a:r>
-          </a:p>
-        </p:txBody>
-      </p:sp>
-      <p:sp>
-        <p:nvSpPr>
-          <p:cNvPr id="25" name="TextBox 46"/>
-          <p:cNvSpPr txBox="1"/>
-          <p:nvPr/>
-        </p:nvSpPr>
-        <p:spPr>
-          <a:xfrm>
-            <a:off x="548640" y="5623560"/>
-            <a:ext cx="11091672" cy="457200"/>
-          </a:xfrm>
-          <a:prstGeom prst="rect">
-            <a:avLst/>
-          </a:prstGeom>
-          <a:noFill/>
-        </p:spPr>
-        <p:txBody>
-          <a:bodyPr wrap="square" lIns="0" tIns="0" rIns="0" bIns="0" anchor="t">
-            <a:spAutoFit/>
-          </a:bodyPr>
-          <a:lstStyle/>
-          <a:p>
-            <a:pPr marL="0" indent="0">
-              <a:buNone/>
-            </a:pPr>
-            <a:r>
-              <a:rPr sz="1800" b="1" i="0">
-                <a:solidFill>
-                  <a:srgbClr val="5EEAD4"/>
-                </a:solidFill>
-                <a:latin typeface="Calibri"/>
-              </a:rPr>
-              <a:t>Self-healing: Claude finds and fixes its own mistakes inside the loop, before I review.</a:t>
+              <a:t>Known issues and failed gates become the next pass's to-do list</a:t>
             </a:r>
           </a:p>
         </p:txBody>
@@ -14743,11 +14443,20 @@
             <a:r>
               <a:rPr sz="3000" b="1" i="0">
                 <a:solidFill>
+                  <a:srgbClr val="F2F6FC"/>
+                </a:solidFill>
+                <a:latin typeface="Calibri"/>
+              </a:rPr>
+              <a:t>Each pass: build, verify, </a:t>
+            </a:r>
+            <a:r>
+              <a:rPr sz="3000" b="1" i="0">
+                <a:solidFill>
                   <a:srgbClr val="FF8A2B"/>
                 </a:solidFill>
                 <a:latin typeface="Calibri"/>
               </a:rPr>
-              <a:t>Exit gates</a:t>
+              <a:t>self-correct</a:t>
             </a:r>
             <a:r>
               <a:rPr sz="3000" b="1" i="0">
@@ -14756,7 +14465,7 @@
                 </a:solidFill>
                 <a:latin typeface="Calibri"/>
               </a:rPr>
-              <a:t>: a short pass-or-fail check for every phase</a:t>
+              <a:t>, repeat</a:t>
             </a:r>
             <a:endParaRPr lang="en-US" sz="3000" dirty="0"/>
           </a:p>
@@ -14782,7 +14491,7 @@
           </a:prstGeom>
           <a:extLst>
             <a:ext uri="{C572A759-6A51-4108-AA02-DFA0A04FC94B}">
-              <ma14:wrappingTextBoxFlag xmlns:ma14="http://schemas.microsoft.com/office/mac/drawingml/2011/main" xmlns="" val="0"/>
+              <ma14:wrappingTextBoxFlag xmlns="" xmlns:ma14="http://schemas.microsoft.com/office/mac/drawingml/2011/main" val="0"/>
             </a:ext>
           </a:extLst>
         </p:spPr>
@@ -14819,11 +14528,11 @@
         <p:spPr>
           <a:xfrm>
             <a:off x="548640" y="1554480"/>
-            <a:ext cx="5394960" cy="3154680"/>
+            <a:ext cx="3383280" cy="1508760"/>
           </a:xfrm>
           <a:prstGeom prst="roundRect">
             <a:avLst>
-              <a:gd name="adj" fmla="val 4347"/>
+              <a:gd name="adj" fmla="val 9090"/>
             </a:avLst>
           </a:prstGeom>
           <a:solidFill>
@@ -14866,7 +14575,7 @@
         <p:spPr>
           <a:xfrm>
             <a:off x="777240" y="1737360"/>
-            <a:ext cx="4937760" cy="411480"/>
+            <a:ext cx="2926080" cy="411480"/>
           </a:xfrm>
           <a:prstGeom prst="rect">
             <a:avLst/>
@@ -14885,11 +14594,11 @@
             <a:r>
               <a:rPr sz="2000" b="1" i="0">
                 <a:solidFill>
-                  <a:srgbClr val="38BDF8"/>
+                  <a:srgbClr val="F2F6FC"/>
                 </a:solidFill>
                 <a:latin typeface="Calibri"/>
               </a:rPr>
-              <a:t>Code</a:t>
+              <a:t>1  Read</a:t>
             </a:r>
           </a:p>
         </p:txBody>
@@ -14903,7 +14612,7 @@
         <p:spPr>
           <a:xfrm>
             <a:off x="777240" y="2212848"/>
-            <a:ext cx="4937760" cy="2286000"/>
+            <a:ext cx="2926080" cy="640080"/>
           </a:xfrm>
           <a:prstGeom prst="rect">
             <a:avLst/>
@@ -14916,68 +14625,17 @@
           </a:bodyPr>
           <a:lstStyle/>
           <a:p>
-            <a:pPr marL="228600" indent="-228600">
-              <a:buChar char="•"/>
-            </a:pPr>
-            <a:r>
-              <a:rPr sz="1800" b="0" i="0">
-                <a:solidFill>
-                  <a:srgbClr val="F2F6FC"/>
+            <a:pPr marL="0" indent="0">
+              <a:buNone/>
+            </a:pPr>
+            <a:r>
+              <a:rPr sz="1500" b="0" i="0">
+                <a:solidFill>
+                  <a:srgbClr val="A9BCD6"/>
                 </a:solidFill>
                 <a:latin typeface="Calibri"/>
               </a:rPr>
-              <a:t>pytest passes</a:t>
-            </a:r>
-          </a:p>
-          <a:p>
-            <a:pPr marL="228600" indent="-228600">
-              <a:spcBef>
-                <a:spcPts val="1000"/>
-              </a:spcBef>
-              <a:buChar char="•"/>
-            </a:pPr>
-            <a:r>
-              <a:rPr sz="1800" b="0" i="0">
-                <a:solidFill>
-                  <a:srgbClr val="F2F6FC"/>
-                </a:solidFill>
-                <a:latin typeface="Calibri"/>
-              </a:rPr>
-              <a:t>ruff and mypy are clean</a:t>
-            </a:r>
-          </a:p>
-          <a:p>
-            <a:pPr marL="228600" indent="-228600">
-              <a:spcBef>
-                <a:spcPts val="1000"/>
-              </a:spcBef>
-              <a:buChar char="•"/>
-            </a:pPr>
-            <a:r>
-              <a:rPr sz="1800" b="0" i="0">
-                <a:solidFill>
-                  <a:srgbClr val="F2F6FC"/>
-                </a:solidFill>
-                <a:latin typeface="Calibri"/>
-              </a:rPr>
-              <a:t>Debug-mode run works on a small sample</a:t>
-            </a:r>
-          </a:p>
-          <a:p>
-            <a:pPr marL="228600" indent="-228600">
-              <a:spcBef>
-                <a:spcPts val="1000"/>
-              </a:spcBef>
-              <a:buChar char="•"/>
-            </a:pPr>
-            <a:r>
-              <a:rPr sz="1800" b="0" i="0">
-                <a:solidFill>
-                  <a:srgbClr val="F2F6FC"/>
-                </a:solidFill>
-                <a:latin typeface="Calibri"/>
-              </a:rPr>
-              <a:t>The CLI command runs end to end</a:t>
+              <a:t>plans/ and progress.md: where am I, what is next?</a:t>
             </a:r>
           </a:p>
         </p:txBody>
@@ -14990,12 +14648,12 @@
         </p:nvSpPr>
         <p:spPr>
           <a:xfrm>
-            <a:off x="6245352" y="1554480"/>
-            <a:ext cx="5394960" cy="3154680"/>
+            <a:off x="4389120" y="1554480"/>
+            <a:ext cx="3383280" cy="1508760"/>
           </a:xfrm>
           <a:prstGeom prst="roundRect">
             <a:avLst>
-              <a:gd name="adj" fmla="val 4347"/>
+              <a:gd name="adj" fmla="val 9090"/>
             </a:avLst>
           </a:prstGeom>
           <a:solidFill>
@@ -15037,8 +14695,8 @@
         </p:nvSpPr>
         <p:spPr>
           <a:xfrm>
-            <a:off x="6473952" y="1737360"/>
-            <a:ext cx="4937760" cy="411480"/>
+            <a:off x="4617720" y="1737360"/>
+            <a:ext cx="2926080" cy="411480"/>
           </a:xfrm>
           <a:prstGeom prst="rect">
             <a:avLst/>
@@ -15057,11 +14715,11 @@
             <a:r>
               <a:rPr sz="2000" b="1" i="0">
                 <a:solidFill>
-                  <a:srgbClr val="38BDF8"/>
+                  <a:srgbClr val="F2F6FC"/>
                 </a:solidFill>
                 <a:latin typeface="Calibri"/>
               </a:rPr>
-              <a:t>Documents, data, anything else</a:t>
+              <a:t>2  Do</a:t>
             </a:r>
           </a:p>
         </p:txBody>
@@ -15074,8 +14732,8 @@
         </p:nvSpPr>
         <p:spPr>
           <a:xfrm>
-            <a:off x="6473952" y="2212848"/>
-            <a:ext cx="4937760" cy="2286000"/>
+            <a:off x="4617720" y="2212848"/>
+            <a:ext cx="2926080" cy="640080"/>
           </a:xfrm>
           <a:prstGeom prst="rect">
             <a:avLst/>
@@ -15088,85 +14746,17 @@
           </a:bodyPr>
           <a:lstStyle/>
           <a:p>
-            <a:pPr marL="228600" indent="-228600">
-              <a:buChar char="•"/>
-            </a:pPr>
-            <a:r>
-              <a:rPr sz="1800" b="0" i="0">
-                <a:solidFill>
-                  <a:srgbClr val="F2F6FC"/>
+            <a:pPr marL="0" indent="0">
+              <a:buNone/>
+            </a:pPr>
+            <a:r>
+              <a:rPr sz="1500" b="0" i="0">
+                <a:solidFill>
+                  <a:srgbClr val="A9BCD6"/>
                 </a:solidFill>
                 <a:latin typeface="Calibri"/>
               </a:rPr>
-              <a:t>Word doc: field "Client" and date are filled in</a:t>
-            </a:r>
-          </a:p>
-          <a:p>
-            <a:pPr marL="228600" indent="-228600">
-              <a:spcBef>
-                <a:spcPts val="1000"/>
-              </a:spcBef>
-              <a:buChar char="•"/>
-            </a:pPr>
-            <a:r>
-              <a:rPr sz="1800" b="0" i="0">
-                <a:solidFill>
-                  <a:srgbClr val="F2F6FC"/>
-                </a:solidFill>
-                <a:latin typeface="Calibri"/>
-              </a:rPr>
-              <a:t>Every slide has a title and speaker notes</a:t>
-            </a:r>
-          </a:p>
-          <a:p>
-            <a:pPr marL="228600" indent="-228600">
-              <a:spcBef>
-                <a:spcPts val="1000"/>
-              </a:spcBef>
-              <a:buChar char="•"/>
-            </a:pPr>
-            <a:r>
-              <a:rPr sz="1800" b="0" i="0">
-                <a:solidFill>
-                  <a:srgbClr val="F2F6FC"/>
-                </a:solidFill>
-                <a:latin typeface="Calibri"/>
-              </a:rPr>
-              <a:t>Spreadsheet totals match the source file</a:t>
-            </a:r>
-          </a:p>
-          <a:p>
-            <a:pPr marL="228600" indent="-228600">
-              <a:spcBef>
-                <a:spcPts val="1000"/>
-              </a:spcBef>
-              <a:buChar char="•"/>
-            </a:pPr>
-            <a:r>
-              <a:rPr sz="1800" b="0" i="0">
-                <a:solidFill>
-                  <a:srgbClr val="F2F6FC"/>
-                </a:solidFill>
-                <a:latin typeface="Calibri"/>
-              </a:rPr>
-              <a:t>No TODO or placeholder text left</a:t>
-            </a:r>
-          </a:p>
-          <a:p>
-            <a:pPr marL="228600" indent="-228600">
-              <a:spcBef>
-                <a:spcPts val="1000"/>
-              </a:spcBef>
-              <a:buChar char="•"/>
-            </a:pPr>
-            <a:r>
-              <a:rPr sz="1800" b="0" i="0">
-                <a:solidFill>
-                  <a:srgbClr val="F2F6FC"/>
-                </a:solidFill>
-                <a:latin typeface="Calibri"/>
-              </a:rPr>
-              <a:t>Email: the ask is in the first line</a:t>
+              <a:t>Only the next step or phase, nothing more</a:t>
             </a:r>
           </a:p>
         </p:txBody>
@@ -15179,12 +14769,12 @@
         </p:nvSpPr>
         <p:spPr>
           <a:xfrm>
-            <a:off x="548640" y="4892040"/>
-            <a:ext cx="3520440" cy="1051560"/>
+            <a:off x="8257031" y="1554480"/>
+            <a:ext cx="3383280" cy="1508760"/>
           </a:xfrm>
           <a:prstGeom prst="roundRect">
             <a:avLst>
-              <a:gd name="adj" fmla="val 13043"/>
+              <a:gd name="adj" fmla="val 9090"/>
             </a:avLst>
           </a:prstGeom>
           <a:solidFill>
@@ -15226,8 +14816,8 @@
         </p:nvSpPr>
         <p:spPr>
           <a:xfrm>
-            <a:off x="777240" y="5074920"/>
-            <a:ext cx="3063240" cy="320040"/>
+            <a:off x="8485632" y="1737360"/>
+            <a:ext cx="2926080" cy="411480"/>
           </a:xfrm>
           <a:prstGeom prst="rect">
             <a:avLst/>
@@ -15244,13 +14834,13 @@
               <a:buNone/>
             </a:pPr>
             <a:r>
-              <a:rPr sz="1800" b="1" i="0">
-                <a:solidFill>
-                  <a:srgbClr val="5EEAD4"/>
+              <a:rPr sz="2000" b="1" i="0">
+                <a:solidFill>
+                  <a:srgbClr val="F2F6FC"/>
                 </a:solidFill>
                 <a:latin typeface="Calibri"/>
               </a:rPr>
-              <a:t>Catch early</a:t>
+              <a:t>3  Verify</a:t>
             </a:r>
           </a:p>
         </p:txBody>
@@ -15263,8 +14853,8 @@
         </p:nvSpPr>
         <p:spPr>
           <a:xfrm>
-            <a:off x="777240" y="5458968"/>
-            <a:ext cx="3063240" cy="274319"/>
+            <a:off x="8485632" y="2212848"/>
+            <a:ext cx="2926080" cy="640080"/>
           </a:xfrm>
           <a:prstGeom prst="rect">
             <a:avLst/>
@@ -15281,35 +14871,33 @@
               <a:buNone/>
             </a:pPr>
             <a:r>
-              <a:rPr sz="1400" b="0" i="0">
+              <a:rPr sz="1500" b="0" i="0">
                 <a:solidFill>
                   <a:srgbClr val="A9BCD6"/>
                 </a:solidFill>
                 <a:latin typeface="Calibri"/>
               </a:rPr>
-              <a:t>Mistakes show up in the loop, not at the end</a:t>
-            </a:r>
-          </a:p>
-        </p:txBody>
-      </p:sp>
-      <p:sp>
-        <p:nvSpPr>
-          <p:cNvPr id="13" name="Rounded Rectangle 34"/>
+              <a:t>Run the exit gate: tests, checks, a debug run</a:t>
+            </a:r>
+          </a:p>
+        </p:txBody>
+      </p:sp>
+      <p:sp>
+        <p:nvSpPr>
+          <p:cNvPr id="13" name="Right Arrow 34"/>
           <p:cNvSpPr/>
           <p:nvPr/>
         </p:nvSpPr>
         <p:spPr>
           <a:xfrm>
-            <a:off x="4334255" y="4892040"/>
-            <a:ext cx="3520440" cy="1051560"/>
-          </a:xfrm>
-          <a:prstGeom prst="roundRect">
-            <a:avLst>
-              <a:gd name="adj" fmla="val 13043"/>
-            </a:avLst>
+            <a:off x="3977639" y="2148840"/>
+            <a:ext cx="365760" cy="329184"/>
+          </a:xfrm>
+          <a:prstGeom prst="rightArrow">
+            <a:avLst/>
           </a:prstGeom>
           <a:solidFill>
-            <a:srgbClr val="12305A"/>
+            <a:srgbClr val="A9BCD6"/>
           </a:solidFill>
           <a:ln>
             <a:noFill/>
@@ -15341,96 +14929,20 @@
       </p:sp>
       <p:sp>
         <p:nvSpPr>
-          <p:cNvPr id="14" name="TextBox 35"/>
-          <p:cNvSpPr txBox="1"/>
-          <p:nvPr/>
-        </p:nvSpPr>
-        <p:spPr>
-          <a:xfrm>
-            <a:off x="4562855" y="5074920"/>
-            <a:ext cx="3063240" cy="320040"/>
-          </a:xfrm>
-          <a:prstGeom prst="rect">
-            <a:avLst/>
-          </a:prstGeom>
-          <a:noFill/>
-        </p:spPr>
-        <p:txBody>
-          <a:bodyPr wrap="square" lIns="0" tIns="0" rIns="0" bIns="0" anchor="t">
-            <a:spAutoFit/>
-          </a:bodyPr>
-          <a:lstStyle/>
-          <a:p>
-            <a:pPr marL="0" indent="0">
-              <a:buNone/>
-            </a:pPr>
-            <a:r>
-              <a:rPr sz="1800" b="1" i="0">
-                <a:solidFill>
-                  <a:srgbClr val="5EEAD4"/>
-                </a:solidFill>
-                <a:latin typeface="Calibri"/>
-              </a:rPr>
-              <a:t>Self-correct</a:t>
-            </a:r>
-          </a:p>
-        </p:txBody>
-      </p:sp>
-      <p:sp>
-        <p:nvSpPr>
-          <p:cNvPr id="15" name="TextBox 36"/>
-          <p:cNvSpPr txBox="1"/>
-          <p:nvPr/>
-        </p:nvSpPr>
-        <p:spPr>
-          <a:xfrm>
-            <a:off x="4562855" y="5458968"/>
-            <a:ext cx="3063240" cy="274319"/>
-          </a:xfrm>
-          <a:prstGeom prst="rect">
-            <a:avLst/>
-          </a:prstGeom>
-          <a:noFill/>
-        </p:spPr>
-        <p:txBody>
-          <a:bodyPr wrap="square" lIns="0" tIns="0" rIns="0" bIns="0" anchor="t">
-            <a:spAutoFit/>
-          </a:bodyPr>
-          <a:lstStyle/>
-          <a:p>
-            <a:pPr marL="0" indent="0">
-              <a:buNone/>
-            </a:pPr>
-            <a:r>
-              <a:rPr sz="1400" b="0" i="0">
-                <a:solidFill>
-                  <a:srgbClr val="A9BCD6"/>
-                </a:solidFill>
-                <a:latin typeface="Calibri"/>
-              </a:rPr>
-              <a:t>A failed gate means fix and re-run</a:t>
-            </a:r>
-          </a:p>
-        </p:txBody>
-      </p:sp>
-      <p:sp>
-        <p:nvSpPr>
-          <p:cNvPr id="16" name="Rounded Rectangle 37"/>
+          <p:cNvPr id="14" name="Right Arrow 35"/>
           <p:cNvSpPr/>
           <p:nvPr/>
         </p:nvSpPr>
         <p:spPr>
           <a:xfrm>
-            <a:off x="8119871" y="4892040"/>
-            <a:ext cx="3520440" cy="1051560"/>
-          </a:xfrm>
-          <a:prstGeom prst="roundRect">
-            <a:avLst>
-              <a:gd name="adj" fmla="val 13043"/>
-            </a:avLst>
+            <a:off x="7818120" y="2148840"/>
+            <a:ext cx="365760" cy="329184"/>
+          </a:xfrm>
+          <a:prstGeom prst="rightArrow">
+            <a:avLst/>
           </a:prstGeom>
           <a:solidFill>
-            <a:srgbClr val="12305A"/>
+            <a:srgbClr val="A9BCD6"/>
           </a:solidFill>
           <a:ln>
             <a:noFill/>
@@ -15462,14 +14974,14 @@
       </p:sp>
       <p:sp>
         <p:nvSpPr>
-          <p:cNvPr id="17" name="TextBox 38"/>
-          <p:cNvSpPr txBox="1"/>
-          <p:nvPr/>
-        </p:nvSpPr>
-        <p:spPr>
-          <a:xfrm>
-            <a:off x="8348471" y="5074920"/>
-            <a:ext cx="3063240" cy="320040"/>
+          <p:cNvPr id="15" name="TextBox 36"/>
+          <p:cNvSpPr txBox="1"/>
+          <p:nvPr/>
+        </p:nvSpPr>
+        <p:spPr>
+          <a:xfrm>
+            <a:off x="548640" y="3200400"/>
+            <a:ext cx="5394960" cy="365760"/>
           </a:xfrm>
           <a:prstGeom prst="rect">
             <a:avLst/>
@@ -15482,31 +14994,31 @@
           </a:bodyPr>
           <a:lstStyle/>
           <a:p>
-            <a:pPr marL="0" indent="0">
+            <a:pPr marL="0" indent="0" algn="ctr">
               <a:buNone/>
             </a:pPr>
             <a:r>
               <a:rPr sz="1800" b="1" i="0">
                 <a:solidFill>
-                  <a:srgbClr val="5EEAD4"/>
+                  <a:srgbClr val="FBBF24"/>
                 </a:solidFill>
                 <a:latin typeface="Calibri"/>
               </a:rPr>
-              <a:t>Proof</a:t>
-            </a:r>
-          </a:p>
-        </p:txBody>
-      </p:sp>
-      <p:sp>
-        <p:nvSpPr>
-          <p:cNvPr id="18" name="TextBox 39"/>
-          <p:cNvSpPr txBox="1"/>
-          <p:nvPr/>
-        </p:nvSpPr>
-        <p:spPr>
-          <a:xfrm>
-            <a:off x="8348471" y="5458968"/>
-            <a:ext cx="3063240" cy="274319"/>
+              <a:t>Gate fails</a:t>
+            </a:r>
+          </a:p>
+        </p:txBody>
+      </p:sp>
+      <p:sp>
+        <p:nvSpPr>
+          <p:cNvPr id="16" name="TextBox 37"/>
+          <p:cNvSpPr txBox="1"/>
+          <p:nvPr/>
+        </p:nvSpPr>
+        <p:spPr>
+          <a:xfrm>
+            <a:off x="6245352" y="3200400"/>
+            <a:ext cx="5394960" cy="365760"/>
           </a:xfrm>
           <a:prstGeom prst="rect">
             <a:avLst/>
@@ -15519,31 +15031,168 @@
           </a:bodyPr>
           <a:lstStyle/>
           <a:p>
-            <a:pPr marL="0" indent="0">
-              <a:buNone/>
-            </a:pPr>
-            <a:r>
-              <a:rPr sz="1400" b="0" i="0">
-                <a:solidFill>
-                  <a:srgbClr val="A9BCD6"/>
+            <a:pPr marL="0" indent="0" algn="ctr">
+              <a:buNone/>
+            </a:pPr>
+            <a:r>
+              <a:rPr sz="1800" b="1" i="0">
+                <a:solidFill>
+                  <a:srgbClr val="5EEAD4"/>
                 </a:solidFill>
                 <a:latin typeface="Calibri"/>
               </a:rPr>
-              <a:t>Results sit in progress.md for me to read</a:t>
-            </a:r>
-          </a:p>
-        </p:txBody>
-      </p:sp>
-      <p:sp>
-        <p:nvSpPr>
-          <p:cNvPr id="19" name="TextBox 40"/>
-          <p:cNvSpPr txBox="1"/>
-          <p:nvPr/>
-        </p:nvSpPr>
-        <p:spPr>
-          <a:xfrm>
-            <a:off x="548640" y="6080760"/>
-            <a:ext cx="11091672" cy="320040"/>
+              <a:t>Gate passes</a:t>
+            </a:r>
+          </a:p>
+        </p:txBody>
+      </p:sp>
+      <p:sp>
+        <p:nvSpPr>
+          <p:cNvPr id="17" name="Down Arrow 38"/>
+          <p:cNvSpPr/>
+          <p:nvPr/>
+        </p:nvSpPr>
+        <p:spPr>
+          <a:xfrm>
+            <a:off x="3063240" y="3566160"/>
+            <a:ext cx="365760" cy="365760"/>
+          </a:xfrm>
+          <a:prstGeom prst="downArrow">
+            <a:avLst/>
+          </a:prstGeom>
+          <a:solidFill>
+            <a:srgbClr val="FBBF24"/>
+          </a:solidFill>
+          <a:ln>
+            <a:noFill/>
+          </a:ln>
+          <a:effectLst/>
+        </p:spPr>
+        <p:style>
+          <a:lnRef idx="1">
+            <a:schemeClr val="accent1"/>
+          </a:lnRef>
+          <a:fillRef idx="3">
+            <a:schemeClr val="accent1"/>
+          </a:fillRef>
+          <a:effectRef idx="2">
+            <a:schemeClr val="accent1"/>
+          </a:effectRef>
+          <a:fontRef idx="minor">
+            <a:schemeClr val="lt1"/>
+          </a:fontRef>
+        </p:style>
+        <p:txBody>
+          <a:bodyPr rtlCol="0" anchor="ctr"/>
+          <a:lstStyle/>
+          <a:p>
+            <a:pPr algn="ctr"/>
+            <a:endParaRPr/>
+          </a:p>
+        </p:txBody>
+      </p:sp>
+      <p:sp>
+        <p:nvSpPr>
+          <p:cNvPr id="18" name="Down Arrow 39"/>
+          <p:cNvSpPr/>
+          <p:nvPr/>
+        </p:nvSpPr>
+        <p:spPr>
+          <a:xfrm>
+            <a:off x="8759952" y="3566160"/>
+            <a:ext cx="365760" cy="365760"/>
+          </a:xfrm>
+          <a:prstGeom prst="downArrow">
+            <a:avLst/>
+          </a:prstGeom>
+          <a:solidFill>
+            <a:srgbClr val="5EEAD4"/>
+          </a:solidFill>
+          <a:ln>
+            <a:noFill/>
+          </a:ln>
+          <a:effectLst/>
+        </p:spPr>
+        <p:style>
+          <a:lnRef idx="1">
+            <a:schemeClr val="accent1"/>
+          </a:lnRef>
+          <a:fillRef idx="3">
+            <a:schemeClr val="accent1"/>
+          </a:fillRef>
+          <a:effectRef idx="2">
+            <a:schemeClr val="accent1"/>
+          </a:effectRef>
+          <a:fontRef idx="minor">
+            <a:schemeClr val="lt1"/>
+          </a:fontRef>
+        </p:style>
+        <p:txBody>
+          <a:bodyPr rtlCol="0" anchor="ctr"/>
+          <a:lstStyle/>
+          <a:p>
+            <a:pPr algn="ctr"/>
+            <a:endParaRPr/>
+          </a:p>
+        </p:txBody>
+      </p:sp>
+      <p:sp>
+        <p:nvSpPr>
+          <p:cNvPr id="19" name="Rounded Rectangle 40"/>
+          <p:cNvSpPr/>
+          <p:nvPr/>
+        </p:nvSpPr>
+        <p:spPr>
+          <a:xfrm>
+            <a:off x="548640" y="4023360"/>
+            <a:ext cx="5394960" cy="1371600"/>
+          </a:xfrm>
+          <a:prstGeom prst="roundRect">
+            <a:avLst>
+              <a:gd name="adj" fmla="val 10000"/>
+            </a:avLst>
+          </a:prstGeom>
+          <a:solidFill>
+            <a:srgbClr val="12305A"/>
+          </a:solidFill>
+          <a:ln>
+            <a:noFill/>
+          </a:ln>
+          <a:effectLst/>
+        </p:spPr>
+        <p:style>
+          <a:lnRef idx="1">
+            <a:schemeClr val="accent1"/>
+          </a:lnRef>
+          <a:fillRef idx="3">
+            <a:schemeClr val="accent1"/>
+          </a:fillRef>
+          <a:effectRef idx="2">
+            <a:schemeClr val="accent1"/>
+          </a:effectRef>
+          <a:fontRef idx="minor">
+            <a:schemeClr val="lt1"/>
+          </a:fontRef>
+        </p:style>
+        <p:txBody>
+          <a:bodyPr rtlCol="0" anchor="ctr"/>
+          <a:lstStyle/>
+          <a:p>
+            <a:pPr algn="ctr"/>
+            <a:endParaRPr/>
+          </a:p>
+        </p:txBody>
+      </p:sp>
+      <p:sp>
+        <p:nvSpPr>
+          <p:cNvPr id="20" name="TextBox 41"/>
+          <p:cNvSpPr txBox="1"/>
+          <p:nvPr/>
+        </p:nvSpPr>
+        <p:spPr>
+          <a:xfrm>
+            <a:off x="777240" y="4206240"/>
+            <a:ext cx="4937760" cy="411480"/>
           </a:xfrm>
           <a:prstGeom prst="rect">
             <a:avLst/>
@@ -15560,13 +15209,208 @@
               <a:buNone/>
             </a:pPr>
             <a:r>
-              <a:rPr sz="1400" b="0" i="0">
+              <a:rPr sz="2000" b="1" i="0">
+                <a:solidFill>
+                  <a:srgbClr val="FBBF24"/>
+                </a:solidFill>
+                <a:latin typeface="Calibri"/>
+              </a:rPr>
+              <a:t>Self-correct</a:t>
+            </a:r>
+          </a:p>
+        </p:txBody>
+      </p:sp>
+      <p:sp>
+        <p:nvSpPr>
+          <p:cNvPr id="21" name="TextBox 42"/>
+          <p:cNvSpPr txBox="1"/>
+          <p:nvPr/>
+        </p:nvSpPr>
+        <p:spPr>
+          <a:xfrm>
+            <a:off x="777240" y="4681728"/>
+            <a:ext cx="4937760" cy="502919"/>
+          </a:xfrm>
+          <a:prstGeom prst="rect">
+            <a:avLst/>
+          </a:prstGeom>
+          <a:noFill/>
+        </p:spPr>
+        <p:txBody>
+          <a:bodyPr wrap="square" lIns="0" tIns="0" rIns="0" bIns="0" anchor="t">
+            <a:spAutoFit/>
+          </a:bodyPr>
+          <a:lstStyle/>
+          <a:p>
+            <a:pPr marL="0" indent="0">
+              <a:buNone/>
+            </a:pPr>
+            <a:r>
+              <a:rPr sz="1500" b="0" i="0">
+                <a:solidFill>
+                  <a:srgbClr val="F2F6FC"/>
+                </a:solidFill>
+                <a:latin typeface="Calibri"/>
+              </a:rPr>
+              <a:t>Read the error, fix it, log it under Known issues, run the gate again</a:t>
+            </a:r>
+          </a:p>
+        </p:txBody>
+      </p:sp>
+      <p:sp>
+        <p:nvSpPr>
+          <p:cNvPr id="22" name="Rounded Rectangle 43"/>
+          <p:cNvSpPr/>
+          <p:nvPr/>
+        </p:nvSpPr>
+        <p:spPr>
+          <a:xfrm>
+            <a:off x="6245352" y="4023360"/>
+            <a:ext cx="5394960" cy="1371600"/>
+          </a:xfrm>
+          <a:prstGeom prst="roundRect">
+            <a:avLst>
+              <a:gd name="adj" fmla="val 10000"/>
+            </a:avLst>
+          </a:prstGeom>
+          <a:solidFill>
+            <a:srgbClr val="12305A"/>
+          </a:solidFill>
+          <a:ln>
+            <a:noFill/>
+          </a:ln>
+          <a:effectLst/>
+        </p:spPr>
+        <p:style>
+          <a:lnRef idx="1">
+            <a:schemeClr val="accent1"/>
+          </a:lnRef>
+          <a:fillRef idx="3">
+            <a:schemeClr val="accent1"/>
+          </a:fillRef>
+          <a:effectRef idx="2">
+            <a:schemeClr val="accent1"/>
+          </a:effectRef>
+          <a:fontRef idx="minor">
+            <a:schemeClr val="lt1"/>
+          </a:fontRef>
+        </p:style>
+        <p:txBody>
+          <a:bodyPr rtlCol="0" anchor="ctr"/>
+          <a:lstStyle/>
+          <a:p>
+            <a:pPr algn="ctr"/>
+            <a:endParaRPr/>
+          </a:p>
+        </p:txBody>
+      </p:sp>
+      <p:sp>
+        <p:nvSpPr>
+          <p:cNvPr id="23" name="TextBox 44"/>
+          <p:cNvSpPr txBox="1"/>
+          <p:nvPr/>
+        </p:nvSpPr>
+        <p:spPr>
+          <a:xfrm>
+            <a:off x="6473952" y="4206240"/>
+            <a:ext cx="4937760" cy="411480"/>
+          </a:xfrm>
+          <a:prstGeom prst="rect">
+            <a:avLst/>
+          </a:prstGeom>
+          <a:noFill/>
+        </p:spPr>
+        <p:txBody>
+          <a:bodyPr wrap="square" lIns="0" tIns="0" rIns="0" bIns="0" anchor="t">
+            <a:spAutoFit/>
+          </a:bodyPr>
+          <a:lstStyle/>
+          <a:p>
+            <a:pPr marL="0" indent="0">
+              <a:buNone/>
+            </a:pPr>
+            <a:r>
+              <a:rPr sz="2000" b="1" i="0">
                 <a:solidFill>
                   <a:srgbClr val="5EEAD4"/>
                 </a:solidFill>
                 <a:latin typeface="Calibri"/>
               </a:rPr>
-              <a:t>Tip: ask Claude to write the check itself: "write a script that checks the report against the brief".</a:t>
+              <a:t>Log and move on</a:t>
+            </a:r>
+          </a:p>
+        </p:txBody>
+      </p:sp>
+      <p:sp>
+        <p:nvSpPr>
+          <p:cNvPr id="24" name="TextBox 45"/>
+          <p:cNvSpPr txBox="1"/>
+          <p:nvPr/>
+        </p:nvSpPr>
+        <p:spPr>
+          <a:xfrm>
+            <a:off x="6473952" y="4681728"/>
+            <a:ext cx="4937760" cy="502919"/>
+          </a:xfrm>
+          <a:prstGeom prst="rect">
+            <a:avLst/>
+          </a:prstGeom>
+          <a:noFill/>
+        </p:spPr>
+        <p:txBody>
+          <a:bodyPr wrap="square" lIns="0" tIns="0" rIns="0" bIns="0" anchor="t">
+            <a:spAutoFit/>
+          </a:bodyPr>
+          <a:lstStyle/>
+          <a:p>
+            <a:pPr marL="0" indent="0">
+              <a:buNone/>
+            </a:pPr>
+            <a:r>
+              <a:rPr sz="1500" b="0" i="0">
+                <a:solidFill>
+                  <a:srgbClr val="F2F6FC"/>
+                </a:solidFill>
+                <a:latin typeface="Calibri"/>
+              </a:rPr>
+              <a:t>Write the evidence in progress.md, mark the phase done, next phase</a:t>
+            </a:r>
+          </a:p>
+        </p:txBody>
+      </p:sp>
+      <p:sp>
+        <p:nvSpPr>
+          <p:cNvPr id="25" name="TextBox 46"/>
+          <p:cNvSpPr txBox="1"/>
+          <p:nvPr/>
+        </p:nvSpPr>
+        <p:spPr>
+          <a:xfrm>
+            <a:off x="548640" y="5623560"/>
+            <a:ext cx="11091672" cy="457200"/>
+          </a:xfrm>
+          <a:prstGeom prst="rect">
+            <a:avLst/>
+          </a:prstGeom>
+          <a:noFill/>
+        </p:spPr>
+        <p:txBody>
+          <a:bodyPr wrap="square" lIns="0" tIns="0" rIns="0" bIns="0" anchor="t">
+            <a:spAutoFit/>
+          </a:bodyPr>
+          <a:lstStyle/>
+          <a:p>
+            <a:pPr marL="0" indent="0">
+              <a:buNone/>
+            </a:pPr>
+            <a:r>
+              <a:rPr sz="1800" b="1" i="0">
+                <a:solidFill>
+                  <a:srgbClr val="5EEAD4"/>
+                </a:solidFill>
+                <a:latin typeface="Calibri"/>
+              </a:rPr>
+              <a:t>Self-healing: Claude finds and fixes its own mistakes inside the loop, before I review.</a:t>
             </a:r>
           </a:p>
         </p:txBody>
@@ -15627,20 +15471,20 @@
             <a:r>
               <a:rPr sz="3000" b="1" i="0">
                 <a:solidFill>
+                  <a:srgbClr val="FF8A2B"/>
+                </a:solidFill>
+                <a:latin typeface="Calibri"/>
+              </a:rPr>
+              <a:t>Exit gates</a:t>
+            </a:r>
+            <a:r>
+              <a:rPr sz="3000" b="1" i="0">
+                <a:solidFill>
                   <a:srgbClr val="F2F6FC"/>
                 </a:solidFill>
                 <a:latin typeface="Calibri"/>
               </a:rPr>
-              <a:t>One phase at a time, or </a:t>
-            </a:r>
-            <a:r>
-              <a:rPr sz="3000" b="1" i="0">
-                <a:solidFill>
-                  <a:srgbClr val="FF8A2B"/>
-                </a:solidFill>
-                <a:latin typeface="Calibri"/>
-              </a:rPr>
-              <a:t>all phases at once</a:t>
+              <a:t>: a short pass-or-fail check for every phase</a:t>
             </a:r>
             <a:endParaRPr lang="en-US" sz="3000" dirty="0"/>
           </a:p>
@@ -15666,7 +15510,7 @@
           </a:prstGeom>
           <a:extLst>
             <a:ext uri="{C572A759-6A51-4108-AA02-DFA0A04FC94B}">
-              <ma14:wrappingTextBoxFlag xmlns:ma14="http://schemas.microsoft.com/office/mac/drawingml/2011/main" xmlns="" val="0"/>
+              <ma14:wrappingTextBoxFlag xmlns="" xmlns:ma14="http://schemas.microsoft.com/office/mac/drawingml/2011/main" val="0"/>
             </a:ext>
           </a:extLst>
         </p:spPr>
@@ -15703,11 +15547,11 @@
         <p:spPr>
           <a:xfrm>
             <a:off x="548640" y="1554480"/>
-            <a:ext cx="5394960" cy="3063240"/>
+            <a:ext cx="5394960" cy="3154680"/>
           </a:xfrm>
           <a:prstGeom prst="roundRect">
             <a:avLst>
-              <a:gd name="adj" fmla="val 4477"/>
+              <a:gd name="adj" fmla="val 4347"/>
             </a:avLst>
           </a:prstGeom>
           <a:solidFill>
@@ -15773,7 +15617,7 @@
                 </a:solidFill>
                 <a:latin typeface="Calibri"/>
               </a:rPr>
-              <a:t>Careful: one phase, then "next phase"</a:t>
+              <a:t>Code</a:t>
             </a:r>
           </a:p>
         </p:txBody>
@@ -15787,7 +15631,7 @@
         <p:spPr>
           <a:xfrm>
             <a:off x="777240" y="2212848"/>
-            <a:ext cx="4937760" cy="2194560"/>
+            <a:ext cx="4937760" cy="2286000"/>
           </a:xfrm>
           <a:prstGeom prst="rect">
             <a:avLst/>
@@ -15810,7 +15654,7 @@
                 </a:solidFill>
                 <a:latin typeface="Calibri"/>
               </a:rPr>
-              <a:t>I read the evidence after every phase</a:t>
+              <a:t>pytest passes</a:t>
             </a:r>
           </a:p>
           <a:p>
@@ -15827,7 +15671,7 @@
                 </a:solidFill>
                 <a:latin typeface="Calibri"/>
               </a:rPr>
-              <a:t>Best for new, risky or paid-API work</a:t>
+              <a:t>ruff and mypy are clean</a:t>
             </a:r>
           </a:p>
           <a:p>
@@ -15844,7 +15688,24 @@
                 </a:solidFill>
                 <a:latin typeface="Calibri"/>
               </a:rPr>
-              <a:t>Easy to steer between phases</a:t>
+              <a:t>Debug-mode run works on a small sample</a:t>
+            </a:r>
+          </a:p>
+          <a:p>
+            <a:pPr marL="228600" indent="-228600">
+              <a:spcBef>
+                <a:spcPts val="1000"/>
+              </a:spcBef>
+              <a:buChar char="•"/>
+            </a:pPr>
+            <a:r>
+              <a:rPr sz="1800" b="0" i="0">
+                <a:solidFill>
+                  <a:srgbClr val="F2F6FC"/>
+                </a:solidFill>
+                <a:latin typeface="Calibri"/>
+              </a:rPr>
+              <a:t>The CLI command runs end to end</a:t>
             </a:r>
           </a:p>
         </p:txBody>
@@ -15858,11 +15719,11 @@
         <p:spPr>
           <a:xfrm>
             <a:off x="6245352" y="1554480"/>
-            <a:ext cx="5394960" cy="3063240"/>
+            <a:ext cx="5394960" cy="3154680"/>
           </a:xfrm>
           <a:prstGeom prst="roundRect">
             <a:avLst>
-              <a:gd name="adj" fmla="val 4477"/>
+              <a:gd name="adj" fmla="val 4347"/>
             </a:avLst>
           </a:prstGeom>
           <a:solidFill>
@@ -15928,7 +15789,7 @@
                 </a:solidFill>
                 <a:latin typeface="Calibri"/>
               </a:rPr>
-              <a:t>Autopilot: all phases in one go</a:t>
+              <a:t>Documents, data, anything else</a:t>
             </a:r>
           </a:p>
         </p:txBody>
@@ -15942,7 +15803,7 @@
         <p:spPr>
           <a:xfrm>
             <a:off x="6473952" y="2212848"/>
-            <a:ext cx="4937760" cy="2194560"/>
+            <a:ext cx="4937760" cy="2286000"/>
           </a:xfrm>
           <a:prstGeom prst="rect">
             <a:avLst/>
@@ -15965,7 +15826,7 @@
                 </a:solidFill>
                 <a:latin typeface="Calibri"/>
               </a:rPr>
-              <a:t>Claude loops phase by phase, gate by gate</a:t>
+              <a:t>Word doc: field "Client" and date are filled in</a:t>
             </a:r>
           </a:p>
           <a:p>
@@ -15982,7 +15843,7 @@
                 </a:solidFill>
                 <a:latin typeface="Calibri"/>
               </a:rPr>
-              <a:t>Best for clear plans with solid gates</a:t>
+              <a:t>Every slide has a title and speaker notes</a:t>
             </a:r>
           </a:p>
           <a:p>
@@ -15999,7 +15860,7 @@
                 </a:solidFill>
                 <a:latin typeface="Calibri"/>
               </a:rPr>
-              <a:t>Tools: /goal, the /ralph-loop plugin, claude -p in a script</a:t>
+              <a:t>Spreadsheet totals match the source file</a:t>
             </a:r>
           </a:p>
           <a:p>
@@ -16016,7 +15877,24 @@
                 </a:solidFill>
                 <a:latin typeface="Calibri"/>
               </a:rPr>
-              <a:t>A notify hook pings me when it is done</a:t>
+              <a:t>No TODO or placeholder text left</a:t>
+            </a:r>
+          </a:p>
+          <a:p>
+            <a:pPr marL="228600" indent="-228600">
+              <a:spcBef>
+                <a:spcPts val="1000"/>
+              </a:spcBef>
+              <a:buChar char="•"/>
+            </a:pPr>
+            <a:r>
+              <a:rPr sz="1800" b="0" i="0">
+                <a:solidFill>
+                  <a:srgbClr val="F2F6FC"/>
+                </a:solidFill>
+                <a:latin typeface="Calibri"/>
+              </a:rPr>
+              <a:t>Email: the ask is in the first line</a:t>
             </a:r>
           </a:p>
         </p:txBody>
@@ -16029,21 +15907,19 @@
         </p:nvSpPr>
         <p:spPr>
           <a:xfrm>
-            <a:off x="548640" y="4800600"/>
-            <a:ext cx="5394960" cy="731520"/>
+            <a:off x="548640" y="4892040"/>
+            <a:ext cx="3520440" cy="1051560"/>
           </a:xfrm>
           <a:prstGeom prst="roundRect">
             <a:avLst>
-              <a:gd name="adj" fmla="val 12500"/>
+              <a:gd name="adj" fmla="val 13043"/>
             </a:avLst>
           </a:prstGeom>
           <a:solidFill>
-            <a:srgbClr val="081628"/>
+            <a:srgbClr val="12305A"/>
           </a:solidFill>
-          <a:ln w="12700">
-            <a:solidFill>
-              <a:srgbClr val="1E3F6F"/>
-            </a:solidFill>
+          <a:ln>
+            <a:noFill/>
           </a:ln>
           <a:effectLst/>
         </p:spPr>
@@ -16078,8 +15954,8 @@
         </p:nvSpPr>
         <p:spPr>
           <a:xfrm>
-            <a:off x="777240" y="4965192"/>
-            <a:ext cx="4937760" cy="457200"/>
+            <a:off x="777240" y="5074920"/>
+            <a:ext cx="3063240" cy="320040"/>
           </a:xfrm>
           <a:prstGeom prst="rect">
             <a:avLst/>
@@ -16096,40 +15972,75 @@
               <a:buNone/>
             </a:pPr>
             <a:r>
-              <a:rPr sz="1600" b="0" i="0">
-                <a:solidFill>
-                  <a:srgbClr val="F2F6FC"/>
-                </a:solidFill>
-                <a:latin typeface="Courier New"/>
-              </a:rPr>
-              <a:t>&gt; next phase</a:t>
-            </a:r>
-          </a:p>
-        </p:txBody>
-      </p:sp>
-      <p:sp>
-        <p:nvSpPr>
-          <p:cNvPr id="12" name="Rounded Rectangle 33"/>
+              <a:rPr sz="1800" b="1" i="0">
+                <a:solidFill>
+                  <a:srgbClr val="5EEAD4"/>
+                </a:solidFill>
+                <a:latin typeface="Calibri"/>
+              </a:rPr>
+              <a:t>Catch early</a:t>
+            </a:r>
+          </a:p>
+        </p:txBody>
+      </p:sp>
+      <p:sp>
+        <p:nvSpPr>
+          <p:cNvPr id="12" name="TextBox 33"/>
+          <p:cNvSpPr txBox="1"/>
+          <p:nvPr/>
+        </p:nvSpPr>
+        <p:spPr>
+          <a:xfrm>
+            <a:off x="777240" y="5458968"/>
+            <a:ext cx="3063240" cy="274319"/>
+          </a:xfrm>
+          <a:prstGeom prst="rect">
+            <a:avLst/>
+          </a:prstGeom>
+          <a:noFill/>
+        </p:spPr>
+        <p:txBody>
+          <a:bodyPr wrap="square" lIns="0" tIns="0" rIns="0" bIns="0" anchor="t">
+            <a:spAutoFit/>
+          </a:bodyPr>
+          <a:lstStyle/>
+          <a:p>
+            <a:pPr marL="0" indent="0">
+              <a:buNone/>
+            </a:pPr>
+            <a:r>
+              <a:rPr sz="1400" b="0" i="0">
+                <a:solidFill>
+                  <a:srgbClr val="A9BCD6"/>
+                </a:solidFill>
+                <a:latin typeface="Calibri"/>
+              </a:rPr>
+              <a:t>Mistakes show up in the loop, not at the end</a:t>
+            </a:r>
+          </a:p>
+        </p:txBody>
+      </p:sp>
+      <p:sp>
+        <p:nvSpPr>
+          <p:cNvPr id="13" name="Rounded Rectangle 34"/>
           <p:cNvSpPr/>
           <p:nvPr/>
         </p:nvSpPr>
         <p:spPr>
           <a:xfrm>
-            <a:off x="6245352" y="4800600"/>
-            <a:ext cx="5394960" cy="1097280"/>
+            <a:off x="4334255" y="4892040"/>
+            <a:ext cx="3520440" cy="1051560"/>
           </a:xfrm>
           <a:prstGeom prst="roundRect">
             <a:avLst>
-              <a:gd name="adj" fmla="val 8333"/>
+              <a:gd name="adj" fmla="val 13043"/>
             </a:avLst>
           </a:prstGeom>
           <a:solidFill>
-            <a:srgbClr val="081628"/>
+            <a:srgbClr val="12305A"/>
           </a:solidFill>
-          <a:ln w="12700">
-            <a:solidFill>
-              <a:srgbClr val="1E3F6F"/>
-            </a:solidFill>
+          <a:ln>
+            <a:noFill/>
           </a:ln>
           <a:effectLst/>
         </p:spPr>
@@ -16158,14 +16069,14 @@
       </p:sp>
       <p:sp>
         <p:nvSpPr>
-          <p:cNvPr id="13" name="TextBox 34"/>
-          <p:cNvSpPr txBox="1"/>
-          <p:nvPr/>
-        </p:nvSpPr>
-        <p:spPr>
-          <a:xfrm>
-            <a:off x="6473952" y="4965192"/>
-            <a:ext cx="4937760" cy="822959"/>
+          <p:cNvPr id="14" name="TextBox 35"/>
+          <p:cNvSpPr txBox="1"/>
+          <p:nvPr/>
+        </p:nvSpPr>
+        <p:spPr>
+          <a:xfrm>
+            <a:off x="4562855" y="5074920"/>
+            <a:ext cx="3063240" cy="320040"/>
           </a:xfrm>
           <a:prstGeom prst="rect">
             <a:avLst/>
@@ -16182,44 +16093,27 @@
               <a:buNone/>
             </a:pPr>
             <a:r>
-              <a:rPr sz="1400" b="0" i="0">
-                <a:solidFill>
-                  <a:srgbClr val="F2F6FC"/>
-                </a:solidFill>
-                <a:latin typeface="Courier New"/>
-              </a:rPr>
-              <a:t>&gt; Do all the phases in the plan. Stop only if</a:t>
-            </a:r>
-          </a:p>
-          <a:p>
-            <a:pPr marL="0" indent="0">
-              <a:spcBef>
-                <a:spcPts val="0"/>
-              </a:spcBef>
-              <a:buNone/>
-            </a:pPr>
-            <a:r>
-              <a:rPr sz="1400" b="0" i="0">
-                <a:solidFill>
-                  <a:srgbClr val="F2F6FC"/>
-                </a:solidFill>
-                <a:latin typeface="Courier New"/>
-              </a:rPr>
-              <a:t>  a gate fails twice or you need a decision.</a:t>
-            </a:r>
-          </a:p>
-        </p:txBody>
-      </p:sp>
-      <p:sp>
-        <p:nvSpPr>
-          <p:cNvPr id="14" name="TextBox 35"/>
-          <p:cNvSpPr txBox="1"/>
-          <p:nvPr/>
-        </p:nvSpPr>
-        <p:spPr>
-          <a:xfrm>
-            <a:off x="548640" y="5989320"/>
-            <a:ext cx="11091672" cy="365760"/>
+              <a:rPr sz="1800" b="1" i="0">
+                <a:solidFill>
+                  <a:srgbClr val="5EEAD4"/>
+                </a:solidFill>
+                <a:latin typeface="Calibri"/>
+              </a:rPr>
+              <a:t>Self-correct</a:t>
+            </a:r>
+          </a:p>
+        </p:txBody>
+      </p:sp>
+      <p:sp>
+        <p:nvSpPr>
+          <p:cNvPr id="15" name="TextBox 36"/>
+          <p:cNvSpPr txBox="1"/>
+          <p:nvPr/>
+        </p:nvSpPr>
+        <p:spPr>
+          <a:xfrm>
+            <a:off x="4562855" y="5458968"/>
+            <a:ext cx="3063240" cy="274319"/>
           </a:xfrm>
           <a:prstGeom prst="rect">
             <a:avLst/>
@@ -16236,13 +16130,171 @@
               <a:buNone/>
             </a:pPr>
             <a:r>
-              <a:rPr sz="1600" b="0" i="0">
+              <a:rPr sz="1400" b="0" i="0">
+                <a:solidFill>
+                  <a:srgbClr val="A9BCD6"/>
+                </a:solidFill>
+                <a:latin typeface="Calibri"/>
+              </a:rPr>
+              <a:t>A failed gate means fix and re-run</a:t>
+            </a:r>
+          </a:p>
+        </p:txBody>
+      </p:sp>
+      <p:sp>
+        <p:nvSpPr>
+          <p:cNvPr id="16" name="Rounded Rectangle 37"/>
+          <p:cNvSpPr/>
+          <p:nvPr/>
+        </p:nvSpPr>
+        <p:spPr>
+          <a:xfrm>
+            <a:off x="8119871" y="4892040"/>
+            <a:ext cx="3520440" cy="1051560"/>
+          </a:xfrm>
+          <a:prstGeom prst="roundRect">
+            <a:avLst>
+              <a:gd name="adj" fmla="val 13043"/>
+            </a:avLst>
+          </a:prstGeom>
+          <a:solidFill>
+            <a:srgbClr val="12305A"/>
+          </a:solidFill>
+          <a:ln>
+            <a:noFill/>
+          </a:ln>
+          <a:effectLst/>
+        </p:spPr>
+        <p:style>
+          <a:lnRef idx="1">
+            <a:schemeClr val="accent1"/>
+          </a:lnRef>
+          <a:fillRef idx="3">
+            <a:schemeClr val="accent1"/>
+          </a:fillRef>
+          <a:effectRef idx="2">
+            <a:schemeClr val="accent1"/>
+          </a:effectRef>
+          <a:fontRef idx="minor">
+            <a:schemeClr val="lt1"/>
+          </a:fontRef>
+        </p:style>
+        <p:txBody>
+          <a:bodyPr rtlCol="0" anchor="ctr"/>
+          <a:lstStyle/>
+          <a:p>
+            <a:pPr algn="ctr"/>
+            <a:endParaRPr/>
+          </a:p>
+        </p:txBody>
+      </p:sp>
+      <p:sp>
+        <p:nvSpPr>
+          <p:cNvPr id="17" name="TextBox 38"/>
+          <p:cNvSpPr txBox="1"/>
+          <p:nvPr/>
+        </p:nvSpPr>
+        <p:spPr>
+          <a:xfrm>
+            <a:off x="8348471" y="5074920"/>
+            <a:ext cx="3063240" cy="320040"/>
+          </a:xfrm>
+          <a:prstGeom prst="rect">
+            <a:avLst/>
+          </a:prstGeom>
+          <a:noFill/>
+        </p:spPr>
+        <p:txBody>
+          <a:bodyPr wrap="square" lIns="0" tIns="0" rIns="0" bIns="0" anchor="t">
+            <a:spAutoFit/>
+          </a:bodyPr>
+          <a:lstStyle/>
+          <a:p>
+            <a:pPr marL="0" indent="0">
+              <a:buNone/>
+            </a:pPr>
+            <a:r>
+              <a:rPr sz="1800" b="1" i="0">
                 <a:solidFill>
                   <a:srgbClr val="5EEAD4"/>
                 </a:solidFill>
                 <a:latin typeface="Calibri"/>
               </a:rPr>
-              <a:t>Start careful. Move to autopilot once the plan and the gates earn your trust.</a:t>
+              <a:t>Proof</a:t>
+            </a:r>
+          </a:p>
+        </p:txBody>
+      </p:sp>
+      <p:sp>
+        <p:nvSpPr>
+          <p:cNvPr id="18" name="TextBox 39"/>
+          <p:cNvSpPr txBox="1"/>
+          <p:nvPr/>
+        </p:nvSpPr>
+        <p:spPr>
+          <a:xfrm>
+            <a:off x="8348471" y="5458968"/>
+            <a:ext cx="3063240" cy="274319"/>
+          </a:xfrm>
+          <a:prstGeom prst="rect">
+            <a:avLst/>
+          </a:prstGeom>
+          <a:noFill/>
+        </p:spPr>
+        <p:txBody>
+          <a:bodyPr wrap="square" lIns="0" tIns="0" rIns="0" bIns="0" anchor="t">
+            <a:spAutoFit/>
+          </a:bodyPr>
+          <a:lstStyle/>
+          <a:p>
+            <a:pPr marL="0" indent="0">
+              <a:buNone/>
+            </a:pPr>
+            <a:r>
+              <a:rPr sz="1400" b="0" i="0">
+                <a:solidFill>
+                  <a:srgbClr val="A9BCD6"/>
+                </a:solidFill>
+                <a:latin typeface="Calibri"/>
+              </a:rPr>
+              <a:t>Results sit in progress.md for me to read</a:t>
+            </a:r>
+          </a:p>
+        </p:txBody>
+      </p:sp>
+      <p:sp>
+        <p:nvSpPr>
+          <p:cNvPr id="19" name="TextBox 40"/>
+          <p:cNvSpPr txBox="1"/>
+          <p:nvPr/>
+        </p:nvSpPr>
+        <p:spPr>
+          <a:xfrm>
+            <a:off x="548640" y="6080760"/>
+            <a:ext cx="11091672" cy="320040"/>
+          </a:xfrm>
+          <a:prstGeom prst="rect">
+            <a:avLst/>
+          </a:prstGeom>
+          <a:noFill/>
+        </p:spPr>
+        <p:txBody>
+          <a:bodyPr wrap="square" lIns="0" tIns="0" rIns="0" bIns="0" anchor="t">
+            <a:spAutoFit/>
+          </a:bodyPr>
+          <a:lstStyle/>
+          <a:p>
+            <a:pPr marL="0" indent="0">
+              <a:buNone/>
+            </a:pPr>
+            <a:r>
+              <a:rPr sz="1400" b="0" i="0">
+                <a:solidFill>
+                  <a:srgbClr val="5EEAD4"/>
+                </a:solidFill>
+                <a:latin typeface="Calibri"/>
+              </a:rPr>
+              <a:t>Tip: ask Claude to write the check itself: "write a script that checks the report against the brief".</a:t>
             </a:r>
           </a:p>
         </p:txBody>
@@ -16303,20 +16355,20 @@
             <a:r>
               <a:rPr sz="3000" b="1" i="0">
                 <a:solidFill>
+                  <a:srgbClr val="F2F6FC"/>
+                </a:solidFill>
+                <a:latin typeface="Calibri"/>
+              </a:rPr>
+              <a:t>One phase at a time, or </a:t>
+            </a:r>
+            <a:r>
+              <a:rPr sz="3000" b="1" i="0">
+                <a:solidFill>
                   <a:srgbClr val="FF8A2B"/>
                 </a:solidFill>
                 <a:latin typeface="Calibri"/>
               </a:rPr>
-              <a:t>My tricks and good practices</a:t>
-            </a:r>
-            <a:r>
-              <a:rPr sz="3000" b="1" i="0">
-                <a:solidFill>
-                  <a:srgbClr val="F2F6FC"/>
-                </a:solidFill>
-                <a:latin typeface="Calibri"/>
-              </a:rPr>
-              <a:t> for the loop</a:t>
+              <a:t>all phases at once</a:t>
             </a:r>
             <a:endParaRPr lang="en-US" sz="3000" dirty="0"/>
           </a:p>
@@ -16342,7 +16394,7 @@
           </a:prstGeom>
           <a:extLst>
             <a:ext uri="{C572A759-6A51-4108-AA02-DFA0A04FC94B}">
-              <ma14:wrappingTextBoxFlag xmlns:ma14="http://schemas.microsoft.com/office/mac/drawingml/2011/main" xmlns="" val="0"/>
+              <ma14:wrappingTextBoxFlag xmlns="" xmlns:ma14="http://schemas.microsoft.com/office/mac/drawingml/2011/main" val="0"/>
             </a:ext>
           </a:extLst>
         </p:spPr>
@@ -16379,11 +16431,11 @@
         <p:spPr>
           <a:xfrm>
             <a:off x="548640" y="1554480"/>
-            <a:ext cx="2606040" cy="2103120"/>
+            <a:ext cx="5394960" cy="3063240"/>
           </a:xfrm>
           <a:prstGeom prst="roundRect">
             <a:avLst>
-              <a:gd name="adj" fmla="val 6521"/>
+              <a:gd name="adj" fmla="val 4477"/>
             </a:avLst>
           </a:prstGeom>
           <a:solidFill>
@@ -16426,7 +16478,7 @@
         <p:spPr>
           <a:xfrm>
             <a:off x="777240" y="1737360"/>
-            <a:ext cx="2148840" cy="274320"/>
+            <a:ext cx="4937760" cy="411480"/>
           </a:xfrm>
           <a:prstGeom prst="rect">
             <a:avLst/>
@@ -16443,13 +16495,13 @@
               <a:buNone/>
             </a:pPr>
             <a:r>
-              <a:rPr sz="1600" b="1" i="0">
+              <a:rPr sz="2000" b="1" i="0">
                 <a:solidFill>
                   <a:srgbClr val="38BDF8"/>
                 </a:solidFill>
                 <a:latin typeface="Calibri"/>
               </a:rPr>
-              <a:t>1</a:t>
+              <a:t>Careful: one phase, then "next phase"</a:t>
             </a:r>
           </a:p>
         </p:txBody>
@@ -16462,8 +16514,8 @@
         </p:nvSpPr>
         <p:spPr>
           <a:xfrm>
-            <a:off x="777240" y="2057400"/>
-            <a:ext cx="2148840" cy="594360"/>
+            <a:off x="777240" y="2212848"/>
+            <a:ext cx="4937760" cy="2194560"/>
           </a:xfrm>
           <a:prstGeom prst="rect">
             <a:avLst/>
@@ -16476,72 +16528,69 @@
           </a:bodyPr>
           <a:lstStyle/>
           <a:p>
-            <a:pPr marL="0" indent="0">
-              <a:buNone/>
-            </a:pPr>
-            <a:r>
-              <a:rPr sz="1800" b="1" i="0">
+            <a:pPr marL="228600" indent="-228600">
+              <a:buChar char="•"/>
+            </a:pPr>
+            <a:r>
+              <a:rPr sz="1800" b="0" i="0">
                 <a:solidFill>
                   <a:srgbClr val="F2F6FC"/>
                 </a:solidFill>
                 <a:latin typeface="Calibri"/>
               </a:rPr>
-              <a:t>Numbered plans</a:t>
-            </a:r>
-          </a:p>
-        </p:txBody>
-      </p:sp>
-      <p:sp>
-        <p:nvSpPr>
-          <p:cNvPr id="7" name="TextBox 28"/>
-          <p:cNvSpPr txBox="1"/>
-          <p:nvPr/>
-        </p:nvSpPr>
-        <p:spPr>
-          <a:xfrm>
-            <a:off x="777240" y="2743200"/>
-            <a:ext cx="2148840" cy="868680"/>
-          </a:xfrm>
-          <a:prstGeom prst="rect">
-            <a:avLst/>
-          </a:prstGeom>
-          <a:noFill/>
-        </p:spPr>
-        <p:txBody>
-          <a:bodyPr wrap="square" lIns="0" tIns="0" rIns="0" bIns="0" anchor="t">
-            <a:spAutoFit/>
-          </a:bodyPr>
-          <a:lstStyle/>
-          <a:p>
-            <a:pPr marL="0" indent="0">
-              <a:buNone/>
-            </a:pPr>
-            <a:r>
-              <a:rPr sz="1500" b="0" i="0">
-                <a:solidFill>
-                  <a:srgbClr val="A9BCD6"/>
+              <a:t>I read the evidence after every phase</a:t>
+            </a:r>
+          </a:p>
+          <a:p>
+            <a:pPr marL="228600" indent="-228600">
+              <a:spcBef>
+                <a:spcPts val="1000"/>
+              </a:spcBef>
+              <a:buChar char="•"/>
+            </a:pPr>
+            <a:r>
+              <a:rPr sz="1800" b="0" i="0">
+                <a:solidFill>
+                  <a:srgbClr val="F2F6FC"/>
                 </a:solidFill>
                 <a:latin typeface="Calibri"/>
               </a:rPr>
-              <a:t>001, 002, 003: never rewrite an old plan for new work</a:t>
-            </a:r>
-          </a:p>
-        </p:txBody>
-      </p:sp>
-      <p:sp>
-        <p:nvSpPr>
-          <p:cNvPr id="8" name="Rounded Rectangle 29"/>
+              <a:t>Best for new, risky or paid-API work</a:t>
+            </a:r>
+          </a:p>
+          <a:p>
+            <a:pPr marL="228600" indent="-228600">
+              <a:spcBef>
+                <a:spcPts val="1000"/>
+              </a:spcBef>
+              <a:buChar char="•"/>
+            </a:pPr>
+            <a:r>
+              <a:rPr sz="1800" b="0" i="0">
+                <a:solidFill>
+                  <a:srgbClr val="F2F6FC"/>
+                </a:solidFill>
+                <a:latin typeface="Calibri"/>
+              </a:rPr>
+              <a:t>Easy to steer between phases</a:t>
+            </a:r>
+          </a:p>
+        </p:txBody>
+      </p:sp>
+      <p:sp>
+        <p:nvSpPr>
+          <p:cNvPr id="7" name="Rounded Rectangle 28"/>
           <p:cNvSpPr/>
           <p:nvPr/>
         </p:nvSpPr>
         <p:spPr>
           <a:xfrm>
-            <a:off x="3377153" y="1554480"/>
-            <a:ext cx="2606040" cy="2103120"/>
+            <a:off x="6245352" y="1554480"/>
+            <a:ext cx="5394960" cy="3063240"/>
           </a:xfrm>
           <a:prstGeom prst="roundRect">
             <a:avLst>
-              <a:gd name="adj" fmla="val 6521"/>
+              <a:gd name="adj" fmla="val 4477"/>
             </a:avLst>
           </a:prstGeom>
           <a:solidFill>
@@ -16577,14 +16626,14 @@
       </p:sp>
       <p:sp>
         <p:nvSpPr>
-          <p:cNvPr id="9" name="TextBox 30"/>
-          <p:cNvSpPr txBox="1"/>
-          <p:nvPr/>
-        </p:nvSpPr>
-        <p:spPr>
-          <a:xfrm>
-            <a:off x="3605753" y="1737360"/>
-            <a:ext cx="2148840" cy="274320"/>
+          <p:cNvPr id="8" name="TextBox 29"/>
+          <p:cNvSpPr txBox="1"/>
+          <p:nvPr/>
+        </p:nvSpPr>
+        <p:spPr>
+          <a:xfrm>
+            <a:off x="6473952" y="1737360"/>
+            <a:ext cx="4937760" cy="411480"/>
           </a:xfrm>
           <a:prstGeom prst="rect">
             <a:avLst/>
@@ -16601,27 +16650,27 @@
               <a:buNone/>
             </a:pPr>
             <a:r>
-              <a:rPr sz="1600" b="1" i="0">
+              <a:rPr sz="2000" b="1" i="0">
                 <a:solidFill>
                   <a:srgbClr val="38BDF8"/>
                 </a:solidFill>
                 <a:latin typeface="Calibri"/>
               </a:rPr>
-              <a:t>2</a:t>
-            </a:r>
-          </a:p>
-        </p:txBody>
-      </p:sp>
-      <p:sp>
-        <p:nvSpPr>
-          <p:cNvPr id="10" name="TextBox 31"/>
-          <p:cNvSpPr txBox="1"/>
-          <p:nvPr/>
-        </p:nvSpPr>
-        <p:spPr>
-          <a:xfrm>
-            <a:off x="3605753" y="2057400"/>
-            <a:ext cx="2148840" cy="594360"/>
+              <a:t>Autopilot: all phases in one go</a:t>
+            </a:r>
+          </a:p>
+        </p:txBody>
+      </p:sp>
+      <p:sp>
+        <p:nvSpPr>
+          <p:cNvPr id="9" name="TextBox 30"/>
+          <p:cNvSpPr txBox="1"/>
+          <p:nvPr/>
+        </p:nvSpPr>
+        <p:spPr>
+          <a:xfrm>
+            <a:off x="6473952" y="2212848"/>
+            <a:ext cx="4937760" cy="2194560"/>
           </a:xfrm>
           <a:prstGeom prst="rect">
             <a:avLst/>
@@ -16634,79 +16683,95 @@
           </a:bodyPr>
           <a:lstStyle/>
           <a:p>
-            <a:pPr marL="0" indent="0">
-              <a:buNone/>
-            </a:pPr>
-            <a:r>
-              <a:rPr sz="1800" b="1" i="0">
+            <a:pPr marL="228600" indent="-228600">
+              <a:buChar char="•"/>
+            </a:pPr>
+            <a:r>
+              <a:rPr sz="1800" b="0" i="0">
                 <a:solidFill>
                   <a:srgbClr val="F2F6FC"/>
                 </a:solidFill>
                 <a:latin typeface="Calibri"/>
               </a:rPr>
-              <a:t>progress.md every phase</a:t>
-            </a:r>
-          </a:p>
-        </p:txBody>
-      </p:sp>
-      <p:sp>
-        <p:nvSpPr>
-          <p:cNvPr id="11" name="TextBox 32"/>
-          <p:cNvSpPr txBox="1"/>
-          <p:nvPr/>
-        </p:nvSpPr>
-        <p:spPr>
-          <a:xfrm>
-            <a:off x="3605753" y="2743200"/>
-            <a:ext cx="2148840" cy="868680"/>
-          </a:xfrm>
-          <a:prstGeom prst="rect">
-            <a:avLst/>
-          </a:prstGeom>
-          <a:noFill/>
-        </p:spPr>
-        <p:txBody>
-          <a:bodyPr wrap="square" lIns="0" tIns="0" rIns="0" bIns="0" anchor="t">
-            <a:spAutoFit/>
-          </a:bodyPr>
-          <a:lstStyle/>
-          <a:p>
-            <a:pPr marL="0" indent="0">
-              <a:buNone/>
-            </a:pPr>
-            <a:r>
-              <a:rPr sz="1500" b="0" i="0">
-                <a:solidFill>
-                  <a:srgbClr val="A9BCD6"/>
+              <a:t>Claude loops phase by phase, gate by gate</a:t>
+            </a:r>
+          </a:p>
+          <a:p>
+            <a:pPr marL="228600" indent="-228600">
+              <a:spcBef>
+                <a:spcPts val="1000"/>
+              </a:spcBef>
+              <a:buChar char="•"/>
+            </a:pPr>
+            <a:r>
+              <a:rPr sz="1800" b="0" i="0">
+                <a:solidFill>
+                  <a:srgbClr val="F2F6FC"/>
                 </a:solidFill>
                 <a:latin typeface="Calibri"/>
               </a:rPr>
-              <a:t>Status, evidence, decisions, known issues: always current</a:t>
-            </a:r>
-          </a:p>
-        </p:txBody>
-      </p:sp>
-      <p:sp>
-        <p:nvSpPr>
-          <p:cNvPr id="12" name="Rounded Rectangle 33"/>
+              <a:t>Best for clear plans with solid gates</a:t>
+            </a:r>
+          </a:p>
+          <a:p>
+            <a:pPr marL="228600" indent="-228600">
+              <a:spcBef>
+                <a:spcPts val="1000"/>
+              </a:spcBef>
+              <a:buChar char="•"/>
+            </a:pPr>
+            <a:r>
+              <a:rPr sz="1800" b="0" i="0">
+                <a:solidFill>
+                  <a:srgbClr val="F2F6FC"/>
+                </a:solidFill>
+                <a:latin typeface="Calibri"/>
+              </a:rPr>
+              <a:t>Tools: /goal, the /ralph-loop plugin, claude -p in a script</a:t>
+            </a:r>
+          </a:p>
+          <a:p>
+            <a:pPr marL="228600" indent="-228600">
+              <a:spcBef>
+                <a:spcPts val="1000"/>
+              </a:spcBef>
+              <a:buChar char="•"/>
+            </a:pPr>
+            <a:r>
+              <a:rPr sz="1800" b="0" i="0">
+                <a:solidFill>
+                  <a:srgbClr val="F2F6FC"/>
+                </a:solidFill>
+                <a:latin typeface="Calibri"/>
+              </a:rPr>
+              <a:t>A notify hook pings me when it is done</a:t>
+            </a:r>
+          </a:p>
+        </p:txBody>
+      </p:sp>
+      <p:sp>
+        <p:nvSpPr>
+          <p:cNvPr id="10" name="Rounded Rectangle 31"/>
           <p:cNvSpPr/>
           <p:nvPr/>
         </p:nvSpPr>
         <p:spPr>
           <a:xfrm>
-            <a:off x="6205667" y="1554480"/>
-            <a:ext cx="2606040" cy="2103120"/>
+            <a:off x="548640" y="4800600"/>
+            <a:ext cx="5394960" cy="731520"/>
           </a:xfrm>
           <a:prstGeom prst="roundRect">
             <a:avLst>
-              <a:gd name="adj" fmla="val 6521"/>
+              <a:gd name="adj" fmla="val 12500"/>
             </a:avLst>
           </a:prstGeom>
           <a:solidFill>
-            <a:srgbClr val="12305A"/>
+            <a:srgbClr val="081628"/>
           </a:solidFill>
-          <a:ln>
-            <a:noFill/>
+          <a:ln w="12700">
+            <a:solidFill>
+              <a:srgbClr val="1E3F6F"/>
+            </a:solidFill>
           </a:ln>
           <a:effectLst/>
         </p:spPr>
@@ -16735,14 +16800,14 @@
       </p:sp>
       <p:sp>
         <p:nvSpPr>
-          <p:cNvPr id="13" name="TextBox 34"/>
-          <p:cNvSpPr txBox="1"/>
-          <p:nvPr/>
-        </p:nvSpPr>
-        <p:spPr>
-          <a:xfrm>
-            <a:off x="6434267" y="1737360"/>
-            <a:ext cx="2148840" cy="274320"/>
+          <p:cNvPr id="11" name="TextBox 32"/>
+          <p:cNvSpPr txBox="1"/>
+          <p:nvPr/>
+        </p:nvSpPr>
+        <p:spPr>
+          <a:xfrm>
+            <a:off x="777240" y="4965192"/>
+            <a:ext cx="4937760" cy="457200"/>
           </a:xfrm>
           <a:prstGeom prst="rect">
             <a:avLst/>
@@ -16759,112 +16824,40 @@
               <a:buNone/>
             </a:pPr>
             <a:r>
-              <a:rPr sz="1600" b="1" i="0">
-                <a:solidFill>
-                  <a:srgbClr val="38BDF8"/>
-                </a:solidFill>
-                <a:latin typeface="Calibri"/>
-              </a:rPr>
-              <a:t>3</a:t>
-            </a:r>
-          </a:p>
-        </p:txBody>
-      </p:sp>
-      <p:sp>
-        <p:nvSpPr>
-          <p:cNvPr id="14" name="TextBox 35"/>
-          <p:cNvSpPr txBox="1"/>
-          <p:nvPr/>
-        </p:nvSpPr>
-        <p:spPr>
-          <a:xfrm>
-            <a:off x="6434267" y="2057400"/>
-            <a:ext cx="2148840" cy="594360"/>
-          </a:xfrm>
-          <a:prstGeom prst="rect">
-            <a:avLst/>
-          </a:prstGeom>
-          <a:noFill/>
-        </p:spPr>
-        <p:txBody>
-          <a:bodyPr wrap="square" lIns="0" tIns="0" rIns="0" bIns="0" anchor="t">
-            <a:spAutoFit/>
-          </a:bodyPr>
-          <a:lstStyle/>
-          <a:p>
-            <a:pPr marL="0" indent="0">
-              <a:buNone/>
-            </a:pPr>
-            <a:r>
-              <a:rPr sz="1800" b="1" i="0">
+              <a:rPr sz="1600" b="0" i="0">
                 <a:solidFill>
                   <a:srgbClr val="F2F6FC"/>
                 </a:solidFill>
-                <a:latin typeface="Calibri"/>
-              </a:rPr>
-              <a:t>Ask only when blocked</a:t>
-            </a:r>
-          </a:p>
-        </p:txBody>
-      </p:sp>
-      <p:sp>
-        <p:nvSpPr>
-          <p:cNvPr id="15" name="TextBox 36"/>
-          <p:cNvSpPr txBox="1"/>
-          <p:nvPr/>
-        </p:nvSpPr>
-        <p:spPr>
-          <a:xfrm>
-            <a:off x="6434267" y="2743200"/>
-            <a:ext cx="2148840" cy="868680"/>
-          </a:xfrm>
-          <a:prstGeom prst="rect">
-            <a:avLst/>
-          </a:prstGeom>
-          <a:noFill/>
-        </p:spPr>
-        <p:txBody>
-          <a:bodyPr wrap="square" lIns="0" tIns="0" rIns="0" bIns="0" anchor="t">
-            <a:spAutoFit/>
-          </a:bodyPr>
-          <a:lstStyle/>
-          <a:p>
-            <a:pPr marL="0" indent="0">
-              <a:buNone/>
-            </a:pPr>
-            <a:r>
-              <a:rPr sz="1500" b="0" i="0">
-                <a:solidFill>
-                  <a:srgbClr val="A9BCD6"/>
-                </a:solidFill>
-                <a:latin typeface="Calibri"/>
-              </a:rPr>
-              <a:t>Claude picks sensible defaults and says which; I decide the big calls</a:t>
-            </a:r>
-          </a:p>
-        </p:txBody>
-      </p:sp>
-      <p:sp>
-        <p:nvSpPr>
-          <p:cNvPr id="16" name="Rounded Rectangle 37"/>
+                <a:latin typeface="Courier New"/>
+              </a:rPr>
+              <a:t>&gt; next phase</a:t>
+            </a:r>
+          </a:p>
+        </p:txBody>
+      </p:sp>
+      <p:sp>
+        <p:nvSpPr>
+          <p:cNvPr id="12" name="Rounded Rectangle 33"/>
           <p:cNvSpPr/>
           <p:nvPr/>
         </p:nvSpPr>
         <p:spPr>
           <a:xfrm>
-            <a:off x="9034180" y="1554480"/>
-            <a:ext cx="2606040" cy="2103120"/>
+            <a:off x="6245352" y="4800600"/>
+            <a:ext cx="5394960" cy="1097280"/>
           </a:xfrm>
           <a:prstGeom prst="roundRect">
             <a:avLst>
-              <a:gd name="adj" fmla="val 6521"/>
+              <a:gd name="adj" fmla="val 8333"/>
             </a:avLst>
           </a:prstGeom>
           <a:solidFill>
-            <a:srgbClr val="12305A"/>
+            <a:srgbClr val="081628"/>
           </a:solidFill>
-          <a:ln>
-            <a:noFill/>
+          <a:ln w="12700">
+            <a:solidFill>
+              <a:srgbClr val="1E3F6F"/>
+            </a:solidFill>
           </a:ln>
           <a:effectLst/>
         </p:spPr>
@@ -16893,14 +16886,14 @@
       </p:sp>
       <p:sp>
         <p:nvSpPr>
-          <p:cNvPr id="17" name="TextBox 38"/>
-          <p:cNvSpPr txBox="1"/>
-          <p:nvPr/>
-        </p:nvSpPr>
-        <p:spPr>
-          <a:xfrm>
-            <a:off x="9262780" y="1737360"/>
-            <a:ext cx="2148840" cy="274320"/>
+          <p:cNvPr id="13" name="TextBox 34"/>
+          <p:cNvSpPr txBox="1"/>
+          <p:nvPr/>
+        </p:nvSpPr>
+        <p:spPr>
+          <a:xfrm>
+            <a:off x="6473952" y="4965192"/>
+            <a:ext cx="4937760" cy="822959"/>
           </a:xfrm>
           <a:prstGeom prst="rect">
             <a:avLst/>
@@ -16917,27 +16910,44 @@
               <a:buNone/>
             </a:pPr>
             <a:r>
-              <a:rPr sz="1600" b="1" i="0">
-                <a:solidFill>
-                  <a:srgbClr val="38BDF8"/>
-                </a:solidFill>
-                <a:latin typeface="Calibri"/>
-              </a:rPr>
-              <a:t>4</a:t>
-            </a:r>
-          </a:p>
-        </p:txBody>
-      </p:sp>
-      <p:sp>
-        <p:nvSpPr>
-          <p:cNvPr id="18" name="TextBox 39"/>
-          <p:cNvSpPr txBox="1"/>
-          <p:nvPr/>
-        </p:nvSpPr>
-        <p:spPr>
-          <a:xfrm>
-            <a:off x="9262780" y="2057400"/>
-            <a:ext cx="2148840" cy="594360"/>
+              <a:rPr sz="1400" b="0" i="0">
+                <a:solidFill>
+                  <a:srgbClr val="F2F6FC"/>
+                </a:solidFill>
+                <a:latin typeface="Courier New"/>
+              </a:rPr>
+              <a:t>&gt; Do all the phases in the plan. Stop only if</a:t>
+            </a:r>
+          </a:p>
+          <a:p>
+            <a:pPr marL="0" indent="0">
+              <a:spcBef>
+                <a:spcPts val="0"/>
+              </a:spcBef>
+              <a:buNone/>
+            </a:pPr>
+            <a:r>
+              <a:rPr sz="1400" b="0" i="0">
+                <a:solidFill>
+                  <a:srgbClr val="F2F6FC"/>
+                </a:solidFill>
+                <a:latin typeface="Courier New"/>
+              </a:rPr>
+              <a:t>  a gate fails twice or you need a decision.</a:t>
+            </a:r>
+          </a:p>
+        </p:txBody>
+      </p:sp>
+      <p:sp>
+        <p:nvSpPr>
+          <p:cNvPr id="14" name="TextBox 35"/>
+          <p:cNvSpPr txBox="1"/>
+          <p:nvPr/>
+        </p:nvSpPr>
+        <p:spPr>
+          <a:xfrm>
+            <a:off x="548640" y="5989320"/>
+            <a:ext cx="11091672" cy="365760"/>
           </a:xfrm>
           <a:prstGeom prst="rect">
             <a:avLst/>
@@ -16954,682 +16964,13 @@
               <a:buNone/>
             </a:pPr>
             <a:r>
-              <a:rPr sz="1800" b="1" i="0">
-                <a:solidFill>
-                  <a:srgbClr val="F2F6FC"/>
+              <a:rPr sz="1600" b="0" i="0">
+                <a:solidFill>
+                  <a:srgbClr val="5EEAD4"/>
                 </a:solidFill>
                 <a:latin typeface="Calibri"/>
               </a:rPr>
-              <a:t>Small sample first</a:t>
-            </a:r>
-          </a:p>
-        </p:txBody>
-      </p:sp>
-      <p:sp>
-        <p:nvSpPr>
-          <p:cNvPr id="19" name="TextBox 40"/>
-          <p:cNvSpPr txBox="1"/>
-          <p:nvPr/>
-        </p:nvSpPr>
-        <p:spPr>
-          <a:xfrm>
-            <a:off x="9262780" y="2743200"/>
-            <a:ext cx="2148840" cy="868680"/>
-          </a:xfrm>
-          <a:prstGeom prst="rect">
-            <a:avLst/>
-          </a:prstGeom>
-          <a:noFill/>
-        </p:spPr>
-        <p:txBody>
-          <a:bodyPr wrap="square" lIns="0" tIns="0" rIns="0" bIns="0" anchor="t">
-            <a:spAutoFit/>
-          </a:bodyPr>
-          <a:lstStyle/>
-          <a:p>
-            <a:pPr marL="0" indent="0">
-              <a:buNone/>
-            </a:pPr>
-            <a:r>
-              <a:rPr sz="1500" b="0" i="0">
-                <a:solidFill>
-                  <a:srgbClr val="A9BCD6"/>
-                </a:solidFill>
-                <a:latin typeface="Calibri"/>
-              </a:rPr>
-              <a:t>Test on a handful of items before any big or paid run</a:t>
-            </a:r>
-          </a:p>
-        </p:txBody>
-      </p:sp>
-      <p:sp>
-        <p:nvSpPr>
-          <p:cNvPr id="20" name="Rounded Rectangle 41"/>
-          <p:cNvSpPr/>
-          <p:nvPr/>
-        </p:nvSpPr>
-        <p:spPr>
-          <a:xfrm>
-            <a:off x="548640" y="3840480"/>
-            <a:ext cx="2606040" cy="2103120"/>
-          </a:xfrm>
-          <a:prstGeom prst="roundRect">
-            <a:avLst>
-              <a:gd name="adj" fmla="val 6521"/>
-            </a:avLst>
-          </a:prstGeom>
-          <a:solidFill>
-            <a:srgbClr val="12305A"/>
-          </a:solidFill>
-          <a:ln>
-            <a:noFill/>
-          </a:ln>
-          <a:effectLst/>
-        </p:spPr>
-        <p:style>
-          <a:lnRef idx="1">
-            <a:schemeClr val="accent1"/>
-          </a:lnRef>
-          <a:fillRef idx="3">
-            <a:schemeClr val="accent1"/>
-          </a:fillRef>
-          <a:effectRef idx="2">
-            <a:schemeClr val="accent1"/>
-          </a:effectRef>
-          <a:fontRef idx="minor">
-            <a:schemeClr val="lt1"/>
-          </a:fontRef>
-        </p:style>
-        <p:txBody>
-          <a:bodyPr rtlCol="0" anchor="ctr"/>
-          <a:lstStyle/>
-          <a:p>
-            <a:pPr algn="ctr"/>
-            <a:endParaRPr/>
-          </a:p>
-        </p:txBody>
-      </p:sp>
-      <p:sp>
-        <p:nvSpPr>
-          <p:cNvPr id="21" name="TextBox 42"/>
-          <p:cNvSpPr txBox="1"/>
-          <p:nvPr/>
-        </p:nvSpPr>
-        <p:spPr>
-          <a:xfrm>
-            <a:off x="777240" y="4023360"/>
-            <a:ext cx="2148840" cy="274320"/>
-          </a:xfrm>
-          <a:prstGeom prst="rect">
-            <a:avLst/>
-          </a:prstGeom>
-          <a:noFill/>
-        </p:spPr>
-        <p:txBody>
-          <a:bodyPr wrap="square" lIns="0" tIns="0" rIns="0" bIns="0" anchor="t">
-            <a:spAutoFit/>
-          </a:bodyPr>
-          <a:lstStyle/>
-          <a:p>
-            <a:pPr marL="0" indent="0">
-              <a:buNone/>
-            </a:pPr>
-            <a:r>
-              <a:rPr sz="1600" b="1" i="0">
-                <a:solidFill>
-                  <a:srgbClr val="38BDF8"/>
-                </a:solidFill>
-                <a:latin typeface="Calibri"/>
-              </a:rPr>
-              <a:t>5</a:t>
-            </a:r>
-          </a:p>
-        </p:txBody>
-      </p:sp>
-      <p:sp>
-        <p:nvSpPr>
-          <p:cNvPr id="22" name="TextBox 43"/>
-          <p:cNvSpPr txBox="1"/>
-          <p:nvPr/>
-        </p:nvSpPr>
-        <p:spPr>
-          <a:xfrm>
-            <a:off x="777240" y="4343400"/>
-            <a:ext cx="2148840" cy="594360"/>
-          </a:xfrm>
-          <a:prstGeom prst="rect">
-            <a:avLst/>
-          </a:prstGeom>
-          <a:noFill/>
-        </p:spPr>
-        <p:txBody>
-          <a:bodyPr wrap="square" lIns="0" tIns="0" rIns="0" bIns="0" anchor="t">
-            <a:spAutoFit/>
-          </a:bodyPr>
-          <a:lstStyle/>
-          <a:p>
-            <a:pPr marL="0" indent="0">
-              <a:buNone/>
-            </a:pPr>
-            <a:r>
-              <a:rPr sz="1800" b="1" i="0">
-                <a:solidFill>
-                  <a:srgbClr val="F2F6FC"/>
-                </a:solidFill>
-                <a:latin typeface="Calibri"/>
-              </a:rPr>
-              <a:t>/clear between phases</a:t>
-            </a:r>
-          </a:p>
-        </p:txBody>
-      </p:sp>
-      <p:sp>
-        <p:nvSpPr>
-          <p:cNvPr id="23" name="TextBox 44"/>
-          <p:cNvSpPr txBox="1"/>
-          <p:nvPr/>
-        </p:nvSpPr>
-        <p:spPr>
-          <a:xfrm>
-            <a:off x="777240" y="5029200"/>
-            <a:ext cx="2148840" cy="868680"/>
-          </a:xfrm>
-          <a:prstGeom prst="rect">
-            <a:avLst/>
-          </a:prstGeom>
-          <a:noFill/>
-        </p:spPr>
-        <p:txBody>
-          <a:bodyPr wrap="square" lIns="0" tIns="0" rIns="0" bIns="0" anchor="t">
-            <a:spAutoFit/>
-          </a:bodyPr>
-          <a:lstStyle/>
-          <a:p>
-            <a:pPr marL="0" indent="0">
-              <a:buNone/>
-            </a:pPr>
-            <a:r>
-              <a:rPr sz="1500" b="0" i="0">
-                <a:solidFill>
-                  <a:srgbClr val="A9BCD6"/>
-                </a:solidFill>
-                <a:latin typeface="Calibri"/>
-              </a:rPr>
-              <a:t>progress.md holds the memory, so the chat can start fresh</a:t>
-            </a:r>
-          </a:p>
-        </p:txBody>
-      </p:sp>
-      <p:sp>
-        <p:nvSpPr>
-          <p:cNvPr id="24" name="Rounded Rectangle 45"/>
-          <p:cNvSpPr/>
-          <p:nvPr/>
-        </p:nvSpPr>
-        <p:spPr>
-          <a:xfrm>
-            <a:off x="3377153" y="3840480"/>
-            <a:ext cx="2606040" cy="2103120"/>
-          </a:xfrm>
-          <a:prstGeom prst="roundRect">
-            <a:avLst>
-              <a:gd name="adj" fmla="val 6521"/>
-            </a:avLst>
-          </a:prstGeom>
-          <a:solidFill>
-            <a:srgbClr val="12305A"/>
-          </a:solidFill>
-          <a:ln>
-            <a:noFill/>
-          </a:ln>
-          <a:effectLst/>
-        </p:spPr>
-        <p:style>
-          <a:lnRef idx="1">
-            <a:schemeClr val="accent1"/>
-          </a:lnRef>
-          <a:fillRef idx="3">
-            <a:schemeClr val="accent1"/>
-          </a:fillRef>
-          <a:effectRef idx="2">
-            <a:schemeClr val="accent1"/>
-          </a:effectRef>
-          <a:fontRef idx="minor">
-            <a:schemeClr val="lt1"/>
-          </a:fontRef>
-        </p:style>
-        <p:txBody>
-          <a:bodyPr rtlCol="0" anchor="ctr"/>
-          <a:lstStyle/>
-          <a:p>
-            <a:pPr algn="ctr"/>
-            <a:endParaRPr/>
-          </a:p>
-        </p:txBody>
-      </p:sp>
-      <p:sp>
-        <p:nvSpPr>
-          <p:cNvPr id="25" name="TextBox 46"/>
-          <p:cNvSpPr txBox="1"/>
-          <p:nvPr/>
-        </p:nvSpPr>
-        <p:spPr>
-          <a:xfrm>
-            <a:off x="3605753" y="4023360"/>
-            <a:ext cx="2148840" cy="274320"/>
-          </a:xfrm>
-          <a:prstGeom prst="rect">
-            <a:avLst/>
-          </a:prstGeom>
-          <a:noFill/>
-        </p:spPr>
-        <p:txBody>
-          <a:bodyPr wrap="square" lIns="0" tIns="0" rIns="0" bIns="0" anchor="t">
-            <a:spAutoFit/>
-          </a:bodyPr>
-          <a:lstStyle/>
-          <a:p>
-            <a:pPr marL="0" indent="0">
-              <a:buNone/>
-            </a:pPr>
-            <a:r>
-              <a:rPr sz="1600" b="1" i="0">
-                <a:solidFill>
-                  <a:srgbClr val="38BDF8"/>
-                </a:solidFill>
-                <a:latin typeface="Calibri"/>
-              </a:rPr>
-              <a:t>6</a:t>
-            </a:r>
-          </a:p>
-        </p:txBody>
-      </p:sp>
-      <p:sp>
-        <p:nvSpPr>
-          <p:cNvPr id="26" name="TextBox 47"/>
-          <p:cNvSpPr txBox="1"/>
-          <p:nvPr/>
-        </p:nvSpPr>
-        <p:spPr>
-          <a:xfrm>
-            <a:off x="3605753" y="4343400"/>
-            <a:ext cx="2148840" cy="594360"/>
-          </a:xfrm>
-          <a:prstGeom prst="rect">
-            <a:avLst/>
-          </a:prstGeom>
-          <a:noFill/>
-        </p:spPr>
-        <p:txBody>
-          <a:bodyPr wrap="square" lIns="0" tIns="0" rIns="0" bIns="0" anchor="t">
-            <a:spAutoFit/>
-          </a:bodyPr>
-          <a:lstStyle/>
-          <a:p>
-            <a:pPr marL="0" indent="0">
-              <a:buNone/>
-            </a:pPr>
-            <a:r>
-              <a:rPr sz="1800" b="1" i="0">
-                <a:solidFill>
-                  <a:srgbClr val="F2F6FC"/>
-                </a:solidFill>
-                <a:latin typeface="Calibri"/>
-              </a:rPr>
-              <a:t>Notify me when done</a:t>
-            </a:r>
-          </a:p>
-        </p:txBody>
-      </p:sp>
-      <p:sp>
-        <p:nvSpPr>
-          <p:cNvPr id="27" name="TextBox 48"/>
-          <p:cNvSpPr txBox="1"/>
-          <p:nvPr/>
-        </p:nvSpPr>
-        <p:spPr>
-          <a:xfrm>
-            <a:off x="3605753" y="5029200"/>
-            <a:ext cx="2148840" cy="868680"/>
-          </a:xfrm>
-          <a:prstGeom prst="rect">
-            <a:avLst/>
-          </a:prstGeom>
-          <a:noFill/>
-        </p:spPr>
-        <p:txBody>
-          <a:bodyPr wrap="square" lIns="0" tIns="0" rIns="0" bIns="0" anchor="t">
-            <a:spAutoFit/>
-          </a:bodyPr>
-          <a:lstStyle/>
-          <a:p>
-            <a:pPr marL="0" indent="0">
-              <a:buNone/>
-            </a:pPr>
-            <a:r>
-              <a:rPr sz="1500" b="0" i="0">
-                <a:solidFill>
-                  <a:srgbClr val="A9BCD6"/>
-                </a:solidFill>
-                <a:latin typeface="Calibri"/>
-              </a:rPr>
-              <a:t>A Stop hook sends a push: leave long runs and come back</a:t>
-            </a:r>
-          </a:p>
-        </p:txBody>
-      </p:sp>
-      <p:sp>
-        <p:nvSpPr>
-          <p:cNvPr id="28" name="Rounded Rectangle 49"/>
-          <p:cNvSpPr/>
-          <p:nvPr/>
-        </p:nvSpPr>
-        <p:spPr>
-          <a:xfrm>
-            <a:off x="6205667" y="3840480"/>
-            <a:ext cx="2606040" cy="2103120"/>
-          </a:xfrm>
-          <a:prstGeom prst="roundRect">
-            <a:avLst>
-              <a:gd name="adj" fmla="val 6521"/>
-            </a:avLst>
-          </a:prstGeom>
-          <a:solidFill>
-            <a:srgbClr val="12305A"/>
-          </a:solidFill>
-          <a:ln>
-            <a:noFill/>
-          </a:ln>
-          <a:effectLst/>
-        </p:spPr>
-        <p:style>
-          <a:lnRef idx="1">
-            <a:schemeClr val="accent1"/>
-          </a:lnRef>
-          <a:fillRef idx="3">
-            <a:schemeClr val="accent1"/>
-          </a:fillRef>
-          <a:effectRef idx="2">
-            <a:schemeClr val="accent1"/>
-          </a:effectRef>
-          <a:fontRef idx="minor">
-            <a:schemeClr val="lt1"/>
-          </a:fontRef>
-        </p:style>
-        <p:txBody>
-          <a:bodyPr rtlCol="0" anchor="ctr"/>
-          <a:lstStyle/>
-          <a:p>
-            <a:pPr algn="ctr"/>
-            <a:endParaRPr/>
-          </a:p>
-        </p:txBody>
-      </p:sp>
-      <p:sp>
-        <p:nvSpPr>
-          <p:cNvPr id="29" name="TextBox 50"/>
-          <p:cNvSpPr txBox="1"/>
-          <p:nvPr/>
-        </p:nvSpPr>
-        <p:spPr>
-          <a:xfrm>
-            <a:off x="6434267" y="4023360"/>
-            <a:ext cx="2148840" cy="274320"/>
-          </a:xfrm>
-          <a:prstGeom prst="rect">
-            <a:avLst/>
-          </a:prstGeom>
-          <a:noFill/>
-        </p:spPr>
-        <p:txBody>
-          <a:bodyPr wrap="square" lIns="0" tIns="0" rIns="0" bIns="0" anchor="t">
-            <a:spAutoFit/>
-          </a:bodyPr>
-          <a:lstStyle/>
-          <a:p>
-            <a:pPr marL="0" indent="0">
-              <a:buNone/>
-            </a:pPr>
-            <a:r>
-              <a:rPr sz="1600" b="1" i="0">
-                <a:solidFill>
-                  <a:srgbClr val="38BDF8"/>
-                </a:solidFill>
-                <a:latin typeface="Calibri"/>
-              </a:rPr>
-              <a:t>7</a:t>
-            </a:r>
-          </a:p>
-        </p:txBody>
-      </p:sp>
-      <p:sp>
-        <p:nvSpPr>
-          <p:cNvPr id="30" name="TextBox 51"/>
-          <p:cNvSpPr txBox="1"/>
-          <p:nvPr/>
-        </p:nvSpPr>
-        <p:spPr>
-          <a:xfrm>
-            <a:off x="6434267" y="4343400"/>
-            <a:ext cx="2148840" cy="594360"/>
-          </a:xfrm>
-          <a:prstGeom prst="rect">
-            <a:avLst/>
-          </a:prstGeom>
-          <a:noFill/>
-        </p:spPr>
-        <p:txBody>
-          <a:bodyPr wrap="square" lIns="0" tIns="0" rIns="0" bIns="0" anchor="t">
-            <a:spAutoFit/>
-          </a:bodyPr>
-          <a:lstStyle/>
-          <a:p>
-            <a:pPr marL="0" indent="0">
-              <a:buNone/>
-            </a:pPr>
-            <a:r>
-              <a:rPr sz="1800" b="1" i="0">
-                <a:solidFill>
-                  <a:srgbClr val="F2F6FC"/>
-                </a:solidFill>
-                <a:latin typeface="Calibri"/>
-              </a:rPr>
-              <a:t>Skills hold the recipe</a:t>
-            </a:r>
-          </a:p>
-        </p:txBody>
-      </p:sp>
-      <p:sp>
-        <p:nvSpPr>
-          <p:cNvPr id="31" name="TextBox 52"/>
-          <p:cNvSpPr txBox="1"/>
-          <p:nvPr/>
-        </p:nvSpPr>
-        <p:spPr>
-          <a:xfrm>
-            <a:off x="6434267" y="5029200"/>
-            <a:ext cx="2148840" cy="868680"/>
-          </a:xfrm>
-          <a:prstGeom prst="rect">
-            <a:avLst/>
-          </a:prstGeom>
-          <a:noFill/>
-        </p:spPr>
-        <p:txBody>
-          <a:bodyPr wrap="square" lIns="0" tIns="0" rIns="0" bIns="0" anchor="t">
-            <a:spAutoFit/>
-          </a:bodyPr>
-          <a:lstStyle/>
-          <a:p>
-            <a:pPr marL="0" indent="0">
-              <a:buNone/>
-            </a:pPr>
-            <a:r>
-              <a:rPr sz="1500" b="0" i="0">
-                <a:solidFill>
-                  <a:srgbClr val="A9BCD6"/>
-                </a:solidFill>
-                <a:latin typeface="Calibri"/>
-              </a:rPr>
-              <a:t>create-new-project builds plans/ and progress.md for me</a:t>
-            </a:r>
-          </a:p>
-        </p:txBody>
-      </p:sp>
-      <p:sp>
-        <p:nvSpPr>
-          <p:cNvPr id="32" name="Rounded Rectangle 53"/>
-          <p:cNvSpPr/>
-          <p:nvPr/>
-        </p:nvSpPr>
-        <p:spPr>
-          <a:xfrm>
-            <a:off x="9034180" y="3840480"/>
-            <a:ext cx="2606040" cy="2103120"/>
-          </a:xfrm>
-          <a:prstGeom prst="roundRect">
-            <a:avLst>
-              <a:gd name="adj" fmla="val 6521"/>
-            </a:avLst>
-          </a:prstGeom>
-          <a:solidFill>
-            <a:srgbClr val="12305A"/>
-          </a:solidFill>
-          <a:ln>
-            <a:noFill/>
-          </a:ln>
-          <a:effectLst/>
-        </p:spPr>
-        <p:style>
-          <a:lnRef idx="1">
-            <a:schemeClr val="accent1"/>
-          </a:lnRef>
-          <a:fillRef idx="3">
-            <a:schemeClr val="accent1"/>
-          </a:fillRef>
-          <a:effectRef idx="2">
-            <a:schemeClr val="accent1"/>
-          </a:effectRef>
-          <a:fontRef idx="minor">
-            <a:schemeClr val="lt1"/>
-          </a:fontRef>
-        </p:style>
-        <p:txBody>
-          <a:bodyPr rtlCol="0" anchor="ctr"/>
-          <a:lstStyle/>
-          <a:p>
-            <a:pPr algn="ctr"/>
-            <a:endParaRPr/>
-          </a:p>
-        </p:txBody>
-      </p:sp>
-      <p:sp>
-        <p:nvSpPr>
-          <p:cNvPr id="33" name="TextBox 54"/>
-          <p:cNvSpPr txBox="1"/>
-          <p:nvPr/>
-        </p:nvSpPr>
-        <p:spPr>
-          <a:xfrm>
-            <a:off x="9262780" y="4023360"/>
-            <a:ext cx="2148840" cy="274320"/>
-          </a:xfrm>
-          <a:prstGeom prst="rect">
-            <a:avLst/>
-          </a:prstGeom>
-          <a:noFill/>
-        </p:spPr>
-        <p:txBody>
-          <a:bodyPr wrap="square" lIns="0" tIns="0" rIns="0" bIns="0" anchor="t">
-            <a:spAutoFit/>
-          </a:bodyPr>
-          <a:lstStyle/>
-          <a:p>
-            <a:pPr marL="0" indent="0">
-              <a:buNone/>
-            </a:pPr>
-            <a:r>
-              <a:rPr sz="1600" b="1" i="0">
-                <a:solidFill>
-                  <a:srgbClr val="38BDF8"/>
-                </a:solidFill>
-                <a:latin typeface="Calibri"/>
-              </a:rPr>
-              <a:t>8</a:t>
-            </a:r>
-          </a:p>
-        </p:txBody>
-      </p:sp>
-      <p:sp>
-        <p:nvSpPr>
-          <p:cNvPr id="34" name="TextBox 55"/>
-          <p:cNvSpPr txBox="1"/>
-          <p:nvPr/>
-        </p:nvSpPr>
-        <p:spPr>
-          <a:xfrm>
-            <a:off x="9262780" y="4343400"/>
-            <a:ext cx="2148840" cy="594360"/>
-          </a:xfrm>
-          <a:prstGeom prst="rect">
-            <a:avLst/>
-          </a:prstGeom>
-          <a:noFill/>
-        </p:spPr>
-        <p:txBody>
-          <a:bodyPr wrap="square" lIns="0" tIns="0" rIns="0" bIns="0" anchor="t">
-            <a:spAutoFit/>
-          </a:bodyPr>
-          <a:lstStyle/>
-          <a:p>
-            <a:pPr marL="0" indent="0">
-              <a:buNone/>
-            </a:pPr>
-            <a:r>
-              <a:rPr sz="1800" b="1" i="0">
-                <a:solidFill>
-                  <a:srgbClr val="F2F6FC"/>
-                </a:solidFill>
-                <a:latin typeface="Calibri"/>
-              </a:rPr>
-              <a:t>No commit unless asked</a:t>
-            </a:r>
-          </a:p>
-        </p:txBody>
-      </p:sp>
-      <p:sp>
-        <p:nvSpPr>
-          <p:cNvPr id="35" name="TextBox 56"/>
-          <p:cNvSpPr txBox="1"/>
-          <p:nvPr/>
-        </p:nvSpPr>
-        <p:spPr>
-          <a:xfrm>
-            <a:off x="9262780" y="5029200"/>
-            <a:ext cx="2148840" cy="868680"/>
-          </a:xfrm>
-          <a:prstGeom prst="rect">
-            <a:avLst/>
-          </a:prstGeom>
-          <a:noFill/>
-        </p:spPr>
-        <p:txBody>
-          <a:bodyPr wrap="square" lIns="0" tIns="0" rIns="0" bIns="0" anchor="t">
-            <a:spAutoFit/>
-          </a:bodyPr>
-          <a:lstStyle/>
-          <a:p>
-            <a:pPr marL="0" indent="0">
-              <a:buNone/>
-            </a:pPr>
-            <a:r>
-              <a:rPr sz="1500" b="0" i="0">
-                <a:solidFill>
-                  <a:srgbClr val="A9BCD6"/>
-                </a:solidFill>
-                <a:latin typeface="Calibri"/>
-              </a:rPr>
-              <a:t>I review the diff or file first, then say commit</a:t>
+              <a:t>Start careful. Move to autopilot once the plan and the gates earn your trust.</a:t>
             </a:r>
           </a:p>
         </p:txBody>
@@ -17661,24 +17002,125 @@
       </p:grpSpPr>
       <p:sp>
         <p:nvSpPr>
-          <p:cNvPr id="2" name="Oval 1"/>
+          <p:cNvPr id="2" name="Text 0"/>
+          <p:cNvSpPr>
+            <a:spLocks noGrp="1"/>
+          </p:cNvSpPr>
+          <p:nvPr>
+            <p:ph type="title" idx="100" hasCustomPrompt="1"/>
+          </p:nvPr>
+        </p:nvSpPr>
+        <p:spPr>
+          <a:xfrm>
+            <a:off x="548640" y="320040"/>
+            <a:ext cx="11064240" cy="1005840"/>
+          </a:xfrm>
+          <a:prstGeom prst="rect">
+            <a:avLst/>
+          </a:prstGeom>
+          <a:noFill/>
+          <a:ln/>
+        </p:spPr>
+        <p:txBody>
+          <a:bodyPr wrap="square" lIns="0" tIns="0" rIns="0" bIns="0" rtlCol="0" anchor="ctr"/>
+          <a:lstStyle/>
+          <a:p>
+            <a:pPr marL="0" indent="0" algn="l">
+              <a:buNone/>
+            </a:pPr>
+            <a:r>
+              <a:rPr sz="3000" b="1" i="0">
+                <a:solidFill>
+                  <a:srgbClr val="FF8A2B"/>
+                </a:solidFill>
+                <a:latin typeface="Calibri"/>
+              </a:rPr>
+              <a:t>My tricks and good practices</a:t>
+            </a:r>
+            <a:r>
+              <a:rPr sz="3000" b="1" i="0">
+                <a:solidFill>
+                  <a:srgbClr val="F2F6FC"/>
+                </a:solidFill>
+                <a:latin typeface="Calibri"/>
+              </a:rPr>
+              <a:t> for the loop</a:t>
+            </a:r>
+            <a:endParaRPr lang="en-US" sz="3000" dirty="0"/>
+          </a:p>
+        </p:txBody>
+      </p:sp>
+      <p:sp>
+        <p:nvSpPr>
+          <p:cNvPr id="3" name="Slide Number Placeholder 0"/>
+          <p:cNvSpPr>
+            <a:spLocks noGrp="1"/>
+          </p:cNvSpPr>
+          <p:nvPr>
+            <p:ph type="sldNum" sz="quarter" idx="4294967295"/>
+          </p:nvPr>
+        </p:nvSpPr>
+        <p:spPr>
+          <a:xfrm>
+            <a:off x="11247120" y="6400800"/>
+            <a:ext cx="548640" cy="274320"/>
+          </a:xfrm>
+          <a:prstGeom prst="rect">
+            <a:avLst/>
+          </a:prstGeom>
+          <a:extLst>
+            <a:ext uri="{C572A759-6A51-4108-AA02-DFA0A04FC94B}">
+              <ma14:wrappingTextBoxFlag xmlns="" xmlns:ma14="http://schemas.microsoft.com/office/mac/drawingml/2011/main" val="0"/>
+            </a:ext>
+          </a:extLst>
+        </p:spPr>
+        <p:txBody>
+          <a:bodyPr/>
+          <a:lstStyle>
+            <a:lvl1pPr>
+              <a:defRPr sz="1200">
+                <a:solidFill>
+                  <a:srgbClr val="A9BCD6"/>
+                </a:solidFill>
+                <a:latin typeface="Calibri"/>
+                <a:ea typeface="Calibri"/>
+                <a:cs typeface="Calibri"/>
+              </a:defRPr>
+            </a:lvl1pPr>
+          </a:lstStyle>
+          <a:p>
+            <a:pPr algn="r"/>
+            <a:fld id="{F7021451-1387-4CA6-816F-3879F97B5CBC}" type="slidenum">
+              <a:rPr lang="en-US" b="0"/>
+              <a:t>25</a:t>
+            </a:fld>
+            <a:endParaRPr lang="en-US"/>
+          </a:p>
+        </p:txBody>
+      </p:sp>
+      <p:sp>
+        <p:nvSpPr>
+          <p:cNvPr id="4" name="Rounded Rectangle 25"/>
           <p:cNvSpPr/>
           <p:nvPr/>
         </p:nvSpPr>
         <p:spPr>
           <a:xfrm>
-            <a:off x="822960" y="2697480"/>
-            <a:ext cx="1371600" cy="1371600"/>
-          </a:xfrm>
-          <a:prstGeom prst="ellipse">
-            <a:avLst/>
+            <a:off x="548640" y="1554480"/>
+            <a:ext cx="2606040" cy="2103120"/>
+          </a:xfrm>
+          <a:prstGeom prst="roundRect">
+            <a:avLst>
+              <a:gd name="adj" fmla="val 6521"/>
+            </a:avLst>
           </a:prstGeom>
           <a:solidFill>
-            <a:srgbClr val="38BDF8"/>
+            <a:srgbClr val="12305A"/>
           </a:solidFill>
           <a:ln>
             <a:noFill/>
           </a:ln>
+          <a:effectLst/>
         </p:spPr>
         <p:style>
           <a:lnRef idx="1">
@@ -17705,84 +17147,14 @@
       </p:sp>
       <p:sp>
         <p:nvSpPr>
-          <p:cNvPr id="3" name="TextBox 2"/>
-          <p:cNvSpPr txBox="1"/>
-          <p:nvPr/>
-        </p:nvSpPr>
-        <p:spPr>
-          <a:xfrm>
-            <a:off x="822960" y="2697480"/>
-            <a:ext cx="1371600" cy="1371600"/>
-          </a:xfrm>
-          <a:prstGeom prst="rect">
-            <a:avLst/>
-          </a:prstGeom>
-          <a:noFill/>
-        </p:spPr>
-        <p:txBody>
-          <a:bodyPr wrap="square" lIns="0" tIns="0" rIns="0" bIns="0" anchor="ctr">
-            <a:spAutoFit/>
-          </a:bodyPr>
-          <a:lstStyle/>
-          <a:p>
-            <a:pPr algn="ctr"/>
-            <a:r>
-              <a:rPr sz="6000" b="1">
-                <a:solidFill>
-                  <a:srgbClr val="0B1F3A"/>
-                </a:solidFill>
-                <a:latin typeface="Calibri"/>
-              </a:rPr>
-              <a:t>4</a:t>
-            </a:r>
-          </a:p>
-        </p:txBody>
-      </p:sp>
-      <p:sp>
-        <p:nvSpPr>
-          <p:cNvPr id="4" name="TextBox 3"/>
-          <p:cNvSpPr txBox="1"/>
-          <p:nvPr/>
-        </p:nvSpPr>
-        <p:spPr>
-          <a:xfrm>
-            <a:off x="2651760" y="2606040"/>
-            <a:ext cx="5486400" cy="914400"/>
-          </a:xfrm>
-          <a:prstGeom prst="rect">
-            <a:avLst/>
-          </a:prstGeom>
-          <a:noFill/>
-        </p:spPr>
-        <p:txBody>
-          <a:bodyPr wrap="square" lIns="0" tIns="0" rIns="0" bIns="0" anchor="ctr">
-            <a:spAutoFit/>
-          </a:bodyPr>
-          <a:lstStyle/>
-          <a:p>
-            <a:pPr algn="l"/>
-            <a:r>
-              <a:rPr sz="5400" b="1">
-                <a:solidFill>
-                  <a:srgbClr val="F2F6FC"/>
-                </a:solidFill>
-                <a:latin typeface="Calibri"/>
-              </a:rPr>
-              <a:t>Amplify</a:t>
-            </a:r>
-          </a:p>
-        </p:txBody>
-      </p:sp>
-      <p:sp>
-        <p:nvSpPr>
-          <p:cNvPr id="5" name="TextBox 4"/>
-          <p:cNvSpPr txBox="1"/>
-          <p:nvPr/>
-        </p:nvSpPr>
-        <p:spPr>
-          <a:xfrm>
-            <a:off x="2651760" y="3611880"/>
-            <a:ext cx="5486400" cy="822960"/>
+          <p:cNvPr id="5" name="TextBox 26"/>
+          <p:cNvSpPr txBox="1"/>
+          <p:nvPr/>
+        </p:nvSpPr>
+        <p:spPr>
+          <a:xfrm>
+            <a:off x="777240" y="1737360"/>
+            <a:ext cx="2148840" cy="274320"/>
           </a:xfrm>
           <a:prstGeom prst="rect">
             <a:avLst/>
@@ -17795,33 +17167,109 @@
           </a:bodyPr>
           <a:lstStyle/>
           <a:p>
-            <a:pPr algn="l"/>
-            <a:r>
-              <a:rPr sz="2200" b="0">
+            <a:pPr marL="0" indent="0">
+              <a:buNone/>
+            </a:pPr>
+            <a:r>
+              <a:rPr sz="1600" b="1" i="0">
+                <a:solidFill>
+                  <a:srgbClr val="38BDF8"/>
+                </a:solidFill>
+                <a:latin typeface="Calibri"/>
+              </a:rPr>
+              <a:t>1</a:t>
+            </a:r>
+          </a:p>
+        </p:txBody>
+      </p:sp>
+      <p:sp>
+        <p:nvSpPr>
+          <p:cNvPr id="6" name="TextBox 27"/>
+          <p:cNvSpPr txBox="1"/>
+          <p:nvPr/>
+        </p:nvSpPr>
+        <p:spPr>
+          <a:xfrm>
+            <a:off x="777240" y="2057400"/>
+            <a:ext cx="2148840" cy="594360"/>
+          </a:xfrm>
+          <a:prstGeom prst="rect">
+            <a:avLst/>
+          </a:prstGeom>
+          <a:noFill/>
+        </p:spPr>
+        <p:txBody>
+          <a:bodyPr wrap="square" lIns="0" tIns="0" rIns="0" bIns="0" anchor="t">
+            <a:spAutoFit/>
+          </a:bodyPr>
+          <a:lstStyle/>
+          <a:p>
+            <a:pPr marL="0" indent="0">
+              <a:buNone/>
+            </a:pPr>
+            <a:r>
+              <a:rPr sz="1800" b="1" i="0">
+                <a:solidFill>
+                  <a:srgbClr val="F2F6FC"/>
+                </a:solidFill>
+                <a:latin typeface="Calibri"/>
+              </a:rPr>
+              <a:t>Numbered plans</a:t>
+            </a:r>
+          </a:p>
+        </p:txBody>
+      </p:sp>
+      <p:sp>
+        <p:nvSpPr>
+          <p:cNvPr id="7" name="TextBox 28"/>
+          <p:cNvSpPr txBox="1"/>
+          <p:nvPr/>
+        </p:nvSpPr>
+        <p:spPr>
+          <a:xfrm>
+            <a:off x="777240" y="2743200"/>
+            <a:ext cx="2148840" cy="868680"/>
+          </a:xfrm>
+          <a:prstGeom prst="rect">
+            <a:avLst/>
+          </a:prstGeom>
+          <a:noFill/>
+        </p:spPr>
+        <p:txBody>
+          <a:bodyPr wrap="square" lIns="0" tIns="0" rIns="0" bIns="0" anchor="t">
+            <a:spAutoFit/>
+          </a:bodyPr>
+          <a:lstStyle/>
+          <a:p>
+            <a:pPr marL="0" indent="0">
+              <a:buNone/>
+            </a:pPr>
+            <a:r>
+              <a:rPr sz="1500" b="0" i="0">
                 <a:solidFill>
                   <a:srgbClr val="A9BCD6"/>
                 </a:solidFill>
                 <a:latin typeface="Calibri"/>
               </a:rPr>
-              <a:t>Context, flags, MCP, review and parallel work</a:t>
-            </a:r>
-          </a:p>
-        </p:txBody>
-      </p:sp>
-      <p:sp>
-        <p:nvSpPr>
-          <p:cNvPr id="6" name="Rounded Rectangle 5"/>
+              <a:t>001, 002, 003: never rewrite an old plan for new work</a:t>
+            </a:r>
+          </a:p>
+        </p:txBody>
+      </p:sp>
+      <p:sp>
+        <p:nvSpPr>
+          <p:cNvPr id="8" name="Rounded Rectangle 29"/>
           <p:cNvSpPr/>
           <p:nvPr/>
         </p:nvSpPr>
         <p:spPr>
           <a:xfrm>
-            <a:off x="8412480" y="1737360"/>
-            <a:ext cx="3246120" cy="3383280"/>
+            <a:off x="3377153" y="1554480"/>
+            <a:ext cx="2606040" cy="2103120"/>
           </a:xfrm>
           <a:prstGeom prst="roundRect">
             <a:avLst>
-              <a:gd name="adj" fmla="val 6000"/>
+              <a:gd name="adj" fmla="val 6521"/>
             </a:avLst>
           </a:prstGeom>
           <a:solidFill>
@@ -17830,6 +17278,7 @@
           <a:ln>
             <a:noFill/>
           </a:ln>
+          <a:effectLst/>
         </p:spPr>
         <p:style>
           <a:lnRef idx="1">
@@ -17856,14 +17305,14 @@
       </p:sp>
       <p:sp>
         <p:nvSpPr>
-          <p:cNvPr id="7" name="TextBox 6"/>
-          <p:cNvSpPr txBox="1"/>
-          <p:nvPr/>
-        </p:nvSpPr>
-        <p:spPr>
-          <a:xfrm>
-            <a:off x="8686800" y="1965960"/>
-            <a:ext cx="2743200" cy="365760"/>
+          <p:cNvPr id="9" name="TextBox 30"/>
+          <p:cNvSpPr txBox="1"/>
+          <p:nvPr/>
+        </p:nvSpPr>
+        <p:spPr>
+          <a:xfrm>
+            <a:off x="3605753" y="1737360"/>
+            <a:ext cx="2148840" cy="274320"/>
           </a:xfrm>
           <a:prstGeom prst="rect">
             <a:avLst/>
@@ -17876,29 +17325,31 @@
           </a:bodyPr>
           <a:lstStyle/>
           <a:p>
-            <a:pPr algn="l"/>
-            <a:r>
-              <a:rPr sz="1600" b="1">
+            <a:pPr marL="0" indent="0">
+              <a:buNone/>
+            </a:pPr>
+            <a:r>
+              <a:rPr sz="1600" b="1" i="0">
                 <a:solidFill>
                   <a:srgbClr val="38BDF8"/>
                 </a:solidFill>
                 <a:latin typeface="Calibri"/>
               </a:rPr>
-              <a:t>In this section</a:t>
-            </a:r>
-          </a:p>
-        </p:txBody>
-      </p:sp>
-      <p:sp>
-        <p:nvSpPr>
-          <p:cNvPr id="8" name="TextBox 7"/>
-          <p:cNvSpPr txBox="1"/>
-          <p:nvPr/>
-        </p:nvSpPr>
-        <p:spPr>
-          <a:xfrm>
-            <a:off x="8686800" y="2423160"/>
-            <a:ext cx="2743200" cy="2560320"/>
+              <a:t>2</a:t>
+            </a:r>
+          </a:p>
+        </p:txBody>
+      </p:sp>
+      <p:sp>
+        <p:nvSpPr>
+          <p:cNvPr id="10" name="TextBox 31"/>
+          <p:cNvSpPr txBox="1"/>
+          <p:nvPr/>
+        </p:nvSpPr>
+        <p:spPr>
+          <a:xfrm>
+            <a:off x="3605753" y="2057400"/>
+            <a:ext cx="2148840" cy="594360"/>
           </a:xfrm>
           <a:prstGeom prst="rect">
             <a:avLst/>
@@ -17911,95 +17362,1002 @@
           </a:bodyPr>
           <a:lstStyle/>
           <a:p>
-            <a:pPr algn="l"/>
-            <a:r>
-              <a:rPr sz="1800" b="0">
+            <a:pPr marL="0" indent="0">
+              <a:buNone/>
+            </a:pPr>
+            <a:r>
+              <a:rPr sz="1800" b="1" i="0">
                 <a:solidFill>
                   <a:srgbClr val="F2F6FC"/>
                 </a:solidFill>
                 <a:latin typeface="Calibri"/>
               </a:rPr>
-              <a:t>Context management</a:t>
-            </a:r>
-          </a:p>
-          <a:p>
-            <a:pPr>
-              <a:spcBef>
-                <a:spcPts val="800"/>
-              </a:spcBef>
-            </a:pPr>
-            <a:r>
-              <a:rPr sz="1800">
+              <a:t>progress.md every phase</a:t>
+            </a:r>
+          </a:p>
+        </p:txBody>
+      </p:sp>
+      <p:sp>
+        <p:nvSpPr>
+          <p:cNvPr id="11" name="TextBox 32"/>
+          <p:cNvSpPr txBox="1"/>
+          <p:nvPr/>
+        </p:nvSpPr>
+        <p:spPr>
+          <a:xfrm>
+            <a:off x="3605753" y="2743200"/>
+            <a:ext cx="2148840" cy="868680"/>
+          </a:xfrm>
+          <a:prstGeom prst="rect">
+            <a:avLst/>
+          </a:prstGeom>
+          <a:noFill/>
+        </p:spPr>
+        <p:txBody>
+          <a:bodyPr wrap="square" lIns="0" tIns="0" rIns="0" bIns="0" anchor="t">
+            <a:spAutoFit/>
+          </a:bodyPr>
+          <a:lstStyle/>
+          <a:p>
+            <a:pPr marL="0" indent="0">
+              <a:buNone/>
+            </a:pPr>
+            <a:r>
+              <a:rPr sz="1500" b="0" i="0">
+                <a:solidFill>
+                  <a:srgbClr val="A9BCD6"/>
+                </a:solidFill>
+                <a:latin typeface="Calibri"/>
+              </a:rPr>
+              <a:t>Status, evidence, decisions, known issues: always current</a:t>
+            </a:r>
+          </a:p>
+        </p:txBody>
+      </p:sp>
+      <p:sp>
+        <p:nvSpPr>
+          <p:cNvPr id="12" name="Rounded Rectangle 33"/>
+          <p:cNvSpPr/>
+          <p:nvPr/>
+        </p:nvSpPr>
+        <p:spPr>
+          <a:xfrm>
+            <a:off x="6205667" y="1554480"/>
+            <a:ext cx="2606040" cy="2103120"/>
+          </a:xfrm>
+          <a:prstGeom prst="roundRect">
+            <a:avLst>
+              <a:gd name="adj" fmla="val 6521"/>
+            </a:avLst>
+          </a:prstGeom>
+          <a:solidFill>
+            <a:srgbClr val="12305A"/>
+          </a:solidFill>
+          <a:ln>
+            <a:noFill/>
+          </a:ln>
+          <a:effectLst/>
+        </p:spPr>
+        <p:style>
+          <a:lnRef idx="1">
+            <a:schemeClr val="accent1"/>
+          </a:lnRef>
+          <a:fillRef idx="3">
+            <a:schemeClr val="accent1"/>
+          </a:fillRef>
+          <a:effectRef idx="2">
+            <a:schemeClr val="accent1"/>
+          </a:effectRef>
+          <a:fontRef idx="minor">
+            <a:schemeClr val="lt1"/>
+          </a:fontRef>
+        </p:style>
+        <p:txBody>
+          <a:bodyPr rtlCol="0" anchor="ctr"/>
+          <a:lstStyle/>
+          <a:p>
+            <a:pPr algn="ctr"/>
+            <a:endParaRPr/>
+          </a:p>
+        </p:txBody>
+      </p:sp>
+      <p:sp>
+        <p:nvSpPr>
+          <p:cNvPr id="13" name="TextBox 34"/>
+          <p:cNvSpPr txBox="1"/>
+          <p:nvPr/>
+        </p:nvSpPr>
+        <p:spPr>
+          <a:xfrm>
+            <a:off x="6434267" y="1737360"/>
+            <a:ext cx="2148840" cy="274320"/>
+          </a:xfrm>
+          <a:prstGeom prst="rect">
+            <a:avLst/>
+          </a:prstGeom>
+          <a:noFill/>
+        </p:spPr>
+        <p:txBody>
+          <a:bodyPr wrap="square" lIns="0" tIns="0" rIns="0" bIns="0" anchor="t">
+            <a:spAutoFit/>
+          </a:bodyPr>
+          <a:lstStyle/>
+          <a:p>
+            <a:pPr marL="0" indent="0">
+              <a:buNone/>
+            </a:pPr>
+            <a:r>
+              <a:rPr sz="1600" b="1" i="0">
+                <a:solidFill>
+                  <a:srgbClr val="38BDF8"/>
+                </a:solidFill>
+                <a:latin typeface="Calibri"/>
+              </a:rPr>
+              <a:t>3</a:t>
+            </a:r>
+          </a:p>
+        </p:txBody>
+      </p:sp>
+      <p:sp>
+        <p:nvSpPr>
+          <p:cNvPr id="14" name="TextBox 35"/>
+          <p:cNvSpPr txBox="1"/>
+          <p:nvPr/>
+        </p:nvSpPr>
+        <p:spPr>
+          <a:xfrm>
+            <a:off x="6434267" y="2057400"/>
+            <a:ext cx="2148840" cy="594360"/>
+          </a:xfrm>
+          <a:prstGeom prst="rect">
+            <a:avLst/>
+          </a:prstGeom>
+          <a:noFill/>
+        </p:spPr>
+        <p:txBody>
+          <a:bodyPr wrap="square" lIns="0" tIns="0" rIns="0" bIns="0" anchor="t">
+            <a:spAutoFit/>
+          </a:bodyPr>
+          <a:lstStyle/>
+          <a:p>
+            <a:pPr marL="0" indent="0">
+              <a:buNone/>
+            </a:pPr>
+            <a:r>
+              <a:rPr sz="1800" b="1" i="0">
                 <a:solidFill>
                   <a:srgbClr val="F2F6FC"/>
                 </a:solidFill>
                 <a:latin typeface="Calibri"/>
               </a:rPr>
-              <a:t>Terminal flags</a:t>
-            </a:r>
-          </a:p>
-          <a:p>
-            <a:pPr>
-              <a:spcBef>
-                <a:spcPts val="800"/>
-              </a:spcBef>
-            </a:pPr>
-            <a:r>
-              <a:rPr sz="1800">
+              <a:t>Ask only when blocked</a:t>
+            </a:r>
+          </a:p>
+        </p:txBody>
+      </p:sp>
+      <p:sp>
+        <p:nvSpPr>
+          <p:cNvPr id="15" name="TextBox 36"/>
+          <p:cNvSpPr txBox="1"/>
+          <p:nvPr/>
+        </p:nvSpPr>
+        <p:spPr>
+          <a:xfrm>
+            <a:off x="6434267" y="2743200"/>
+            <a:ext cx="2148840" cy="868680"/>
+          </a:xfrm>
+          <a:prstGeom prst="rect">
+            <a:avLst/>
+          </a:prstGeom>
+          <a:noFill/>
+        </p:spPr>
+        <p:txBody>
+          <a:bodyPr wrap="square" lIns="0" tIns="0" rIns="0" bIns="0" anchor="t">
+            <a:spAutoFit/>
+          </a:bodyPr>
+          <a:lstStyle/>
+          <a:p>
+            <a:pPr marL="0" indent="0">
+              <a:buNone/>
+            </a:pPr>
+            <a:r>
+              <a:rPr sz="1500" b="0" i="0">
+                <a:solidFill>
+                  <a:srgbClr val="A9BCD6"/>
+                </a:solidFill>
+                <a:latin typeface="Calibri"/>
+              </a:rPr>
+              <a:t>Claude picks sensible defaults and says which; I decide the big calls</a:t>
+            </a:r>
+          </a:p>
+        </p:txBody>
+      </p:sp>
+      <p:sp>
+        <p:nvSpPr>
+          <p:cNvPr id="16" name="Rounded Rectangle 37"/>
+          <p:cNvSpPr/>
+          <p:nvPr/>
+        </p:nvSpPr>
+        <p:spPr>
+          <a:xfrm>
+            <a:off x="9034180" y="1554480"/>
+            <a:ext cx="2606040" cy="2103120"/>
+          </a:xfrm>
+          <a:prstGeom prst="roundRect">
+            <a:avLst>
+              <a:gd name="adj" fmla="val 6521"/>
+            </a:avLst>
+          </a:prstGeom>
+          <a:solidFill>
+            <a:srgbClr val="12305A"/>
+          </a:solidFill>
+          <a:ln>
+            <a:noFill/>
+          </a:ln>
+          <a:effectLst/>
+        </p:spPr>
+        <p:style>
+          <a:lnRef idx="1">
+            <a:schemeClr val="accent1"/>
+          </a:lnRef>
+          <a:fillRef idx="3">
+            <a:schemeClr val="accent1"/>
+          </a:fillRef>
+          <a:effectRef idx="2">
+            <a:schemeClr val="accent1"/>
+          </a:effectRef>
+          <a:fontRef idx="minor">
+            <a:schemeClr val="lt1"/>
+          </a:fontRef>
+        </p:style>
+        <p:txBody>
+          <a:bodyPr rtlCol="0" anchor="ctr"/>
+          <a:lstStyle/>
+          <a:p>
+            <a:pPr algn="ctr"/>
+            <a:endParaRPr/>
+          </a:p>
+        </p:txBody>
+      </p:sp>
+      <p:sp>
+        <p:nvSpPr>
+          <p:cNvPr id="17" name="TextBox 38"/>
+          <p:cNvSpPr txBox="1"/>
+          <p:nvPr/>
+        </p:nvSpPr>
+        <p:spPr>
+          <a:xfrm>
+            <a:off x="9262780" y="1737360"/>
+            <a:ext cx="2148840" cy="274320"/>
+          </a:xfrm>
+          <a:prstGeom prst="rect">
+            <a:avLst/>
+          </a:prstGeom>
+          <a:noFill/>
+        </p:spPr>
+        <p:txBody>
+          <a:bodyPr wrap="square" lIns="0" tIns="0" rIns="0" bIns="0" anchor="t">
+            <a:spAutoFit/>
+          </a:bodyPr>
+          <a:lstStyle/>
+          <a:p>
+            <a:pPr marL="0" indent="0">
+              <a:buNone/>
+            </a:pPr>
+            <a:r>
+              <a:rPr sz="1600" b="1" i="0">
+                <a:solidFill>
+                  <a:srgbClr val="38BDF8"/>
+                </a:solidFill>
+                <a:latin typeface="Calibri"/>
+              </a:rPr>
+              <a:t>4</a:t>
+            </a:r>
+          </a:p>
+        </p:txBody>
+      </p:sp>
+      <p:sp>
+        <p:nvSpPr>
+          <p:cNvPr id="18" name="TextBox 39"/>
+          <p:cNvSpPr txBox="1"/>
+          <p:nvPr/>
+        </p:nvSpPr>
+        <p:spPr>
+          <a:xfrm>
+            <a:off x="9262780" y="2057400"/>
+            <a:ext cx="2148840" cy="594360"/>
+          </a:xfrm>
+          <a:prstGeom prst="rect">
+            <a:avLst/>
+          </a:prstGeom>
+          <a:noFill/>
+        </p:spPr>
+        <p:txBody>
+          <a:bodyPr wrap="square" lIns="0" tIns="0" rIns="0" bIns="0" anchor="t">
+            <a:spAutoFit/>
+          </a:bodyPr>
+          <a:lstStyle/>
+          <a:p>
+            <a:pPr marL="0" indent="0">
+              <a:buNone/>
+            </a:pPr>
+            <a:r>
+              <a:rPr sz="1800" b="1" i="0">
                 <a:solidFill>
                   <a:srgbClr val="F2F6FC"/>
                 </a:solidFill>
                 <a:latin typeface="Calibri"/>
               </a:rPr>
-              <a:t>MCP</a:t>
-            </a:r>
-          </a:p>
-          <a:p>
-            <a:pPr>
-              <a:spcBef>
-                <a:spcPts val="800"/>
-              </a:spcBef>
-            </a:pPr>
-            <a:r>
-              <a:rPr sz="1800">
+              <a:t>Small sample first</a:t>
+            </a:r>
+          </a:p>
+        </p:txBody>
+      </p:sp>
+      <p:sp>
+        <p:nvSpPr>
+          <p:cNvPr id="19" name="TextBox 40"/>
+          <p:cNvSpPr txBox="1"/>
+          <p:nvPr/>
+        </p:nvSpPr>
+        <p:spPr>
+          <a:xfrm>
+            <a:off x="9262780" y="2743200"/>
+            <a:ext cx="2148840" cy="868680"/>
+          </a:xfrm>
+          <a:prstGeom prst="rect">
+            <a:avLst/>
+          </a:prstGeom>
+          <a:noFill/>
+        </p:spPr>
+        <p:txBody>
+          <a:bodyPr wrap="square" lIns="0" tIns="0" rIns="0" bIns="0" anchor="t">
+            <a:spAutoFit/>
+          </a:bodyPr>
+          <a:lstStyle/>
+          <a:p>
+            <a:pPr marL="0" indent="0">
+              <a:buNone/>
+            </a:pPr>
+            <a:r>
+              <a:rPr sz="1500" b="0" i="0">
+                <a:solidFill>
+                  <a:srgbClr val="A9BCD6"/>
+                </a:solidFill>
+                <a:latin typeface="Calibri"/>
+              </a:rPr>
+              <a:t>Test on a handful of items before any big or paid run</a:t>
+            </a:r>
+          </a:p>
+        </p:txBody>
+      </p:sp>
+      <p:sp>
+        <p:nvSpPr>
+          <p:cNvPr id="20" name="Rounded Rectangle 41"/>
+          <p:cNvSpPr/>
+          <p:nvPr/>
+        </p:nvSpPr>
+        <p:spPr>
+          <a:xfrm>
+            <a:off x="548640" y="3840480"/>
+            <a:ext cx="2606040" cy="2103120"/>
+          </a:xfrm>
+          <a:prstGeom prst="roundRect">
+            <a:avLst>
+              <a:gd name="adj" fmla="val 6521"/>
+            </a:avLst>
+          </a:prstGeom>
+          <a:solidFill>
+            <a:srgbClr val="12305A"/>
+          </a:solidFill>
+          <a:ln>
+            <a:noFill/>
+          </a:ln>
+          <a:effectLst/>
+        </p:spPr>
+        <p:style>
+          <a:lnRef idx="1">
+            <a:schemeClr val="accent1"/>
+          </a:lnRef>
+          <a:fillRef idx="3">
+            <a:schemeClr val="accent1"/>
+          </a:fillRef>
+          <a:effectRef idx="2">
+            <a:schemeClr val="accent1"/>
+          </a:effectRef>
+          <a:fontRef idx="minor">
+            <a:schemeClr val="lt1"/>
+          </a:fontRef>
+        </p:style>
+        <p:txBody>
+          <a:bodyPr rtlCol="0" anchor="ctr"/>
+          <a:lstStyle/>
+          <a:p>
+            <a:pPr algn="ctr"/>
+            <a:endParaRPr/>
+          </a:p>
+        </p:txBody>
+      </p:sp>
+      <p:sp>
+        <p:nvSpPr>
+          <p:cNvPr id="21" name="TextBox 42"/>
+          <p:cNvSpPr txBox="1"/>
+          <p:nvPr/>
+        </p:nvSpPr>
+        <p:spPr>
+          <a:xfrm>
+            <a:off x="777240" y="4023360"/>
+            <a:ext cx="2148840" cy="274320"/>
+          </a:xfrm>
+          <a:prstGeom prst="rect">
+            <a:avLst/>
+          </a:prstGeom>
+          <a:noFill/>
+        </p:spPr>
+        <p:txBody>
+          <a:bodyPr wrap="square" lIns="0" tIns="0" rIns="0" bIns="0" anchor="t">
+            <a:spAutoFit/>
+          </a:bodyPr>
+          <a:lstStyle/>
+          <a:p>
+            <a:pPr marL="0" indent="0">
+              <a:buNone/>
+            </a:pPr>
+            <a:r>
+              <a:rPr sz="1600" b="1" i="0">
+                <a:solidFill>
+                  <a:srgbClr val="38BDF8"/>
+                </a:solidFill>
+                <a:latin typeface="Calibri"/>
+              </a:rPr>
+              <a:t>5</a:t>
+            </a:r>
+          </a:p>
+        </p:txBody>
+      </p:sp>
+      <p:sp>
+        <p:nvSpPr>
+          <p:cNvPr id="22" name="TextBox 43"/>
+          <p:cNvSpPr txBox="1"/>
+          <p:nvPr/>
+        </p:nvSpPr>
+        <p:spPr>
+          <a:xfrm>
+            <a:off x="777240" y="4343400"/>
+            <a:ext cx="2148840" cy="594360"/>
+          </a:xfrm>
+          <a:prstGeom prst="rect">
+            <a:avLst/>
+          </a:prstGeom>
+          <a:noFill/>
+        </p:spPr>
+        <p:txBody>
+          <a:bodyPr wrap="square" lIns="0" tIns="0" rIns="0" bIns="0" anchor="t">
+            <a:spAutoFit/>
+          </a:bodyPr>
+          <a:lstStyle/>
+          <a:p>
+            <a:pPr marL="0" indent="0">
+              <a:buNone/>
+            </a:pPr>
+            <a:r>
+              <a:rPr sz="1800" b="1" i="0">
                 <a:solidFill>
                   <a:srgbClr val="F2F6FC"/>
                 </a:solidFill>
                 <a:latin typeface="Calibri"/>
               </a:rPr>
-              <a:t>Review commands</a:t>
-            </a:r>
-          </a:p>
-          <a:p>
-            <a:pPr>
-              <a:spcBef>
-                <a:spcPts val="800"/>
-              </a:spcBef>
-            </a:pPr>
-            <a:r>
-              <a:rPr sz="1800">
+              <a:t>/clear between phases</a:t>
+            </a:r>
+          </a:p>
+        </p:txBody>
+      </p:sp>
+      <p:sp>
+        <p:nvSpPr>
+          <p:cNvPr id="23" name="TextBox 44"/>
+          <p:cNvSpPr txBox="1"/>
+          <p:nvPr/>
+        </p:nvSpPr>
+        <p:spPr>
+          <a:xfrm>
+            <a:off x="777240" y="5029200"/>
+            <a:ext cx="2148840" cy="868680"/>
+          </a:xfrm>
+          <a:prstGeom prst="rect">
+            <a:avLst/>
+          </a:prstGeom>
+          <a:noFill/>
+        </p:spPr>
+        <p:txBody>
+          <a:bodyPr wrap="square" lIns="0" tIns="0" rIns="0" bIns="0" anchor="t">
+            <a:spAutoFit/>
+          </a:bodyPr>
+          <a:lstStyle/>
+          <a:p>
+            <a:pPr marL="0" indent="0">
+              <a:buNone/>
+            </a:pPr>
+            <a:r>
+              <a:rPr sz="1500" b="0" i="0">
+                <a:solidFill>
+                  <a:srgbClr val="A9BCD6"/>
+                </a:solidFill>
+                <a:latin typeface="Calibri"/>
+              </a:rPr>
+              <a:t>progress.md holds the memory, so the chat can start fresh</a:t>
+            </a:r>
+          </a:p>
+        </p:txBody>
+      </p:sp>
+      <p:sp>
+        <p:nvSpPr>
+          <p:cNvPr id="24" name="Rounded Rectangle 45"/>
+          <p:cNvSpPr/>
+          <p:nvPr/>
+        </p:nvSpPr>
+        <p:spPr>
+          <a:xfrm>
+            <a:off x="3377153" y="3840480"/>
+            <a:ext cx="2606040" cy="2103120"/>
+          </a:xfrm>
+          <a:prstGeom prst="roundRect">
+            <a:avLst>
+              <a:gd name="adj" fmla="val 6521"/>
+            </a:avLst>
+          </a:prstGeom>
+          <a:solidFill>
+            <a:srgbClr val="12305A"/>
+          </a:solidFill>
+          <a:ln>
+            <a:noFill/>
+          </a:ln>
+          <a:effectLst/>
+        </p:spPr>
+        <p:style>
+          <a:lnRef idx="1">
+            <a:schemeClr val="accent1"/>
+          </a:lnRef>
+          <a:fillRef idx="3">
+            <a:schemeClr val="accent1"/>
+          </a:fillRef>
+          <a:effectRef idx="2">
+            <a:schemeClr val="accent1"/>
+          </a:effectRef>
+          <a:fontRef idx="minor">
+            <a:schemeClr val="lt1"/>
+          </a:fontRef>
+        </p:style>
+        <p:txBody>
+          <a:bodyPr rtlCol="0" anchor="ctr"/>
+          <a:lstStyle/>
+          <a:p>
+            <a:pPr algn="ctr"/>
+            <a:endParaRPr/>
+          </a:p>
+        </p:txBody>
+      </p:sp>
+      <p:sp>
+        <p:nvSpPr>
+          <p:cNvPr id="25" name="TextBox 46"/>
+          <p:cNvSpPr txBox="1"/>
+          <p:nvPr/>
+        </p:nvSpPr>
+        <p:spPr>
+          <a:xfrm>
+            <a:off x="3605753" y="4023360"/>
+            <a:ext cx="2148840" cy="274320"/>
+          </a:xfrm>
+          <a:prstGeom prst="rect">
+            <a:avLst/>
+          </a:prstGeom>
+          <a:noFill/>
+        </p:spPr>
+        <p:txBody>
+          <a:bodyPr wrap="square" lIns="0" tIns="0" rIns="0" bIns="0" anchor="t">
+            <a:spAutoFit/>
+          </a:bodyPr>
+          <a:lstStyle/>
+          <a:p>
+            <a:pPr marL="0" indent="0">
+              <a:buNone/>
+            </a:pPr>
+            <a:r>
+              <a:rPr sz="1600" b="1" i="0">
+                <a:solidFill>
+                  <a:srgbClr val="38BDF8"/>
+                </a:solidFill>
+                <a:latin typeface="Calibri"/>
+              </a:rPr>
+              <a:t>6</a:t>
+            </a:r>
+          </a:p>
+        </p:txBody>
+      </p:sp>
+      <p:sp>
+        <p:nvSpPr>
+          <p:cNvPr id="26" name="TextBox 47"/>
+          <p:cNvSpPr txBox="1"/>
+          <p:nvPr/>
+        </p:nvSpPr>
+        <p:spPr>
+          <a:xfrm>
+            <a:off x="3605753" y="4343400"/>
+            <a:ext cx="2148840" cy="594360"/>
+          </a:xfrm>
+          <a:prstGeom prst="rect">
+            <a:avLst/>
+          </a:prstGeom>
+          <a:noFill/>
+        </p:spPr>
+        <p:txBody>
+          <a:bodyPr wrap="square" lIns="0" tIns="0" rIns="0" bIns="0" anchor="t">
+            <a:spAutoFit/>
+          </a:bodyPr>
+          <a:lstStyle/>
+          <a:p>
+            <a:pPr marL="0" indent="0">
+              <a:buNone/>
+            </a:pPr>
+            <a:r>
+              <a:rPr sz="1800" b="1" i="0">
                 <a:solidFill>
                   <a:srgbClr val="F2F6FC"/>
                 </a:solidFill>
                 <a:latin typeface="Calibri"/>
               </a:rPr>
-              <a:t>Remote and learning</a:t>
-            </a:r>
-          </a:p>
-          <a:p>
-            <a:pPr>
-              <a:spcBef>
-                <a:spcPts val="800"/>
-              </a:spcBef>
-            </a:pPr>
-            <a:r>
-              <a:rPr sz="1800">
+              <a:t>Notify me when done</a:t>
+            </a:r>
+          </a:p>
+        </p:txBody>
+      </p:sp>
+      <p:sp>
+        <p:nvSpPr>
+          <p:cNvPr id="27" name="TextBox 48"/>
+          <p:cNvSpPr txBox="1"/>
+          <p:nvPr/>
+        </p:nvSpPr>
+        <p:spPr>
+          <a:xfrm>
+            <a:off x="3605753" y="5029200"/>
+            <a:ext cx="2148840" cy="868680"/>
+          </a:xfrm>
+          <a:prstGeom prst="rect">
+            <a:avLst/>
+          </a:prstGeom>
+          <a:noFill/>
+        </p:spPr>
+        <p:txBody>
+          <a:bodyPr wrap="square" lIns="0" tIns="0" rIns="0" bIns="0" anchor="t">
+            <a:spAutoFit/>
+          </a:bodyPr>
+          <a:lstStyle/>
+          <a:p>
+            <a:pPr marL="0" indent="0">
+              <a:buNone/>
+            </a:pPr>
+            <a:r>
+              <a:rPr sz="1500" b="0" i="0">
+                <a:solidFill>
+                  <a:srgbClr val="A9BCD6"/>
+                </a:solidFill>
+                <a:latin typeface="Calibri"/>
+              </a:rPr>
+              <a:t>A Stop hook sends a push: leave long runs and come back</a:t>
+            </a:r>
+          </a:p>
+        </p:txBody>
+      </p:sp>
+      <p:sp>
+        <p:nvSpPr>
+          <p:cNvPr id="28" name="Rounded Rectangle 49"/>
+          <p:cNvSpPr/>
+          <p:nvPr/>
+        </p:nvSpPr>
+        <p:spPr>
+          <a:xfrm>
+            <a:off x="6205667" y="3840480"/>
+            <a:ext cx="2606040" cy="2103120"/>
+          </a:xfrm>
+          <a:prstGeom prst="roundRect">
+            <a:avLst>
+              <a:gd name="adj" fmla="val 6521"/>
+            </a:avLst>
+          </a:prstGeom>
+          <a:solidFill>
+            <a:srgbClr val="12305A"/>
+          </a:solidFill>
+          <a:ln>
+            <a:noFill/>
+          </a:ln>
+          <a:effectLst/>
+        </p:spPr>
+        <p:style>
+          <a:lnRef idx="1">
+            <a:schemeClr val="accent1"/>
+          </a:lnRef>
+          <a:fillRef idx="3">
+            <a:schemeClr val="accent1"/>
+          </a:fillRef>
+          <a:effectRef idx="2">
+            <a:schemeClr val="accent1"/>
+          </a:effectRef>
+          <a:fontRef idx="minor">
+            <a:schemeClr val="lt1"/>
+          </a:fontRef>
+        </p:style>
+        <p:txBody>
+          <a:bodyPr rtlCol="0" anchor="ctr"/>
+          <a:lstStyle/>
+          <a:p>
+            <a:pPr algn="ctr"/>
+            <a:endParaRPr/>
+          </a:p>
+        </p:txBody>
+      </p:sp>
+      <p:sp>
+        <p:nvSpPr>
+          <p:cNvPr id="29" name="TextBox 50"/>
+          <p:cNvSpPr txBox="1"/>
+          <p:nvPr/>
+        </p:nvSpPr>
+        <p:spPr>
+          <a:xfrm>
+            <a:off x="6434267" y="4023360"/>
+            <a:ext cx="2148840" cy="274320"/>
+          </a:xfrm>
+          <a:prstGeom prst="rect">
+            <a:avLst/>
+          </a:prstGeom>
+          <a:noFill/>
+        </p:spPr>
+        <p:txBody>
+          <a:bodyPr wrap="square" lIns="0" tIns="0" rIns="0" bIns="0" anchor="t">
+            <a:spAutoFit/>
+          </a:bodyPr>
+          <a:lstStyle/>
+          <a:p>
+            <a:pPr marL="0" indent="0">
+              <a:buNone/>
+            </a:pPr>
+            <a:r>
+              <a:rPr sz="1600" b="1" i="0">
+                <a:solidFill>
+                  <a:srgbClr val="38BDF8"/>
+                </a:solidFill>
+                <a:latin typeface="Calibri"/>
+              </a:rPr>
+              <a:t>7</a:t>
+            </a:r>
+          </a:p>
+        </p:txBody>
+      </p:sp>
+      <p:sp>
+        <p:nvSpPr>
+          <p:cNvPr id="30" name="TextBox 51"/>
+          <p:cNvSpPr txBox="1"/>
+          <p:nvPr/>
+        </p:nvSpPr>
+        <p:spPr>
+          <a:xfrm>
+            <a:off x="6434267" y="4343400"/>
+            <a:ext cx="2148840" cy="594360"/>
+          </a:xfrm>
+          <a:prstGeom prst="rect">
+            <a:avLst/>
+          </a:prstGeom>
+          <a:noFill/>
+        </p:spPr>
+        <p:txBody>
+          <a:bodyPr wrap="square" lIns="0" tIns="0" rIns="0" bIns="0" anchor="t">
+            <a:spAutoFit/>
+          </a:bodyPr>
+          <a:lstStyle/>
+          <a:p>
+            <a:pPr marL="0" indent="0">
+              <a:buNone/>
+            </a:pPr>
+            <a:r>
+              <a:rPr sz="1800" b="1" i="0">
                 <a:solidFill>
                   <a:srgbClr val="F2F6FC"/>
                 </a:solidFill>
                 <a:latin typeface="Calibri"/>
               </a:rPr>
-              <a:t>Habits</a:t>
+              <a:t>Skills hold the recipe</a:t>
+            </a:r>
+          </a:p>
+        </p:txBody>
+      </p:sp>
+      <p:sp>
+        <p:nvSpPr>
+          <p:cNvPr id="31" name="TextBox 52"/>
+          <p:cNvSpPr txBox="1"/>
+          <p:nvPr/>
+        </p:nvSpPr>
+        <p:spPr>
+          <a:xfrm>
+            <a:off x="6434267" y="5029200"/>
+            <a:ext cx="2148840" cy="868680"/>
+          </a:xfrm>
+          <a:prstGeom prst="rect">
+            <a:avLst/>
+          </a:prstGeom>
+          <a:noFill/>
+        </p:spPr>
+        <p:txBody>
+          <a:bodyPr wrap="square" lIns="0" tIns="0" rIns="0" bIns="0" anchor="t">
+            <a:spAutoFit/>
+          </a:bodyPr>
+          <a:lstStyle/>
+          <a:p>
+            <a:pPr marL="0" indent="0">
+              <a:buNone/>
+            </a:pPr>
+            <a:r>
+              <a:rPr sz="1500" b="0" i="0">
+                <a:solidFill>
+                  <a:srgbClr val="A9BCD6"/>
+                </a:solidFill>
+                <a:latin typeface="Calibri"/>
+              </a:rPr>
+              <a:t>initialize-project builds the docs, plans/ and progress.md for me</a:t>
+            </a:r>
+          </a:p>
+        </p:txBody>
+      </p:sp>
+      <p:sp>
+        <p:nvSpPr>
+          <p:cNvPr id="32" name="Rounded Rectangle 53"/>
+          <p:cNvSpPr/>
+          <p:nvPr/>
+        </p:nvSpPr>
+        <p:spPr>
+          <a:xfrm>
+            <a:off x="9034180" y="3840480"/>
+            <a:ext cx="2606040" cy="2103120"/>
+          </a:xfrm>
+          <a:prstGeom prst="roundRect">
+            <a:avLst>
+              <a:gd name="adj" fmla="val 6521"/>
+            </a:avLst>
+          </a:prstGeom>
+          <a:solidFill>
+            <a:srgbClr val="12305A"/>
+          </a:solidFill>
+          <a:ln>
+            <a:noFill/>
+          </a:ln>
+          <a:effectLst/>
+        </p:spPr>
+        <p:style>
+          <a:lnRef idx="1">
+            <a:schemeClr val="accent1"/>
+          </a:lnRef>
+          <a:fillRef idx="3">
+            <a:schemeClr val="accent1"/>
+          </a:fillRef>
+          <a:effectRef idx="2">
+            <a:schemeClr val="accent1"/>
+          </a:effectRef>
+          <a:fontRef idx="minor">
+            <a:schemeClr val="lt1"/>
+          </a:fontRef>
+        </p:style>
+        <p:txBody>
+          <a:bodyPr rtlCol="0" anchor="ctr"/>
+          <a:lstStyle/>
+          <a:p>
+            <a:pPr algn="ctr"/>
+            <a:endParaRPr/>
+          </a:p>
+        </p:txBody>
+      </p:sp>
+      <p:sp>
+        <p:nvSpPr>
+          <p:cNvPr id="33" name="TextBox 54"/>
+          <p:cNvSpPr txBox="1"/>
+          <p:nvPr/>
+        </p:nvSpPr>
+        <p:spPr>
+          <a:xfrm>
+            <a:off x="9262780" y="4023360"/>
+            <a:ext cx="2148840" cy="274320"/>
+          </a:xfrm>
+          <a:prstGeom prst="rect">
+            <a:avLst/>
+          </a:prstGeom>
+          <a:noFill/>
+        </p:spPr>
+        <p:txBody>
+          <a:bodyPr wrap="square" lIns="0" tIns="0" rIns="0" bIns="0" anchor="t">
+            <a:spAutoFit/>
+          </a:bodyPr>
+          <a:lstStyle/>
+          <a:p>
+            <a:pPr marL="0" indent="0">
+              <a:buNone/>
+            </a:pPr>
+            <a:r>
+              <a:rPr sz="1600" b="1" i="0">
+                <a:solidFill>
+                  <a:srgbClr val="38BDF8"/>
+                </a:solidFill>
+                <a:latin typeface="Calibri"/>
+              </a:rPr>
+              <a:t>8</a:t>
+            </a:r>
+          </a:p>
+        </p:txBody>
+      </p:sp>
+      <p:sp>
+        <p:nvSpPr>
+          <p:cNvPr id="34" name="TextBox 55"/>
+          <p:cNvSpPr txBox="1"/>
+          <p:nvPr/>
+        </p:nvSpPr>
+        <p:spPr>
+          <a:xfrm>
+            <a:off x="9262780" y="4343400"/>
+            <a:ext cx="2148840" cy="594360"/>
+          </a:xfrm>
+          <a:prstGeom prst="rect">
+            <a:avLst/>
+          </a:prstGeom>
+          <a:noFill/>
+        </p:spPr>
+        <p:txBody>
+          <a:bodyPr wrap="square" lIns="0" tIns="0" rIns="0" bIns="0" anchor="t">
+            <a:spAutoFit/>
+          </a:bodyPr>
+          <a:lstStyle/>
+          <a:p>
+            <a:pPr marL="0" indent="0">
+              <a:buNone/>
+            </a:pPr>
+            <a:r>
+              <a:rPr sz="1800" b="1" i="0">
+                <a:solidFill>
+                  <a:srgbClr val="F2F6FC"/>
+                </a:solidFill>
+                <a:latin typeface="Calibri"/>
+              </a:rPr>
+              <a:t>No commit unless asked</a:t>
+            </a:r>
+          </a:p>
+        </p:txBody>
+      </p:sp>
+      <p:sp>
+        <p:nvSpPr>
+          <p:cNvPr id="35" name="TextBox 56"/>
+          <p:cNvSpPr txBox="1"/>
+          <p:nvPr/>
+        </p:nvSpPr>
+        <p:spPr>
+          <a:xfrm>
+            <a:off x="9262780" y="5029200"/>
+            <a:ext cx="2148840" cy="868680"/>
+          </a:xfrm>
+          <a:prstGeom prst="rect">
+            <a:avLst/>
+          </a:prstGeom>
+          <a:noFill/>
+        </p:spPr>
+        <p:txBody>
+          <a:bodyPr wrap="square" lIns="0" tIns="0" rIns="0" bIns="0" anchor="t">
+            <a:spAutoFit/>
+          </a:bodyPr>
+          <a:lstStyle/>
+          <a:p>
+            <a:pPr marL="0" indent="0">
+              <a:buNone/>
+            </a:pPr>
+            <a:r>
+              <a:rPr sz="1500" b="0" i="0">
+                <a:solidFill>
+                  <a:srgbClr val="A9BCD6"/>
+                </a:solidFill>
+                <a:latin typeface="Calibri"/>
+              </a:rPr>
+              <a:t>I review the diff or file first, then say commit</a:t>
             </a:r>
           </a:p>
         </p:txBody>
@@ -18013,6 +18371,376 @@
 </file>
 
 <file path=ppt/slides/slide26.xml><?xml version="1.0" encoding="utf-8"?>
+<p:sld xmlns:a="http://schemas.openxmlformats.org/drawingml/2006/main" xmlns:r="http://schemas.openxmlformats.org/officeDocument/2006/relationships" xmlns:p="http://schemas.openxmlformats.org/presentationml/2006/main">
+  <p:cSld>
+    <p:spTree>
+      <p:nvGrpSpPr>
+        <p:cNvPr id="1" name=""/>
+        <p:cNvGrpSpPr/>
+        <p:nvPr/>
+      </p:nvGrpSpPr>
+      <p:grpSpPr>
+        <a:xfrm>
+          <a:off x="0" y="0"/>
+          <a:ext cx="0" cy="0"/>
+          <a:chOff x="0" y="0"/>
+          <a:chExt cx="0" cy="0"/>
+        </a:xfrm>
+      </p:grpSpPr>
+      <p:sp>
+        <p:nvSpPr>
+          <p:cNvPr id="2" name="Oval 1"/>
+          <p:cNvSpPr/>
+          <p:nvPr/>
+        </p:nvSpPr>
+        <p:spPr>
+          <a:xfrm>
+            <a:off x="822960" y="2697480"/>
+            <a:ext cx="1371600" cy="1371600"/>
+          </a:xfrm>
+          <a:prstGeom prst="ellipse">
+            <a:avLst/>
+          </a:prstGeom>
+          <a:solidFill>
+            <a:srgbClr val="38BDF8"/>
+          </a:solidFill>
+          <a:ln>
+            <a:noFill/>
+          </a:ln>
+        </p:spPr>
+        <p:style>
+          <a:lnRef idx="1">
+            <a:schemeClr val="accent1"/>
+          </a:lnRef>
+          <a:fillRef idx="3">
+            <a:schemeClr val="accent1"/>
+          </a:fillRef>
+          <a:effectRef idx="2">
+            <a:schemeClr val="accent1"/>
+          </a:effectRef>
+          <a:fontRef idx="minor">
+            <a:schemeClr val="lt1"/>
+          </a:fontRef>
+        </p:style>
+        <p:txBody>
+          <a:bodyPr rtlCol="0" anchor="ctr"/>
+          <a:lstStyle/>
+          <a:p>
+            <a:pPr algn="ctr"/>
+            <a:endParaRPr/>
+          </a:p>
+        </p:txBody>
+      </p:sp>
+      <p:sp>
+        <p:nvSpPr>
+          <p:cNvPr id="3" name="TextBox 2"/>
+          <p:cNvSpPr txBox="1"/>
+          <p:nvPr/>
+        </p:nvSpPr>
+        <p:spPr>
+          <a:xfrm>
+            <a:off x="822960" y="2697480"/>
+            <a:ext cx="1371600" cy="1371600"/>
+          </a:xfrm>
+          <a:prstGeom prst="rect">
+            <a:avLst/>
+          </a:prstGeom>
+          <a:noFill/>
+        </p:spPr>
+        <p:txBody>
+          <a:bodyPr wrap="square" lIns="0" tIns="0" rIns="0" bIns="0" anchor="ctr">
+            <a:spAutoFit/>
+          </a:bodyPr>
+          <a:lstStyle/>
+          <a:p>
+            <a:pPr algn="ctr"/>
+            <a:r>
+              <a:rPr sz="6000" b="1">
+                <a:solidFill>
+                  <a:srgbClr val="0B1F3A"/>
+                </a:solidFill>
+                <a:latin typeface="Calibri"/>
+              </a:rPr>
+              <a:t>4</a:t>
+            </a:r>
+          </a:p>
+        </p:txBody>
+      </p:sp>
+      <p:sp>
+        <p:nvSpPr>
+          <p:cNvPr id="4" name="TextBox 3"/>
+          <p:cNvSpPr txBox="1"/>
+          <p:nvPr/>
+        </p:nvSpPr>
+        <p:spPr>
+          <a:xfrm>
+            <a:off x="2651760" y="2606040"/>
+            <a:ext cx="5486400" cy="914400"/>
+          </a:xfrm>
+          <a:prstGeom prst="rect">
+            <a:avLst/>
+          </a:prstGeom>
+          <a:noFill/>
+        </p:spPr>
+        <p:txBody>
+          <a:bodyPr wrap="square" lIns="0" tIns="0" rIns="0" bIns="0" anchor="ctr">
+            <a:spAutoFit/>
+          </a:bodyPr>
+          <a:lstStyle/>
+          <a:p>
+            <a:pPr algn="l"/>
+            <a:r>
+              <a:rPr sz="5400" b="1">
+                <a:solidFill>
+                  <a:srgbClr val="F2F6FC"/>
+                </a:solidFill>
+                <a:latin typeface="Calibri"/>
+              </a:rPr>
+              <a:t>Amplify</a:t>
+            </a:r>
+          </a:p>
+        </p:txBody>
+      </p:sp>
+      <p:sp>
+        <p:nvSpPr>
+          <p:cNvPr id="5" name="TextBox 4"/>
+          <p:cNvSpPr txBox="1"/>
+          <p:nvPr/>
+        </p:nvSpPr>
+        <p:spPr>
+          <a:xfrm>
+            <a:off x="2651760" y="3611880"/>
+            <a:ext cx="5486400" cy="822960"/>
+          </a:xfrm>
+          <a:prstGeom prst="rect">
+            <a:avLst/>
+          </a:prstGeom>
+          <a:noFill/>
+        </p:spPr>
+        <p:txBody>
+          <a:bodyPr wrap="square" lIns="0" tIns="0" rIns="0" bIns="0" anchor="t">
+            <a:spAutoFit/>
+          </a:bodyPr>
+          <a:lstStyle/>
+          <a:p>
+            <a:pPr algn="l"/>
+            <a:r>
+              <a:rPr sz="2200" b="0">
+                <a:solidFill>
+                  <a:srgbClr val="A9BCD6"/>
+                </a:solidFill>
+                <a:latin typeface="Calibri"/>
+              </a:rPr>
+              <a:t>Context, flags, MCP, review and parallel work</a:t>
+            </a:r>
+          </a:p>
+        </p:txBody>
+      </p:sp>
+      <p:sp>
+        <p:nvSpPr>
+          <p:cNvPr id="6" name="Rounded Rectangle 5"/>
+          <p:cNvSpPr/>
+          <p:nvPr/>
+        </p:nvSpPr>
+        <p:spPr>
+          <a:xfrm>
+            <a:off x="8412480" y="1737360"/>
+            <a:ext cx="3246120" cy="3383280"/>
+          </a:xfrm>
+          <a:prstGeom prst="roundRect">
+            <a:avLst>
+              <a:gd name="adj" fmla="val 6000"/>
+            </a:avLst>
+          </a:prstGeom>
+          <a:solidFill>
+            <a:srgbClr val="12305A"/>
+          </a:solidFill>
+          <a:ln>
+            <a:noFill/>
+          </a:ln>
+        </p:spPr>
+        <p:style>
+          <a:lnRef idx="1">
+            <a:schemeClr val="accent1"/>
+          </a:lnRef>
+          <a:fillRef idx="3">
+            <a:schemeClr val="accent1"/>
+          </a:fillRef>
+          <a:effectRef idx="2">
+            <a:schemeClr val="accent1"/>
+          </a:effectRef>
+          <a:fontRef idx="minor">
+            <a:schemeClr val="lt1"/>
+          </a:fontRef>
+        </p:style>
+        <p:txBody>
+          <a:bodyPr rtlCol="0" anchor="ctr"/>
+          <a:lstStyle/>
+          <a:p>
+            <a:pPr algn="ctr"/>
+            <a:endParaRPr/>
+          </a:p>
+        </p:txBody>
+      </p:sp>
+      <p:sp>
+        <p:nvSpPr>
+          <p:cNvPr id="7" name="TextBox 6"/>
+          <p:cNvSpPr txBox="1"/>
+          <p:nvPr/>
+        </p:nvSpPr>
+        <p:spPr>
+          <a:xfrm>
+            <a:off x="8686800" y="1965960"/>
+            <a:ext cx="2743200" cy="365760"/>
+          </a:xfrm>
+          <a:prstGeom prst="rect">
+            <a:avLst/>
+          </a:prstGeom>
+          <a:noFill/>
+        </p:spPr>
+        <p:txBody>
+          <a:bodyPr wrap="square" lIns="0" tIns="0" rIns="0" bIns="0" anchor="t">
+            <a:spAutoFit/>
+          </a:bodyPr>
+          <a:lstStyle/>
+          <a:p>
+            <a:pPr algn="l"/>
+            <a:r>
+              <a:rPr sz="1600" b="1">
+                <a:solidFill>
+                  <a:srgbClr val="38BDF8"/>
+                </a:solidFill>
+                <a:latin typeface="Calibri"/>
+              </a:rPr>
+              <a:t>In this section</a:t>
+            </a:r>
+          </a:p>
+        </p:txBody>
+      </p:sp>
+      <p:sp>
+        <p:nvSpPr>
+          <p:cNvPr id="8" name="TextBox 7"/>
+          <p:cNvSpPr txBox="1"/>
+          <p:nvPr/>
+        </p:nvSpPr>
+        <p:spPr>
+          <a:xfrm>
+            <a:off x="8686800" y="2423160"/>
+            <a:ext cx="2743200" cy="2560320"/>
+          </a:xfrm>
+          <a:prstGeom prst="rect">
+            <a:avLst/>
+          </a:prstGeom>
+          <a:noFill/>
+        </p:spPr>
+        <p:txBody>
+          <a:bodyPr wrap="square" lIns="0" tIns="0" rIns="0" bIns="0" anchor="t">
+            <a:spAutoFit/>
+          </a:bodyPr>
+          <a:lstStyle/>
+          <a:p>
+            <a:pPr algn="l"/>
+            <a:r>
+              <a:rPr sz="1800" b="0">
+                <a:solidFill>
+                  <a:srgbClr val="F2F6FC"/>
+                </a:solidFill>
+                <a:latin typeface="Calibri"/>
+              </a:rPr>
+              <a:t>Context management</a:t>
+            </a:r>
+          </a:p>
+          <a:p>
+            <a:pPr>
+              <a:spcBef>
+                <a:spcPts val="800"/>
+              </a:spcBef>
+            </a:pPr>
+            <a:r>
+              <a:rPr sz="1800">
+                <a:solidFill>
+                  <a:srgbClr val="F2F6FC"/>
+                </a:solidFill>
+                <a:latin typeface="Calibri"/>
+              </a:rPr>
+              <a:t>Terminal flags</a:t>
+            </a:r>
+          </a:p>
+          <a:p>
+            <a:pPr>
+              <a:spcBef>
+                <a:spcPts val="800"/>
+              </a:spcBef>
+            </a:pPr>
+            <a:r>
+              <a:rPr sz="1800">
+                <a:solidFill>
+                  <a:srgbClr val="F2F6FC"/>
+                </a:solidFill>
+                <a:latin typeface="Calibri"/>
+              </a:rPr>
+              <a:t>MCP</a:t>
+            </a:r>
+          </a:p>
+          <a:p>
+            <a:pPr>
+              <a:spcBef>
+                <a:spcPts val="800"/>
+              </a:spcBef>
+            </a:pPr>
+            <a:r>
+              <a:rPr sz="1800">
+                <a:solidFill>
+                  <a:srgbClr val="F2F6FC"/>
+                </a:solidFill>
+                <a:latin typeface="Calibri"/>
+              </a:rPr>
+              <a:t>Review commands</a:t>
+            </a:r>
+          </a:p>
+          <a:p>
+            <a:pPr>
+              <a:spcBef>
+                <a:spcPts val="800"/>
+              </a:spcBef>
+            </a:pPr>
+            <a:r>
+              <a:rPr sz="1800">
+                <a:solidFill>
+                  <a:srgbClr val="F2F6FC"/>
+                </a:solidFill>
+                <a:latin typeface="Calibri"/>
+              </a:rPr>
+              <a:t>Remote and learning</a:t>
+            </a:r>
+          </a:p>
+          <a:p>
+            <a:pPr>
+              <a:spcBef>
+                <a:spcPts val="800"/>
+              </a:spcBef>
+            </a:pPr>
+            <a:r>
+              <a:rPr sz="1800">
+                <a:solidFill>
+                  <a:srgbClr val="F2F6FC"/>
+                </a:solidFill>
+                <a:latin typeface="Calibri"/>
+              </a:rPr>
+              <a:t>Habits</a:t>
+            </a:r>
+          </a:p>
+        </p:txBody>
+      </p:sp>
+    </p:spTree>
+  </p:cSld>
+  <p:clrMapOvr>
+    <a:masterClrMapping/>
+  </p:clrMapOvr>
+</p:sld>
+</file>
+
+<file path=ppt/slides/slide27.xml><?xml version="1.0" encoding="utf-8"?>
 <p:sld xmlns:a="http://schemas.openxmlformats.org/drawingml/2006/main" xmlns:r="http://schemas.openxmlformats.org/officeDocument/2006/relationships" xmlns:p="http://schemas.openxmlformats.org/presentationml/2006/main">
   <p:cSld name="Slide 14">
     <p:spTree>
@@ -18948,7 +19676,7 @@
           </a:prstGeom>
           <a:extLst>
             <a:ext uri="{C572A759-6A51-4108-AA02-DFA0A04FC94B}">
-              <ma14:wrappingTextBoxFlag xmlns:ma14="http://schemas.microsoft.com/office/mac/drawingml/2011/main" xmlns="" val="0"/>
+              <ma14:wrappingTextBoxFlag xmlns="" xmlns:ma14="http://schemas.microsoft.com/office/mac/drawingml/2011/main" val="0"/>
             </a:ext>
           </a:extLst>
         </p:spPr>
@@ -18970,7 +19698,7 @@
             <a:pPr algn="r"/>
             <a:fld id="{F7021451-1387-4CA6-816F-3879F97B5CBC}" type="slidenum">
               <a:rPr lang="en-US" b="0"/>
-              <a:t>26</a:t>
+              <a:t>27</a:t>
             </a:fld>
             <a:endParaRPr lang="en-US"/>
           </a:p>
@@ -18984,7 +19712,7 @@
 </p:sld>
 </file>
 
-<file path=ppt/slides/slide27.xml><?xml version="1.0" encoding="utf-8"?>
+<file path=ppt/slides/slide28.xml><?xml version="1.0" encoding="utf-8"?>
 <p:sld xmlns:a="http://schemas.openxmlformats.org/drawingml/2006/main" xmlns:r="http://schemas.openxmlformats.org/officeDocument/2006/relationships" xmlns:p="http://schemas.openxmlformats.org/presentationml/2006/main">
   <p:cSld name="Slide 15">
     <p:spTree>
@@ -19736,7 +20464,7 @@
           </a:prstGeom>
           <a:extLst>
             <a:ext uri="{C572A759-6A51-4108-AA02-DFA0A04FC94B}">
-              <ma14:wrappingTextBoxFlag xmlns:ma14="http://schemas.microsoft.com/office/mac/drawingml/2011/main" xmlns="" val="0"/>
+              <ma14:wrappingTextBoxFlag xmlns="" xmlns:ma14="http://schemas.microsoft.com/office/mac/drawingml/2011/main" val="0"/>
             </a:ext>
           </a:extLst>
         </p:spPr>
@@ -19758,7 +20486,7 @@
             <a:pPr algn="r"/>
             <a:fld id="{F7021451-1387-4CA6-816F-3879F97B5CBC}" type="slidenum">
               <a:rPr lang="en-US" b="0"/>
-              <a:t>27</a:t>
+              <a:t>28</a:t>
             </a:fld>
             <a:endParaRPr lang="en-US"/>
           </a:p>
@@ -19772,7 +20500,7 @@
 </p:sld>
 </file>
 
-<file path=ppt/slides/slide28.xml><?xml version="1.0" encoding="utf-8"?>
+<file path=ppt/slides/slide29.xml><?xml version="1.0" encoding="utf-8"?>
 <p:sld xmlns:a="http://schemas.openxmlformats.org/drawingml/2006/main" xmlns:r="http://schemas.openxmlformats.org/officeDocument/2006/relationships" xmlns:p="http://schemas.openxmlformats.org/presentationml/2006/main">
   <p:cSld name="Slide 16">
     <p:spTree>
@@ -19861,7 +20589,7 @@
           </a:prstGeom>
           <a:extLst>
             <a:ext uri="{C572A759-6A51-4108-AA02-DFA0A04FC94B}">
-              <ma14:wrappingTextBoxFlag xmlns:ma14="http://schemas.microsoft.com/office/mac/drawingml/2011/main" xmlns="" val="0"/>
+              <ma14:wrappingTextBoxFlag xmlns="" xmlns:ma14="http://schemas.microsoft.com/office/mac/drawingml/2011/main" val="0"/>
             </a:ext>
           </a:extLst>
         </p:spPr>
@@ -19883,7 +20611,7 @@
             <a:pPr algn="r"/>
             <a:fld id="{F7021451-1387-4CA6-816F-3879F97B5CBC}" type="slidenum">
               <a:rPr lang="en-US" b="0"/>
-              <a:t>28</a:t>
+              <a:t>29</a:t>
             </a:fld>
             <a:endParaRPr lang="en-US"/>
           </a:p>
@@ -20547,809 +21275,6 @@
               </a:rPr>
               <a:t>claude mcp add --transport http &lt;name&gt; &lt;url&gt;           # add one; --scope user = all projects</a:t>
             </a:r>
-          </a:p>
-        </p:txBody>
-      </p:sp>
-    </p:spTree>
-  </p:cSld>
-  <p:clrMapOvr>
-    <a:masterClrMapping/>
-  </p:clrMapOvr>
-</p:sld>
-</file>
-
-<file path=ppt/slides/slide29.xml><?xml version="1.0" encoding="utf-8"?>
-<p:sld xmlns:a="http://schemas.openxmlformats.org/drawingml/2006/main" xmlns:r="http://schemas.openxmlformats.org/officeDocument/2006/relationships" xmlns:p="http://schemas.openxmlformats.org/presentationml/2006/main">
-  <p:cSld name="Slide 17">
-    <p:spTree>
-      <p:nvGrpSpPr>
-        <p:cNvPr id="1" name=""/>
-        <p:cNvGrpSpPr/>
-        <p:nvPr/>
-      </p:nvGrpSpPr>
-      <p:grpSpPr>
-        <a:xfrm>
-          <a:off x="0" y="0"/>
-          <a:ext cx="0" cy="0"/>
-          <a:chOff x="0" y="0"/>
-          <a:chExt cx="0" cy="0"/>
-        </a:xfrm>
-      </p:grpSpPr>
-      <p:sp>
-        <p:nvSpPr>
-          <p:cNvPr id="2" name="Text 0"/>
-          <p:cNvSpPr>
-            <a:spLocks noGrp="1"/>
-          </p:cNvSpPr>
-          <p:nvPr>
-            <p:ph type="title" idx="100" hasCustomPrompt="1"/>
-          </p:nvPr>
-        </p:nvSpPr>
-        <p:spPr>
-          <a:xfrm>
-            <a:off x="548640" y="320040"/>
-            <a:ext cx="11064240" cy="1005840"/>
-          </a:xfrm>
-          <a:prstGeom prst="rect">
-            <a:avLst/>
-          </a:prstGeom>
-          <a:noFill/>
-          <a:ln/>
-        </p:spPr>
-        <p:txBody>
-          <a:bodyPr wrap="square" lIns="0" tIns="0" rIns="0" bIns="0" rtlCol="0" anchor="ctr"/>
-          <a:lstStyle/>
-          <a:p>
-            <a:pPr marL="0" indent="0" algn="l">
-              <a:buNone/>
-            </a:pPr>
-            <a:r>
-              <a:rPr lang="en-US" sz="3000" b="1" dirty="0">
-                <a:solidFill>
-                  <a:srgbClr val="F2F6FC"/>
-                </a:solidFill>
-                <a:latin typeface="Calibri" pitchFamily="34" charset="0"/>
-                <a:ea typeface="Calibri" pitchFamily="34" charset="-122"/>
-                <a:cs typeface="Calibri" pitchFamily="34" charset="-120"/>
-              </a:rPr>
-              <a:t>Check and ship with the </a:t>
-            </a:r>
-            <a:r>
-              <a:rPr lang="en-US" sz="3000" b="1" dirty="0">
-                <a:solidFill>
-                  <a:schemeClr val="accent2"/>
-                </a:solidFill>
-                <a:latin typeface="Calibri" pitchFamily="34" charset="0"/>
-                <a:ea typeface="Calibri" pitchFamily="34" charset="-122"/>
-                <a:cs typeface="Calibri" pitchFamily="34" charset="-120"/>
-              </a:rPr>
-              <a:t>built-in commands</a:t>
-            </a:r>
-            <a:endParaRPr lang="en-US" sz="3000" dirty="0">
-              <a:solidFill>
-                <a:schemeClr val="accent2"/>
-              </a:solidFill>
-            </a:endParaRPr>
-          </a:p>
-        </p:txBody>
-      </p:sp>
-      <p:sp>
-        <p:nvSpPr>
-          <p:cNvPr id="3" name="Shape 1"/>
-          <p:cNvSpPr/>
-          <p:nvPr/>
-        </p:nvSpPr>
-        <p:spPr>
-          <a:xfrm>
-            <a:off x="548640" y="1691640"/>
-            <a:ext cx="3514344" cy="2148840"/>
-          </a:xfrm>
-          <a:prstGeom prst="roundRect">
-            <a:avLst>
-              <a:gd name="adj" fmla="val 5106"/>
-            </a:avLst>
-          </a:prstGeom>
-          <a:solidFill>
-            <a:srgbClr val="12305A"/>
-          </a:solidFill>
-          <a:ln w="12700">
-            <a:solidFill>
-              <a:srgbClr val="12305A"/>
-            </a:solidFill>
-            <a:prstDash val="solid"/>
-          </a:ln>
-        </p:spPr>
-        <p:txBody>
-          <a:bodyPr/>
-          <a:lstStyle/>
-          <a:p>
-            <a:endParaRPr lang="en-US"/>
-          </a:p>
-        </p:txBody>
-      </p:sp>
-      <p:sp>
-        <p:nvSpPr>
-          <p:cNvPr id="4" name="Text 2"/>
-          <p:cNvSpPr txBox="1"/>
-          <p:nvPr/>
-        </p:nvSpPr>
-        <p:spPr>
-          <a:xfrm>
-            <a:off x="777240" y="1874520"/>
-            <a:ext cx="3057144" cy="411480"/>
-          </a:xfrm>
-          <a:prstGeom prst="rect">
-            <a:avLst/>
-          </a:prstGeom>
-          <a:noFill/>
-          <a:ln/>
-        </p:spPr>
-        <p:txBody>
-          <a:bodyPr wrap="square" lIns="0" tIns="0" rIns="0" bIns="0" rtlCol="0" anchor="t"/>
-          <a:lstStyle/>
-          <a:p>
-            <a:pPr marL="0" indent="0">
-              <a:buNone/>
-            </a:pPr>
-            <a:r>
-              <a:rPr lang="en-US" sz="2200" b="1" dirty="0">
-                <a:solidFill>
-                  <a:srgbClr val="F2F6FC"/>
-                </a:solidFill>
-                <a:latin typeface="Calibri" pitchFamily="34" charset="0"/>
-                <a:ea typeface="Calibri" pitchFamily="34" charset="-122"/>
-                <a:cs typeface="Calibri" pitchFamily="34" charset="-120"/>
-              </a:rPr>
-              <a:t>/run</a:t>
-            </a:r>
-            <a:endParaRPr lang="en-US" sz="2200" dirty="0"/>
-          </a:p>
-        </p:txBody>
-      </p:sp>
-      <p:sp>
-        <p:nvSpPr>
-          <p:cNvPr id="5" name="Text 3"/>
-          <p:cNvSpPr txBox="1"/>
-          <p:nvPr/>
-        </p:nvSpPr>
-        <p:spPr>
-          <a:xfrm>
-            <a:off x="777240" y="2377440"/>
-            <a:ext cx="3057144" cy="1325880"/>
-          </a:xfrm>
-          <a:prstGeom prst="rect">
-            <a:avLst/>
-          </a:prstGeom>
-          <a:noFill/>
-          <a:ln/>
-        </p:spPr>
-        <p:txBody>
-          <a:bodyPr wrap="square" lIns="0" tIns="0" rIns="0" bIns="0" rtlCol="0" anchor="t"/>
-          <a:lstStyle/>
-          <a:p>
-            <a:pPr marL="0" indent="0">
-              <a:buNone/>
-            </a:pPr>
-            <a:r>
-              <a:rPr lang="en-US" sz="1700" dirty="0">
-                <a:solidFill>
-                  <a:srgbClr val="A9BCD6"/>
-                </a:solidFill>
-                <a:latin typeface="Calibri" pitchFamily="34" charset="0"/>
-                <a:ea typeface="Calibri" pitchFamily="34" charset="-122"/>
-                <a:cs typeface="Calibri" pitchFamily="34" charset="-120"/>
-              </a:rPr>
-              <a:t>Launch the app and see the change working</a:t>
-            </a:r>
-            <a:endParaRPr lang="en-US" sz="1700" dirty="0"/>
-          </a:p>
-        </p:txBody>
-      </p:sp>
-      <p:sp>
-        <p:nvSpPr>
-          <p:cNvPr id="6" name="Shape 4"/>
-          <p:cNvSpPr/>
-          <p:nvPr/>
-        </p:nvSpPr>
-        <p:spPr>
-          <a:xfrm>
-            <a:off x="4337304" y="1691640"/>
-            <a:ext cx="3514344" cy="2148840"/>
-          </a:xfrm>
-          <a:prstGeom prst="roundRect">
-            <a:avLst>
-              <a:gd name="adj" fmla="val 5106"/>
-            </a:avLst>
-          </a:prstGeom>
-          <a:solidFill>
-            <a:srgbClr val="12305A"/>
-          </a:solidFill>
-          <a:ln w="12700">
-            <a:solidFill>
-              <a:srgbClr val="12305A"/>
-            </a:solidFill>
-            <a:prstDash val="solid"/>
-          </a:ln>
-        </p:spPr>
-        <p:txBody>
-          <a:bodyPr/>
-          <a:lstStyle/>
-          <a:p>
-            <a:endParaRPr lang="en-US"/>
-          </a:p>
-        </p:txBody>
-      </p:sp>
-      <p:sp>
-        <p:nvSpPr>
-          <p:cNvPr id="7" name="Text 5"/>
-          <p:cNvSpPr txBox="1"/>
-          <p:nvPr/>
-        </p:nvSpPr>
-        <p:spPr>
-          <a:xfrm>
-            <a:off x="4565904" y="1874520"/>
-            <a:ext cx="3057144" cy="411480"/>
-          </a:xfrm>
-          <a:prstGeom prst="rect">
-            <a:avLst/>
-          </a:prstGeom>
-          <a:noFill/>
-          <a:ln/>
-        </p:spPr>
-        <p:txBody>
-          <a:bodyPr wrap="square" lIns="0" tIns="0" rIns="0" bIns="0" rtlCol="0" anchor="t"/>
-          <a:lstStyle/>
-          <a:p>
-            <a:pPr marL="0" indent="0">
-              <a:buNone/>
-            </a:pPr>
-            <a:r>
-              <a:rPr lang="en-US" sz="2200" b="1" dirty="0">
-                <a:solidFill>
-                  <a:srgbClr val="F2F6FC"/>
-                </a:solidFill>
-                <a:latin typeface="Calibri" pitchFamily="34" charset="0"/>
-                <a:ea typeface="Calibri" pitchFamily="34" charset="-122"/>
-                <a:cs typeface="Calibri" pitchFamily="34" charset="-120"/>
-              </a:rPr>
-              <a:t>/verify</a:t>
-            </a:r>
-            <a:endParaRPr lang="en-US" sz="2200" dirty="0"/>
-          </a:p>
-        </p:txBody>
-      </p:sp>
-      <p:sp>
-        <p:nvSpPr>
-          <p:cNvPr id="8" name="Text 6"/>
-          <p:cNvSpPr txBox="1"/>
-          <p:nvPr/>
-        </p:nvSpPr>
-        <p:spPr>
-          <a:xfrm>
-            <a:off x="4565904" y="2377440"/>
-            <a:ext cx="3057144" cy="1325880"/>
-          </a:xfrm>
-          <a:prstGeom prst="rect">
-            <a:avLst/>
-          </a:prstGeom>
-          <a:noFill/>
-          <a:ln/>
-        </p:spPr>
-        <p:txBody>
-          <a:bodyPr wrap="square" lIns="0" tIns="0" rIns="0" bIns="0" rtlCol="0" anchor="t"/>
-          <a:lstStyle/>
-          <a:p>
-            <a:pPr marL="0" indent="0">
-              <a:buNone/>
-            </a:pPr>
-            <a:r>
-              <a:rPr lang="en-US" sz="1700" dirty="0">
-                <a:solidFill>
-                  <a:srgbClr val="A9BCD6"/>
-                </a:solidFill>
-                <a:latin typeface="Calibri" pitchFamily="34" charset="0"/>
-                <a:ea typeface="Calibri" pitchFamily="34" charset="-122"/>
-                <a:cs typeface="Calibri" pitchFamily="34" charset="-120"/>
-              </a:rPr>
-              <a:t>Check that the work does what was asked: code, docs or data</a:t>
-            </a:r>
-            <a:endParaRPr lang="en-US" sz="1700" dirty="0"/>
-          </a:p>
-        </p:txBody>
-      </p:sp>
-      <p:sp>
-        <p:nvSpPr>
-          <p:cNvPr id="9" name="Shape 7"/>
-          <p:cNvSpPr/>
-          <p:nvPr/>
-        </p:nvSpPr>
-        <p:spPr>
-          <a:xfrm>
-            <a:off x="8125968" y="1691640"/>
-            <a:ext cx="3514344" cy="2148840"/>
-          </a:xfrm>
-          <a:prstGeom prst="roundRect">
-            <a:avLst>
-              <a:gd name="adj" fmla="val 5106"/>
-            </a:avLst>
-          </a:prstGeom>
-          <a:solidFill>
-            <a:srgbClr val="12305A"/>
-          </a:solidFill>
-          <a:ln w="12700">
-            <a:solidFill>
-              <a:srgbClr val="12305A"/>
-            </a:solidFill>
-            <a:prstDash val="solid"/>
-          </a:ln>
-        </p:spPr>
-        <p:txBody>
-          <a:bodyPr/>
-          <a:lstStyle/>
-          <a:p>
-            <a:endParaRPr lang="en-US"/>
-          </a:p>
-        </p:txBody>
-      </p:sp>
-      <p:sp>
-        <p:nvSpPr>
-          <p:cNvPr id="10" name="Text 8"/>
-          <p:cNvSpPr txBox="1"/>
-          <p:nvPr/>
-        </p:nvSpPr>
-        <p:spPr>
-          <a:xfrm>
-            <a:off x="8354568" y="1874520"/>
-            <a:ext cx="3057144" cy="411480"/>
-          </a:xfrm>
-          <a:prstGeom prst="rect">
-            <a:avLst/>
-          </a:prstGeom>
-          <a:noFill/>
-          <a:ln/>
-        </p:spPr>
-        <p:txBody>
-          <a:bodyPr wrap="square" lIns="0" tIns="0" rIns="0" bIns="0" rtlCol="0" anchor="t"/>
-          <a:lstStyle/>
-          <a:p>
-            <a:pPr marL="0" indent="0">
-              <a:buNone/>
-            </a:pPr>
-            <a:r>
-              <a:rPr lang="en-US" sz="2200" b="1" dirty="0">
-                <a:solidFill>
-                  <a:srgbClr val="F2F6FC"/>
-                </a:solidFill>
-                <a:latin typeface="Calibri" pitchFamily="34" charset="0"/>
-                <a:ea typeface="Calibri" pitchFamily="34" charset="-122"/>
-                <a:cs typeface="Calibri" pitchFamily="34" charset="-120"/>
-              </a:rPr>
-              <a:t>/code-review</a:t>
-            </a:r>
-            <a:endParaRPr lang="en-US" sz="2200" dirty="0"/>
-          </a:p>
-        </p:txBody>
-      </p:sp>
-      <p:sp>
-        <p:nvSpPr>
-          <p:cNvPr id="11" name="Text 9"/>
-          <p:cNvSpPr txBox="1"/>
-          <p:nvPr/>
-        </p:nvSpPr>
-        <p:spPr>
-          <a:xfrm>
-            <a:off x="8354568" y="2377440"/>
-            <a:ext cx="3057144" cy="1325880"/>
-          </a:xfrm>
-          <a:prstGeom prst="rect">
-            <a:avLst/>
-          </a:prstGeom>
-          <a:noFill/>
-          <a:ln/>
-        </p:spPr>
-        <p:txBody>
-          <a:bodyPr wrap="square" lIns="0" tIns="0" rIns="0" bIns="0" rtlCol="0" anchor="t"/>
-          <a:lstStyle/>
-          <a:p>
-            <a:pPr marL="0" indent="0">
-              <a:buNone/>
-            </a:pPr>
-            <a:r>
-              <a:rPr lang="en-US" sz="1700" dirty="0">
-                <a:solidFill>
-                  <a:srgbClr val="A9BCD6"/>
-                </a:solidFill>
-                <a:latin typeface="Calibri" pitchFamily="34" charset="0"/>
-                <a:ea typeface="Calibri" pitchFamily="34" charset="-122"/>
-                <a:cs typeface="Calibri" pitchFamily="34" charset="-120"/>
-              </a:rPr>
-              <a:t>Review the diff for bugs; "ultra" runs a deep cloud review</a:t>
-            </a:r>
-            <a:endParaRPr lang="en-US" sz="1700" dirty="0"/>
-          </a:p>
-        </p:txBody>
-      </p:sp>
-      <p:sp>
-        <p:nvSpPr>
-          <p:cNvPr id="12" name="Shape 10"/>
-          <p:cNvSpPr/>
-          <p:nvPr/>
-        </p:nvSpPr>
-        <p:spPr>
-          <a:xfrm>
-            <a:off x="548640" y="4114800"/>
-            <a:ext cx="3514344" cy="2148840"/>
-          </a:xfrm>
-          <a:prstGeom prst="roundRect">
-            <a:avLst>
-              <a:gd name="adj" fmla="val 5106"/>
-            </a:avLst>
-          </a:prstGeom>
-          <a:solidFill>
-            <a:srgbClr val="12305A"/>
-          </a:solidFill>
-          <a:ln w="12700">
-            <a:solidFill>
-              <a:srgbClr val="12305A"/>
-            </a:solidFill>
-            <a:prstDash val="solid"/>
-          </a:ln>
-        </p:spPr>
-        <p:txBody>
-          <a:bodyPr/>
-          <a:lstStyle/>
-          <a:p>
-            <a:endParaRPr lang="en-US"/>
-          </a:p>
-        </p:txBody>
-      </p:sp>
-      <p:sp>
-        <p:nvSpPr>
-          <p:cNvPr id="13" name="Text 11"/>
-          <p:cNvSpPr txBox="1"/>
-          <p:nvPr/>
-        </p:nvSpPr>
-        <p:spPr>
-          <a:xfrm>
-            <a:off x="777240" y="4297680"/>
-            <a:ext cx="3057144" cy="411480"/>
-          </a:xfrm>
-          <a:prstGeom prst="rect">
-            <a:avLst/>
-          </a:prstGeom>
-          <a:noFill/>
-          <a:ln/>
-        </p:spPr>
-        <p:txBody>
-          <a:bodyPr wrap="square" lIns="0" tIns="0" rIns="0" bIns="0" rtlCol="0" anchor="t"/>
-          <a:lstStyle/>
-          <a:p>
-            <a:pPr marL="0" indent="0">
-              <a:buNone/>
-            </a:pPr>
-            <a:r>
-              <a:rPr lang="en-US" sz="2200" b="1" dirty="0">
-                <a:solidFill>
-                  <a:srgbClr val="F2F6FC"/>
-                </a:solidFill>
-                <a:latin typeface="Calibri" pitchFamily="34" charset="0"/>
-                <a:ea typeface="Calibri" pitchFamily="34" charset="-122"/>
-                <a:cs typeface="Calibri" pitchFamily="34" charset="-120"/>
-              </a:rPr>
-              <a:t>/security-review</a:t>
-            </a:r>
-            <a:endParaRPr lang="en-US" sz="2200" dirty="0"/>
-          </a:p>
-        </p:txBody>
-      </p:sp>
-      <p:sp>
-        <p:nvSpPr>
-          <p:cNvPr id="14" name="Text 12"/>
-          <p:cNvSpPr txBox="1"/>
-          <p:nvPr/>
-        </p:nvSpPr>
-        <p:spPr>
-          <a:xfrm>
-            <a:off x="777240" y="4800600"/>
-            <a:ext cx="3057144" cy="1325880"/>
-          </a:xfrm>
-          <a:prstGeom prst="rect">
-            <a:avLst/>
-          </a:prstGeom>
-          <a:noFill/>
-          <a:ln/>
-        </p:spPr>
-        <p:txBody>
-          <a:bodyPr wrap="square" lIns="0" tIns="0" rIns="0" bIns="0" rtlCol="0" anchor="t"/>
-          <a:lstStyle/>
-          <a:p>
-            <a:pPr marL="0" indent="0">
-              <a:buNone/>
-            </a:pPr>
-            <a:r>
-              <a:rPr lang="en-US" sz="1700" dirty="0">
-                <a:solidFill>
-                  <a:srgbClr val="A9BCD6"/>
-                </a:solidFill>
-                <a:latin typeface="Calibri" pitchFamily="34" charset="0"/>
-                <a:ea typeface="Calibri" pitchFamily="34" charset="-122"/>
-                <a:cs typeface="Calibri" pitchFamily="34" charset="-120"/>
-              </a:rPr>
-              <a:t>Security check of the pending changes</a:t>
-            </a:r>
-            <a:endParaRPr lang="en-US" sz="1700" dirty="0"/>
-          </a:p>
-        </p:txBody>
-      </p:sp>
-      <p:sp>
-        <p:nvSpPr>
-          <p:cNvPr id="15" name="Shape 13"/>
-          <p:cNvSpPr/>
-          <p:nvPr/>
-        </p:nvSpPr>
-        <p:spPr>
-          <a:xfrm>
-            <a:off x="4337304" y="4114800"/>
-            <a:ext cx="3514344" cy="2148840"/>
-          </a:xfrm>
-          <a:prstGeom prst="roundRect">
-            <a:avLst>
-              <a:gd name="adj" fmla="val 5106"/>
-            </a:avLst>
-          </a:prstGeom>
-          <a:solidFill>
-            <a:srgbClr val="12305A"/>
-          </a:solidFill>
-          <a:ln w="12700">
-            <a:solidFill>
-              <a:srgbClr val="12305A"/>
-            </a:solidFill>
-            <a:prstDash val="solid"/>
-          </a:ln>
-        </p:spPr>
-        <p:txBody>
-          <a:bodyPr/>
-          <a:lstStyle/>
-          <a:p>
-            <a:endParaRPr lang="en-US"/>
-          </a:p>
-        </p:txBody>
-      </p:sp>
-      <p:sp>
-        <p:nvSpPr>
-          <p:cNvPr id="16" name="Text 14"/>
-          <p:cNvSpPr txBox="1"/>
-          <p:nvPr/>
-        </p:nvSpPr>
-        <p:spPr>
-          <a:xfrm>
-            <a:off x="4565904" y="4297680"/>
-            <a:ext cx="3057144" cy="411480"/>
-          </a:xfrm>
-          <a:prstGeom prst="rect">
-            <a:avLst/>
-          </a:prstGeom>
-          <a:noFill/>
-          <a:ln/>
-        </p:spPr>
-        <p:txBody>
-          <a:bodyPr wrap="square" lIns="0" tIns="0" rIns="0" bIns="0" rtlCol="0" anchor="t"/>
-          <a:lstStyle/>
-          <a:p>
-            <a:pPr marL="0" indent="0">
-              <a:buNone/>
-            </a:pPr>
-            <a:r>
-              <a:rPr lang="en-US" sz="2200" b="1" dirty="0">
-                <a:solidFill>
-                  <a:srgbClr val="F2F6FC"/>
-                </a:solidFill>
-                <a:latin typeface="Calibri" pitchFamily="34" charset="0"/>
-                <a:ea typeface="Calibri" pitchFamily="34" charset="-122"/>
-                <a:cs typeface="Calibri" pitchFamily="34" charset="-120"/>
-              </a:rPr>
-              <a:t>/simplify</a:t>
-            </a:r>
-            <a:endParaRPr lang="en-US" sz="2200" dirty="0"/>
-          </a:p>
-        </p:txBody>
-      </p:sp>
-      <p:sp>
-        <p:nvSpPr>
-          <p:cNvPr id="17" name="Text 15"/>
-          <p:cNvSpPr txBox="1"/>
-          <p:nvPr/>
-        </p:nvSpPr>
-        <p:spPr>
-          <a:xfrm>
-            <a:off x="4565904" y="4800600"/>
-            <a:ext cx="3057144" cy="1325880"/>
-          </a:xfrm>
-          <a:prstGeom prst="rect">
-            <a:avLst/>
-          </a:prstGeom>
-          <a:noFill/>
-          <a:ln/>
-        </p:spPr>
-        <p:txBody>
-          <a:bodyPr wrap="square" lIns="0" tIns="0" rIns="0" bIns="0" rtlCol="0" anchor="t"/>
-          <a:lstStyle/>
-          <a:p>
-            <a:pPr marL="0" indent="0">
-              <a:buNone/>
-            </a:pPr>
-            <a:r>
-              <a:rPr lang="en-US" sz="1700" dirty="0">
-                <a:solidFill>
-                  <a:srgbClr val="A9BCD6"/>
-                </a:solidFill>
-                <a:latin typeface="Calibri" pitchFamily="34" charset="0"/>
-                <a:ea typeface="Calibri" pitchFamily="34" charset="-122"/>
-                <a:cs typeface="Calibri" pitchFamily="34" charset="-120"/>
-              </a:rPr>
-              <a:t>Clean up changed code for reuse and clarity</a:t>
-            </a:r>
-            <a:endParaRPr lang="en-US" sz="1700" dirty="0"/>
-          </a:p>
-        </p:txBody>
-      </p:sp>
-      <p:sp>
-        <p:nvSpPr>
-          <p:cNvPr id="18" name="Shape 16"/>
-          <p:cNvSpPr/>
-          <p:nvPr/>
-        </p:nvSpPr>
-        <p:spPr>
-          <a:xfrm>
-            <a:off x="8125968" y="4114800"/>
-            <a:ext cx="3514344" cy="2148840"/>
-          </a:xfrm>
-          <a:prstGeom prst="roundRect">
-            <a:avLst>
-              <a:gd name="adj" fmla="val 5106"/>
-            </a:avLst>
-          </a:prstGeom>
-          <a:solidFill>
-            <a:srgbClr val="12305A"/>
-          </a:solidFill>
-          <a:ln w="12700">
-            <a:solidFill>
-              <a:srgbClr val="12305A"/>
-            </a:solidFill>
-            <a:prstDash val="solid"/>
-          </a:ln>
-        </p:spPr>
-        <p:txBody>
-          <a:bodyPr/>
-          <a:lstStyle/>
-          <a:p>
-            <a:endParaRPr lang="en-US"/>
-          </a:p>
-        </p:txBody>
-      </p:sp>
-      <p:sp>
-        <p:nvSpPr>
-          <p:cNvPr id="19" name="Text 17"/>
-          <p:cNvSpPr txBox="1"/>
-          <p:nvPr/>
-        </p:nvSpPr>
-        <p:spPr>
-          <a:xfrm>
-            <a:off x="8354568" y="4297680"/>
-            <a:ext cx="3057144" cy="411480"/>
-          </a:xfrm>
-          <a:prstGeom prst="rect">
-            <a:avLst/>
-          </a:prstGeom>
-          <a:noFill/>
-          <a:ln/>
-        </p:spPr>
-        <p:txBody>
-          <a:bodyPr wrap="square" lIns="0" tIns="0" rIns="0" bIns="0" rtlCol="0" anchor="t"/>
-          <a:lstStyle/>
-          <a:p>
-            <a:pPr marL="0" indent="0">
-              <a:buNone/>
-            </a:pPr>
-            <a:r>
-              <a:rPr lang="en-US" sz="2200" b="1" dirty="0">
-                <a:solidFill>
-                  <a:srgbClr val="F2F6FC"/>
-                </a:solidFill>
-                <a:latin typeface="Calibri" pitchFamily="34" charset="0"/>
-                <a:ea typeface="Calibri" pitchFamily="34" charset="-122"/>
-                <a:cs typeface="Calibri" pitchFamily="34" charset="-120"/>
-              </a:rPr>
-              <a:t>/install-github-app</a:t>
-            </a:r>
-            <a:endParaRPr lang="en-US" sz="2200" dirty="0"/>
-          </a:p>
-        </p:txBody>
-      </p:sp>
-      <p:sp>
-        <p:nvSpPr>
-          <p:cNvPr id="20" name="Text 18"/>
-          <p:cNvSpPr txBox="1"/>
-          <p:nvPr/>
-        </p:nvSpPr>
-        <p:spPr>
-          <a:xfrm>
-            <a:off x="8354568" y="4800600"/>
-            <a:ext cx="3057144" cy="1325880"/>
-          </a:xfrm>
-          <a:prstGeom prst="rect">
-            <a:avLst/>
-          </a:prstGeom>
-          <a:noFill/>
-          <a:ln/>
-        </p:spPr>
-        <p:txBody>
-          <a:bodyPr wrap="square" lIns="0" tIns="0" rIns="0" bIns="0" rtlCol="0" anchor="t"/>
-          <a:lstStyle/>
-          <a:p>
-            <a:pPr marL="0" indent="0">
-              <a:buNone/>
-            </a:pPr>
-            <a:r>
-              <a:rPr lang="en-US" sz="1700" dirty="0">
-                <a:solidFill>
-                  <a:srgbClr val="A9BCD6"/>
-                </a:solidFill>
-                <a:latin typeface="Calibri" pitchFamily="34" charset="0"/>
-                <a:ea typeface="Calibri" pitchFamily="34" charset="-122"/>
-                <a:cs typeface="Calibri" pitchFamily="34" charset="-120"/>
-              </a:rPr>
-              <a:t>Connect Claude to your GitHub repo and PRs</a:t>
-            </a:r>
-            <a:endParaRPr lang="en-US" sz="1700" dirty="0"/>
-          </a:p>
-        </p:txBody>
-      </p:sp>
-      <p:sp>
-        <p:nvSpPr>
-          <p:cNvPr id="21" name="Slide Number Placeholder 0"/>
-          <p:cNvSpPr>
-            <a:spLocks noGrp="1"/>
-          </p:cNvSpPr>
-          <p:nvPr>
-            <p:ph type="sldNum" sz="quarter" idx="4294967295"/>
-          </p:nvPr>
-        </p:nvSpPr>
-        <p:spPr>
-          <a:xfrm>
-            <a:off x="11247120" y="6400800"/>
-            <a:ext cx="548640" cy="274320"/>
-          </a:xfrm>
-          <a:prstGeom prst="rect">
-            <a:avLst/>
-          </a:prstGeom>
-          <a:extLst>
-            <a:ext uri="{C572A759-6A51-4108-AA02-DFA0A04FC94B}">
-              <ma14:wrappingTextBoxFlag xmlns:ma14="http://schemas.microsoft.com/office/mac/drawingml/2011/main" xmlns="" val="0"/>
-            </a:ext>
-          </a:extLst>
-        </p:spPr>
-        <p:txBody>
-          <a:bodyPr/>
-          <a:lstStyle>
-            <a:lvl1pPr>
-              <a:defRPr sz="1200">
-                <a:solidFill>
-                  <a:srgbClr val="A9BCD6"/>
-                </a:solidFill>
-                <a:latin typeface="Calibri"/>
-                <a:ea typeface="Calibri"/>
-                <a:cs typeface="Calibri"/>
-              </a:defRPr>
-            </a:lvl1pPr>
-          </a:lstStyle>
-          <a:p>
-            <a:pPr algn="r"/>
-            <a:fld id="{F7021451-1387-4CA6-816F-3879F97B5CBC}" type="slidenum">
-              <a:rPr lang="en-US" b="0"/>
-              <a:t>29</a:t>
-            </a:fld>
-            <a:endParaRPr lang="en-US"/>
           </a:p>
         </p:txBody>
       </p:sp>
@@ -21701,6 +21626,809 @@
 
 <file path=ppt/slides/slide30.xml><?xml version="1.0" encoding="utf-8"?>
 <p:sld xmlns:a="http://schemas.openxmlformats.org/drawingml/2006/main" xmlns:r="http://schemas.openxmlformats.org/officeDocument/2006/relationships" xmlns:p="http://schemas.openxmlformats.org/presentationml/2006/main">
+  <p:cSld name="Slide 17">
+    <p:spTree>
+      <p:nvGrpSpPr>
+        <p:cNvPr id="1" name=""/>
+        <p:cNvGrpSpPr/>
+        <p:nvPr/>
+      </p:nvGrpSpPr>
+      <p:grpSpPr>
+        <a:xfrm>
+          <a:off x="0" y="0"/>
+          <a:ext cx="0" cy="0"/>
+          <a:chOff x="0" y="0"/>
+          <a:chExt cx="0" cy="0"/>
+        </a:xfrm>
+      </p:grpSpPr>
+      <p:sp>
+        <p:nvSpPr>
+          <p:cNvPr id="2" name="Text 0"/>
+          <p:cNvSpPr>
+            <a:spLocks noGrp="1"/>
+          </p:cNvSpPr>
+          <p:nvPr>
+            <p:ph type="title" idx="100" hasCustomPrompt="1"/>
+          </p:nvPr>
+        </p:nvSpPr>
+        <p:spPr>
+          <a:xfrm>
+            <a:off x="548640" y="320040"/>
+            <a:ext cx="11064240" cy="1005840"/>
+          </a:xfrm>
+          <a:prstGeom prst="rect">
+            <a:avLst/>
+          </a:prstGeom>
+          <a:noFill/>
+          <a:ln/>
+        </p:spPr>
+        <p:txBody>
+          <a:bodyPr wrap="square" lIns="0" tIns="0" rIns="0" bIns="0" rtlCol="0" anchor="ctr"/>
+          <a:lstStyle/>
+          <a:p>
+            <a:pPr marL="0" indent="0" algn="l">
+              <a:buNone/>
+            </a:pPr>
+            <a:r>
+              <a:rPr lang="en-US" sz="3000" b="1" dirty="0">
+                <a:solidFill>
+                  <a:srgbClr val="F2F6FC"/>
+                </a:solidFill>
+                <a:latin typeface="Calibri" pitchFamily="34" charset="0"/>
+                <a:ea typeface="Calibri" pitchFamily="34" charset="-122"/>
+                <a:cs typeface="Calibri" pitchFamily="34" charset="-120"/>
+              </a:rPr>
+              <a:t>Check and ship with the </a:t>
+            </a:r>
+            <a:r>
+              <a:rPr lang="en-US" sz="3000" b="1" dirty="0">
+                <a:solidFill>
+                  <a:schemeClr val="accent2"/>
+                </a:solidFill>
+                <a:latin typeface="Calibri" pitchFamily="34" charset="0"/>
+                <a:ea typeface="Calibri" pitchFamily="34" charset="-122"/>
+                <a:cs typeface="Calibri" pitchFamily="34" charset="-120"/>
+              </a:rPr>
+              <a:t>built-in commands</a:t>
+            </a:r>
+            <a:endParaRPr lang="en-US" sz="3000" dirty="0">
+              <a:solidFill>
+                <a:schemeClr val="accent2"/>
+              </a:solidFill>
+            </a:endParaRPr>
+          </a:p>
+        </p:txBody>
+      </p:sp>
+      <p:sp>
+        <p:nvSpPr>
+          <p:cNvPr id="3" name="Shape 1"/>
+          <p:cNvSpPr/>
+          <p:nvPr/>
+        </p:nvSpPr>
+        <p:spPr>
+          <a:xfrm>
+            <a:off x="548640" y="1691640"/>
+            <a:ext cx="3514344" cy="2148840"/>
+          </a:xfrm>
+          <a:prstGeom prst="roundRect">
+            <a:avLst>
+              <a:gd name="adj" fmla="val 5106"/>
+            </a:avLst>
+          </a:prstGeom>
+          <a:solidFill>
+            <a:srgbClr val="12305A"/>
+          </a:solidFill>
+          <a:ln w="12700">
+            <a:solidFill>
+              <a:srgbClr val="12305A"/>
+            </a:solidFill>
+            <a:prstDash val="solid"/>
+          </a:ln>
+        </p:spPr>
+        <p:txBody>
+          <a:bodyPr/>
+          <a:lstStyle/>
+          <a:p>
+            <a:endParaRPr lang="en-US"/>
+          </a:p>
+        </p:txBody>
+      </p:sp>
+      <p:sp>
+        <p:nvSpPr>
+          <p:cNvPr id="4" name="Text 2"/>
+          <p:cNvSpPr txBox="1"/>
+          <p:nvPr/>
+        </p:nvSpPr>
+        <p:spPr>
+          <a:xfrm>
+            <a:off x="777240" y="1874520"/>
+            <a:ext cx="3057144" cy="411480"/>
+          </a:xfrm>
+          <a:prstGeom prst="rect">
+            <a:avLst/>
+          </a:prstGeom>
+          <a:noFill/>
+          <a:ln/>
+        </p:spPr>
+        <p:txBody>
+          <a:bodyPr wrap="square" lIns="0" tIns="0" rIns="0" bIns="0" rtlCol="0" anchor="t"/>
+          <a:lstStyle/>
+          <a:p>
+            <a:pPr marL="0" indent="0">
+              <a:buNone/>
+            </a:pPr>
+            <a:r>
+              <a:rPr lang="en-US" sz="2200" b="1" dirty="0">
+                <a:solidFill>
+                  <a:srgbClr val="F2F6FC"/>
+                </a:solidFill>
+                <a:latin typeface="Calibri" pitchFamily="34" charset="0"/>
+                <a:ea typeface="Calibri" pitchFamily="34" charset="-122"/>
+                <a:cs typeface="Calibri" pitchFamily="34" charset="-120"/>
+              </a:rPr>
+              <a:t>/run</a:t>
+            </a:r>
+            <a:endParaRPr lang="en-US" sz="2200" dirty="0"/>
+          </a:p>
+        </p:txBody>
+      </p:sp>
+      <p:sp>
+        <p:nvSpPr>
+          <p:cNvPr id="5" name="Text 3"/>
+          <p:cNvSpPr txBox="1"/>
+          <p:nvPr/>
+        </p:nvSpPr>
+        <p:spPr>
+          <a:xfrm>
+            <a:off x="777240" y="2377440"/>
+            <a:ext cx="3057144" cy="1325880"/>
+          </a:xfrm>
+          <a:prstGeom prst="rect">
+            <a:avLst/>
+          </a:prstGeom>
+          <a:noFill/>
+          <a:ln/>
+        </p:spPr>
+        <p:txBody>
+          <a:bodyPr wrap="square" lIns="0" tIns="0" rIns="0" bIns="0" rtlCol="0" anchor="t"/>
+          <a:lstStyle/>
+          <a:p>
+            <a:pPr marL="0" indent="0">
+              <a:buNone/>
+            </a:pPr>
+            <a:r>
+              <a:rPr lang="en-US" sz="1700" dirty="0">
+                <a:solidFill>
+                  <a:srgbClr val="A9BCD6"/>
+                </a:solidFill>
+                <a:latin typeface="Calibri" pitchFamily="34" charset="0"/>
+                <a:ea typeface="Calibri" pitchFamily="34" charset="-122"/>
+                <a:cs typeface="Calibri" pitchFamily="34" charset="-120"/>
+              </a:rPr>
+              <a:t>Launch the app and see the change working</a:t>
+            </a:r>
+            <a:endParaRPr lang="en-US" sz="1700" dirty="0"/>
+          </a:p>
+        </p:txBody>
+      </p:sp>
+      <p:sp>
+        <p:nvSpPr>
+          <p:cNvPr id="6" name="Shape 4"/>
+          <p:cNvSpPr/>
+          <p:nvPr/>
+        </p:nvSpPr>
+        <p:spPr>
+          <a:xfrm>
+            <a:off x="4337304" y="1691640"/>
+            <a:ext cx="3514344" cy="2148840"/>
+          </a:xfrm>
+          <a:prstGeom prst="roundRect">
+            <a:avLst>
+              <a:gd name="adj" fmla="val 5106"/>
+            </a:avLst>
+          </a:prstGeom>
+          <a:solidFill>
+            <a:srgbClr val="12305A"/>
+          </a:solidFill>
+          <a:ln w="12700">
+            <a:solidFill>
+              <a:srgbClr val="12305A"/>
+            </a:solidFill>
+            <a:prstDash val="solid"/>
+          </a:ln>
+        </p:spPr>
+        <p:txBody>
+          <a:bodyPr/>
+          <a:lstStyle/>
+          <a:p>
+            <a:endParaRPr lang="en-US"/>
+          </a:p>
+        </p:txBody>
+      </p:sp>
+      <p:sp>
+        <p:nvSpPr>
+          <p:cNvPr id="7" name="Text 5"/>
+          <p:cNvSpPr txBox="1"/>
+          <p:nvPr/>
+        </p:nvSpPr>
+        <p:spPr>
+          <a:xfrm>
+            <a:off x="4565904" y="1874520"/>
+            <a:ext cx="3057144" cy="411480"/>
+          </a:xfrm>
+          <a:prstGeom prst="rect">
+            <a:avLst/>
+          </a:prstGeom>
+          <a:noFill/>
+          <a:ln/>
+        </p:spPr>
+        <p:txBody>
+          <a:bodyPr wrap="square" lIns="0" tIns="0" rIns="0" bIns="0" rtlCol="0" anchor="t"/>
+          <a:lstStyle/>
+          <a:p>
+            <a:pPr marL="0" indent="0">
+              <a:buNone/>
+            </a:pPr>
+            <a:r>
+              <a:rPr lang="en-US" sz="2200" b="1" dirty="0">
+                <a:solidFill>
+                  <a:srgbClr val="F2F6FC"/>
+                </a:solidFill>
+                <a:latin typeface="Calibri" pitchFamily="34" charset="0"/>
+                <a:ea typeface="Calibri" pitchFamily="34" charset="-122"/>
+                <a:cs typeface="Calibri" pitchFamily="34" charset="-120"/>
+              </a:rPr>
+              <a:t>/verify</a:t>
+            </a:r>
+            <a:endParaRPr lang="en-US" sz="2200" dirty="0"/>
+          </a:p>
+        </p:txBody>
+      </p:sp>
+      <p:sp>
+        <p:nvSpPr>
+          <p:cNvPr id="8" name="Text 6"/>
+          <p:cNvSpPr txBox="1"/>
+          <p:nvPr/>
+        </p:nvSpPr>
+        <p:spPr>
+          <a:xfrm>
+            <a:off x="4565904" y="2377440"/>
+            <a:ext cx="3057144" cy="1325880"/>
+          </a:xfrm>
+          <a:prstGeom prst="rect">
+            <a:avLst/>
+          </a:prstGeom>
+          <a:noFill/>
+          <a:ln/>
+        </p:spPr>
+        <p:txBody>
+          <a:bodyPr wrap="square" lIns="0" tIns="0" rIns="0" bIns="0" rtlCol="0" anchor="t"/>
+          <a:lstStyle/>
+          <a:p>
+            <a:pPr marL="0" indent="0">
+              <a:buNone/>
+            </a:pPr>
+            <a:r>
+              <a:rPr lang="en-US" sz="1700" dirty="0">
+                <a:solidFill>
+                  <a:srgbClr val="A9BCD6"/>
+                </a:solidFill>
+                <a:latin typeface="Calibri" pitchFamily="34" charset="0"/>
+                <a:ea typeface="Calibri" pitchFamily="34" charset="-122"/>
+                <a:cs typeface="Calibri" pitchFamily="34" charset="-120"/>
+              </a:rPr>
+              <a:t>Check that the work does what was asked: code, docs or data</a:t>
+            </a:r>
+            <a:endParaRPr lang="en-US" sz="1700" dirty="0"/>
+          </a:p>
+        </p:txBody>
+      </p:sp>
+      <p:sp>
+        <p:nvSpPr>
+          <p:cNvPr id="9" name="Shape 7"/>
+          <p:cNvSpPr/>
+          <p:nvPr/>
+        </p:nvSpPr>
+        <p:spPr>
+          <a:xfrm>
+            <a:off x="8125968" y="1691640"/>
+            <a:ext cx="3514344" cy="2148840"/>
+          </a:xfrm>
+          <a:prstGeom prst="roundRect">
+            <a:avLst>
+              <a:gd name="adj" fmla="val 5106"/>
+            </a:avLst>
+          </a:prstGeom>
+          <a:solidFill>
+            <a:srgbClr val="12305A"/>
+          </a:solidFill>
+          <a:ln w="12700">
+            <a:solidFill>
+              <a:srgbClr val="12305A"/>
+            </a:solidFill>
+            <a:prstDash val="solid"/>
+          </a:ln>
+        </p:spPr>
+        <p:txBody>
+          <a:bodyPr/>
+          <a:lstStyle/>
+          <a:p>
+            <a:endParaRPr lang="en-US"/>
+          </a:p>
+        </p:txBody>
+      </p:sp>
+      <p:sp>
+        <p:nvSpPr>
+          <p:cNvPr id="10" name="Text 8"/>
+          <p:cNvSpPr txBox="1"/>
+          <p:nvPr/>
+        </p:nvSpPr>
+        <p:spPr>
+          <a:xfrm>
+            <a:off x="8354568" y="1874520"/>
+            <a:ext cx="3057144" cy="411480"/>
+          </a:xfrm>
+          <a:prstGeom prst="rect">
+            <a:avLst/>
+          </a:prstGeom>
+          <a:noFill/>
+          <a:ln/>
+        </p:spPr>
+        <p:txBody>
+          <a:bodyPr wrap="square" lIns="0" tIns="0" rIns="0" bIns="0" rtlCol="0" anchor="t"/>
+          <a:lstStyle/>
+          <a:p>
+            <a:pPr marL="0" indent="0">
+              <a:buNone/>
+            </a:pPr>
+            <a:r>
+              <a:rPr lang="en-US" sz="2200" b="1" dirty="0">
+                <a:solidFill>
+                  <a:srgbClr val="F2F6FC"/>
+                </a:solidFill>
+                <a:latin typeface="Calibri" pitchFamily="34" charset="0"/>
+                <a:ea typeface="Calibri" pitchFamily="34" charset="-122"/>
+                <a:cs typeface="Calibri" pitchFamily="34" charset="-120"/>
+              </a:rPr>
+              <a:t>/code-review</a:t>
+            </a:r>
+            <a:endParaRPr lang="en-US" sz="2200" dirty="0"/>
+          </a:p>
+        </p:txBody>
+      </p:sp>
+      <p:sp>
+        <p:nvSpPr>
+          <p:cNvPr id="11" name="Text 9"/>
+          <p:cNvSpPr txBox="1"/>
+          <p:nvPr/>
+        </p:nvSpPr>
+        <p:spPr>
+          <a:xfrm>
+            <a:off x="8354568" y="2377440"/>
+            <a:ext cx="3057144" cy="1325880"/>
+          </a:xfrm>
+          <a:prstGeom prst="rect">
+            <a:avLst/>
+          </a:prstGeom>
+          <a:noFill/>
+          <a:ln/>
+        </p:spPr>
+        <p:txBody>
+          <a:bodyPr wrap="square" lIns="0" tIns="0" rIns="0" bIns="0" rtlCol="0" anchor="t"/>
+          <a:lstStyle/>
+          <a:p>
+            <a:pPr marL="0" indent="0">
+              <a:buNone/>
+            </a:pPr>
+            <a:r>
+              <a:rPr lang="en-US" sz="1700" dirty="0">
+                <a:solidFill>
+                  <a:srgbClr val="A9BCD6"/>
+                </a:solidFill>
+                <a:latin typeface="Calibri" pitchFamily="34" charset="0"/>
+                <a:ea typeface="Calibri" pitchFamily="34" charset="-122"/>
+                <a:cs typeface="Calibri" pitchFamily="34" charset="-120"/>
+              </a:rPr>
+              <a:t>Review the diff for bugs; "ultra" runs a deep cloud review</a:t>
+            </a:r>
+            <a:endParaRPr lang="en-US" sz="1700" dirty="0"/>
+          </a:p>
+        </p:txBody>
+      </p:sp>
+      <p:sp>
+        <p:nvSpPr>
+          <p:cNvPr id="12" name="Shape 10"/>
+          <p:cNvSpPr/>
+          <p:nvPr/>
+        </p:nvSpPr>
+        <p:spPr>
+          <a:xfrm>
+            <a:off x="548640" y="4114800"/>
+            <a:ext cx="3514344" cy="2148840"/>
+          </a:xfrm>
+          <a:prstGeom prst="roundRect">
+            <a:avLst>
+              <a:gd name="adj" fmla="val 5106"/>
+            </a:avLst>
+          </a:prstGeom>
+          <a:solidFill>
+            <a:srgbClr val="12305A"/>
+          </a:solidFill>
+          <a:ln w="12700">
+            <a:solidFill>
+              <a:srgbClr val="12305A"/>
+            </a:solidFill>
+            <a:prstDash val="solid"/>
+          </a:ln>
+        </p:spPr>
+        <p:txBody>
+          <a:bodyPr/>
+          <a:lstStyle/>
+          <a:p>
+            <a:endParaRPr lang="en-US"/>
+          </a:p>
+        </p:txBody>
+      </p:sp>
+      <p:sp>
+        <p:nvSpPr>
+          <p:cNvPr id="13" name="Text 11"/>
+          <p:cNvSpPr txBox="1"/>
+          <p:nvPr/>
+        </p:nvSpPr>
+        <p:spPr>
+          <a:xfrm>
+            <a:off x="777240" y="4297680"/>
+            <a:ext cx="3057144" cy="411480"/>
+          </a:xfrm>
+          <a:prstGeom prst="rect">
+            <a:avLst/>
+          </a:prstGeom>
+          <a:noFill/>
+          <a:ln/>
+        </p:spPr>
+        <p:txBody>
+          <a:bodyPr wrap="square" lIns="0" tIns="0" rIns="0" bIns="0" rtlCol="0" anchor="t"/>
+          <a:lstStyle/>
+          <a:p>
+            <a:pPr marL="0" indent="0">
+              <a:buNone/>
+            </a:pPr>
+            <a:r>
+              <a:rPr lang="en-US" sz="2200" b="1" dirty="0">
+                <a:solidFill>
+                  <a:srgbClr val="F2F6FC"/>
+                </a:solidFill>
+                <a:latin typeface="Calibri" pitchFamily="34" charset="0"/>
+                <a:ea typeface="Calibri" pitchFamily="34" charset="-122"/>
+                <a:cs typeface="Calibri" pitchFamily="34" charset="-120"/>
+              </a:rPr>
+              <a:t>/security-review</a:t>
+            </a:r>
+            <a:endParaRPr lang="en-US" sz="2200" dirty="0"/>
+          </a:p>
+        </p:txBody>
+      </p:sp>
+      <p:sp>
+        <p:nvSpPr>
+          <p:cNvPr id="14" name="Text 12"/>
+          <p:cNvSpPr txBox="1"/>
+          <p:nvPr/>
+        </p:nvSpPr>
+        <p:spPr>
+          <a:xfrm>
+            <a:off x="777240" y="4800600"/>
+            <a:ext cx="3057144" cy="1325880"/>
+          </a:xfrm>
+          <a:prstGeom prst="rect">
+            <a:avLst/>
+          </a:prstGeom>
+          <a:noFill/>
+          <a:ln/>
+        </p:spPr>
+        <p:txBody>
+          <a:bodyPr wrap="square" lIns="0" tIns="0" rIns="0" bIns="0" rtlCol="0" anchor="t"/>
+          <a:lstStyle/>
+          <a:p>
+            <a:pPr marL="0" indent="0">
+              <a:buNone/>
+            </a:pPr>
+            <a:r>
+              <a:rPr lang="en-US" sz="1700" dirty="0">
+                <a:solidFill>
+                  <a:srgbClr val="A9BCD6"/>
+                </a:solidFill>
+                <a:latin typeface="Calibri" pitchFamily="34" charset="0"/>
+                <a:ea typeface="Calibri" pitchFamily="34" charset="-122"/>
+                <a:cs typeface="Calibri" pitchFamily="34" charset="-120"/>
+              </a:rPr>
+              <a:t>Security check of the pending changes</a:t>
+            </a:r>
+            <a:endParaRPr lang="en-US" sz="1700" dirty="0"/>
+          </a:p>
+        </p:txBody>
+      </p:sp>
+      <p:sp>
+        <p:nvSpPr>
+          <p:cNvPr id="15" name="Shape 13"/>
+          <p:cNvSpPr/>
+          <p:nvPr/>
+        </p:nvSpPr>
+        <p:spPr>
+          <a:xfrm>
+            <a:off x="4337304" y="4114800"/>
+            <a:ext cx="3514344" cy="2148840"/>
+          </a:xfrm>
+          <a:prstGeom prst="roundRect">
+            <a:avLst>
+              <a:gd name="adj" fmla="val 5106"/>
+            </a:avLst>
+          </a:prstGeom>
+          <a:solidFill>
+            <a:srgbClr val="12305A"/>
+          </a:solidFill>
+          <a:ln w="12700">
+            <a:solidFill>
+              <a:srgbClr val="12305A"/>
+            </a:solidFill>
+            <a:prstDash val="solid"/>
+          </a:ln>
+        </p:spPr>
+        <p:txBody>
+          <a:bodyPr/>
+          <a:lstStyle/>
+          <a:p>
+            <a:endParaRPr lang="en-US"/>
+          </a:p>
+        </p:txBody>
+      </p:sp>
+      <p:sp>
+        <p:nvSpPr>
+          <p:cNvPr id="16" name="Text 14"/>
+          <p:cNvSpPr txBox="1"/>
+          <p:nvPr/>
+        </p:nvSpPr>
+        <p:spPr>
+          <a:xfrm>
+            <a:off x="4565904" y="4297680"/>
+            <a:ext cx="3057144" cy="411480"/>
+          </a:xfrm>
+          <a:prstGeom prst="rect">
+            <a:avLst/>
+          </a:prstGeom>
+          <a:noFill/>
+          <a:ln/>
+        </p:spPr>
+        <p:txBody>
+          <a:bodyPr wrap="square" lIns="0" tIns="0" rIns="0" bIns="0" rtlCol="0" anchor="t"/>
+          <a:lstStyle/>
+          <a:p>
+            <a:pPr marL="0" indent="0">
+              <a:buNone/>
+            </a:pPr>
+            <a:r>
+              <a:rPr lang="en-US" sz="2200" b="1" dirty="0">
+                <a:solidFill>
+                  <a:srgbClr val="F2F6FC"/>
+                </a:solidFill>
+                <a:latin typeface="Calibri" pitchFamily="34" charset="0"/>
+                <a:ea typeface="Calibri" pitchFamily="34" charset="-122"/>
+                <a:cs typeface="Calibri" pitchFamily="34" charset="-120"/>
+              </a:rPr>
+              <a:t>/simplify</a:t>
+            </a:r>
+            <a:endParaRPr lang="en-US" sz="2200" dirty="0"/>
+          </a:p>
+        </p:txBody>
+      </p:sp>
+      <p:sp>
+        <p:nvSpPr>
+          <p:cNvPr id="17" name="Text 15"/>
+          <p:cNvSpPr txBox="1"/>
+          <p:nvPr/>
+        </p:nvSpPr>
+        <p:spPr>
+          <a:xfrm>
+            <a:off x="4565904" y="4800600"/>
+            <a:ext cx="3057144" cy="1325880"/>
+          </a:xfrm>
+          <a:prstGeom prst="rect">
+            <a:avLst/>
+          </a:prstGeom>
+          <a:noFill/>
+          <a:ln/>
+        </p:spPr>
+        <p:txBody>
+          <a:bodyPr wrap="square" lIns="0" tIns="0" rIns="0" bIns="0" rtlCol="0" anchor="t"/>
+          <a:lstStyle/>
+          <a:p>
+            <a:pPr marL="0" indent="0">
+              <a:buNone/>
+            </a:pPr>
+            <a:r>
+              <a:rPr lang="en-US" sz="1700" dirty="0">
+                <a:solidFill>
+                  <a:srgbClr val="A9BCD6"/>
+                </a:solidFill>
+                <a:latin typeface="Calibri" pitchFamily="34" charset="0"/>
+                <a:ea typeface="Calibri" pitchFamily="34" charset="-122"/>
+                <a:cs typeface="Calibri" pitchFamily="34" charset="-120"/>
+              </a:rPr>
+              <a:t>Clean up changed code for reuse and clarity</a:t>
+            </a:r>
+            <a:endParaRPr lang="en-US" sz="1700" dirty="0"/>
+          </a:p>
+        </p:txBody>
+      </p:sp>
+      <p:sp>
+        <p:nvSpPr>
+          <p:cNvPr id="18" name="Shape 16"/>
+          <p:cNvSpPr/>
+          <p:nvPr/>
+        </p:nvSpPr>
+        <p:spPr>
+          <a:xfrm>
+            <a:off x="8125968" y="4114800"/>
+            <a:ext cx="3514344" cy="2148840"/>
+          </a:xfrm>
+          <a:prstGeom prst="roundRect">
+            <a:avLst>
+              <a:gd name="adj" fmla="val 5106"/>
+            </a:avLst>
+          </a:prstGeom>
+          <a:solidFill>
+            <a:srgbClr val="12305A"/>
+          </a:solidFill>
+          <a:ln w="12700">
+            <a:solidFill>
+              <a:srgbClr val="12305A"/>
+            </a:solidFill>
+            <a:prstDash val="solid"/>
+          </a:ln>
+        </p:spPr>
+        <p:txBody>
+          <a:bodyPr/>
+          <a:lstStyle/>
+          <a:p>
+            <a:endParaRPr lang="en-US"/>
+          </a:p>
+        </p:txBody>
+      </p:sp>
+      <p:sp>
+        <p:nvSpPr>
+          <p:cNvPr id="19" name="Text 17"/>
+          <p:cNvSpPr txBox="1"/>
+          <p:nvPr/>
+        </p:nvSpPr>
+        <p:spPr>
+          <a:xfrm>
+            <a:off x="8354568" y="4297680"/>
+            <a:ext cx="3057144" cy="411480"/>
+          </a:xfrm>
+          <a:prstGeom prst="rect">
+            <a:avLst/>
+          </a:prstGeom>
+          <a:noFill/>
+          <a:ln/>
+        </p:spPr>
+        <p:txBody>
+          <a:bodyPr wrap="square" lIns="0" tIns="0" rIns="0" bIns="0" rtlCol="0" anchor="t"/>
+          <a:lstStyle/>
+          <a:p>
+            <a:pPr marL="0" indent="0">
+              <a:buNone/>
+            </a:pPr>
+            <a:r>
+              <a:rPr lang="en-US" sz="2200" b="1" dirty="0">
+                <a:solidFill>
+                  <a:srgbClr val="F2F6FC"/>
+                </a:solidFill>
+                <a:latin typeface="Calibri" pitchFamily="34" charset="0"/>
+                <a:ea typeface="Calibri" pitchFamily="34" charset="-122"/>
+                <a:cs typeface="Calibri" pitchFamily="34" charset="-120"/>
+              </a:rPr>
+              <a:t>/install-github-app</a:t>
+            </a:r>
+            <a:endParaRPr lang="en-US" sz="2200" dirty="0"/>
+          </a:p>
+        </p:txBody>
+      </p:sp>
+      <p:sp>
+        <p:nvSpPr>
+          <p:cNvPr id="20" name="Text 18"/>
+          <p:cNvSpPr txBox="1"/>
+          <p:nvPr/>
+        </p:nvSpPr>
+        <p:spPr>
+          <a:xfrm>
+            <a:off x="8354568" y="4800600"/>
+            <a:ext cx="3057144" cy="1325880"/>
+          </a:xfrm>
+          <a:prstGeom prst="rect">
+            <a:avLst/>
+          </a:prstGeom>
+          <a:noFill/>
+          <a:ln/>
+        </p:spPr>
+        <p:txBody>
+          <a:bodyPr wrap="square" lIns="0" tIns="0" rIns="0" bIns="0" rtlCol="0" anchor="t"/>
+          <a:lstStyle/>
+          <a:p>
+            <a:pPr marL="0" indent="0">
+              <a:buNone/>
+            </a:pPr>
+            <a:r>
+              <a:rPr lang="en-US" sz="1700" dirty="0">
+                <a:solidFill>
+                  <a:srgbClr val="A9BCD6"/>
+                </a:solidFill>
+                <a:latin typeface="Calibri" pitchFamily="34" charset="0"/>
+                <a:ea typeface="Calibri" pitchFamily="34" charset="-122"/>
+                <a:cs typeface="Calibri" pitchFamily="34" charset="-120"/>
+              </a:rPr>
+              <a:t>Connect Claude to your GitHub repo and PRs</a:t>
+            </a:r>
+            <a:endParaRPr lang="en-US" sz="1700" dirty="0"/>
+          </a:p>
+        </p:txBody>
+      </p:sp>
+      <p:sp>
+        <p:nvSpPr>
+          <p:cNvPr id="21" name="Slide Number Placeholder 0"/>
+          <p:cNvSpPr>
+            <a:spLocks noGrp="1"/>
+          </p:cNvSpPr>
+          <p:nvPr>
+            <p:ph type="sldNum" sz="quarter" idx="4294967295"/>
+          </p:nvPr>
+        </p:nvSpPr>
+        <p:spPr>
+          <a:xfrm>
+            <a:off x="11247120" y="6400800"/>
+            <a:ext cx="548640" cy="274320"/>
+          </a:xfrm>
+          <a:prstGeom prst="rect">
+            <a:avLst/>
+          </a:prstGeom>
+          <a:extLst>
+            <a:ext uri="{C572A759-6A51-4108-AA02-DFA0A04FC94B}">
+              <ma14:wrappingTextBoxFlag xmlns="" xmlns:ma14="http://schemas.microsoft.com/office/mac/drawingml/2011/main" val="0"/>
+            </a:ext>
+          </a:extLst>
+        </p:spPr>
+        <p:txBody>
+          <a:bodyPr/>
+          <a:lstStyle>
+            <a:lvl1pPr>
+              <a:defRPr sz="1200">
+                <a:solidFill>
+                  <a:srgbClr val="A9BCD6"/>
+                </a:solidFill>
+                <a:latin typeface="Calibri"/>
+                <a:ea typeface="Calibri"/>
+                <a:cs typeface="Calibri"/>
+              </a:defRPr>
+            </a:lvl1pPr>
+          </a:lstStyle>
+          <a:p>
+            <a:pPr algn="r"/>
+            <a:fld id="{F7021451-1387-4CA6-816F-3879F97B5CBC}" type="slidenum">
+              <a:rPr lang="en-US" b="0"/>
+              <a:t>30</a:t>
+            </a:fld>
+            <a:endParaRPr lang="en-US"/>
+          </a:p>
+        </p:txBody>
+      </p:sp>
+    </p:spTree>
+  </p:cSld>
+  <p:clrMapOvr>
+    <a:masterClrMapping/>
+  </p:clrMapOvr>
+</p:sld>
+</file>
+
+<file path=ppt/slides/slide31.xml><?xml version="1.0" encoding="utf-8"?>
+<p:sld xmlns:a="http://schemas.openxmlformats.org/drawingml/2006/main" xmlns:r="http://schemas.openxmlformats.org/officeDocument/2006/relationships" xmlns:p="http://schemas.openxmlformats.org/presentationml/2006/main">
   <p:cSld name="Slide 18">
     <p:spTree>
       <p:nvGrpSpPr>
@@ -22100,7 +22828,7 @@
           </a:prstGeom>
           <a:extLst>
             <a:ext uri="{C572A759-6A51-4108-AA02-DFA0A04FC94B}">
-              <ma14:wrappingTextBoxFlag xmlns:ma14="http://schemas.microsoft.com/office/mac/drawingml/2011/main" xmlns="" val="0"/>
+              <ma14:wrappingTextBoxFlag xmlns="" xmlns:ma14="http://schemas.microsoft.com/office/mac/drawingml/2011/main" val="0"/>
             </a:ext>
           </a:extLst>
         </p:spPr>
@@ -22122,7 +22850,7 @@
             <a:pPr algn="r"/>
             <a:fld id="{F7021451-1387-4CA6-816F-3879F97B5CBC}" type="slidenum">
               <a:rPr lang="en-US" b="0"/>
-              <a:t>30</a:t>
+              <a:t>31</a:t>
             </a:fld>
             <a:endParaRPr lang="en-US"/>
           </a:p>
@@ -22136,7 +22864,7 @@
 </p:sld>
 </file>
 
-<file path=ppt/slides/slide31.xml><?xml version="1.0" encoding="utf-8"?>
+<file path=ppt/slides/slide32.xml><?xml version="1.0" encoding="utf-8"?>
 <p:sld xmlns:a="http://schemas.openxmlformats.org/drawingml/2006/main" xmlns:r="http://schemas.openxmlformats.org/officeDocument/2006/relationships" xmlns:p="http://schemas.openxmlformats.org/presentationml/2006/main">
   <p:cSld name="Slide 19">
     <p:spTree>
@@ -23424,7 +24152,7 @@
           </a:prstGeom>
           <a:extLst>
             <a:ext uri="{C572A759-6A51-4108-AA02-DFA0A04FC94B}">
-              <ma14:wrappingTextBoxFlag xmlns:ma14="http://schemas.microsoft.com/office/mac/drawingml/2011/main" xmlns="" val="0"/>
+              <ma14:wrappingTextBoxFlag xmlns="" xmlns:ma14="http://schemas.microsoft.com/office/mac/drawingml/2011/main" val="0"/>
             </a:ext>
           </a:extLst>
         </p:spPr>
@@ -23446,7 +24174,7 @@
             <a:pPr algn="r"/>
             <a:fld id="{F7021451-1387-4CA6-816F-3879F97B5CBC}" type="slidenum">
               <a:rPr lang="en-US" b="0"/>
-              <a:t>31</a:t>
+              <a:t>32</a:t>
             </a:fld>
             <a:endParaRPr lang="en-US"/>
           </a:p>
@@ -24461,7 +25189,7 @@
           </a:prstGeom>
           <a:extLst>
             <a:ext uri="{C572A759-6A51-4108-AA02-DFA0A04FC94B}">
-              <ma14:wrappingTextBoxFlag xmlns:ma14="http://schemas.microsoft.com/office/mac/drawingml/2011/main" xmlns="" val="0"/>
+              <ma14:wrappingTextBoxFlag xmlns="" xmlns:ma14="http://schemas.microsoft.com/office/mac/drawingml/2011/main" val="0"/>
             </a:ext>
           </a:extLst>
         </p:spPr>
@@ -24975,7 +25703,7 @@
           </a:prstGeom>
           <a:extLst>
             <a:ext uri="{C572A759-6A51-4108-AA02-DFA0A04FC94B}">
-              <ma14:wrappingTextBoxFlag xmlns:ma14="http://schemas.microsoft.com/office/mac/drawingml/2011/main" xmlns="" val="0"/>
+              <ma14:wrappingTextBoxFlag xmlns="" xmlns:ma14="http://schemas.microsoft.com/office/mac/drawingml/2011/main" val="0"/>
             </a:ext>
           </a:extLst>
         </p:spPr>
@@ -25795,7 +26523,7 @@
           </a:prstGeom>
           <a:extLst>
             <a:ext uri="{C572A759-6A51-4108-AA02-DFA0A04FC94B}">
-              <ma14:wrappingTextBoxFlag xmlns:ma14="http://schemas.microsoft.com/office/mac/drawingml/2011/main" xmlns="" val="0"/>
+              <ma14:wrappingTextBoxFlag xmlns="" xmlns:ma14="http://schemas.microsoft.com/office/mac/drawingml/2011/main" val="0"/>
             </a:ext>
           </a:extLst>
         </p:spPr>
@@ -26313,7 +27041,7 @@
           </a:prstGeom>
           <a:extLst>
             <a:ext uri="{C572A759-6A51-4108-AA02-DFA0A04FC94B}">
-              <ma14:wrappingTextBoxFlag xmlns:ma14="http://schemas.microsoft.com/office/mac/drawingml/2011/main" xmlns="" val="0"/>
+              <ma14:wrappingTextBoxFlag xmlns="" xmlns:ma14="http://schemas.microsoft.com/office/mac/drawingml/2011/main" val="0"/>
             </a:ext>
           </a:extLst>
         </p:spPr>
@@ -27631,7 +28359,7 @@
           </a:prstGeom>
           <a:extLst>
             <a:ext uri="{C572A759-6A51-4108-AA02-DFA0A04FC94B}">
-              <ma14:wrappingTextBoxFlag xmlns:ma14="http://schemas.microsoft.com/office/mac/drawingml/2011/main" xmlns="" val="0"/>
+              <ma14:wrappingTextBoxFlag xmlns="" xmlns:ma14="http://schemas.microsoft.com/office/mac/drawingml/2011/main" val="0"/>
             </a:ext>
           </a:extLst>
         </p:spPr>

--- a/resources/claude_code_vscode_tricks.pptx
+++ b/resources/claude_code_vscode_tricks.pptx
@@ -7739,7 +7739,7 @@
                 </a:solidFill>
                 <a:latin typeface="Calibri"/>
               </a:rPr>
-              <a:t>Talk the problem: ideas, doubts, decisions</a:t>
+              <a:t>Talk it through: ideas, doubts, decisions</a:t>
             </a:r>
           </a:p>
         </p:txBody>
@@ -8107,7 +8107,7 @@
                 </a:solidFill>
                 <a:latin typeface="Calibri"/>
               </a:rPr>
-              <a:t>Iterate: build, verify, self-correct</a:t>
+              <a:t>Build, verify, self-correct (exit gates)</a:t>
             </a:r>
           </a:p>
         </p:txBody>
@@ -8587,7 +8587,7 @@
                 </a:solidFill>
                 <a:latin typeface="Calibri"/>
               </a:rPr>
-              <a:t>1</a:t>
+              <a:t>A</a:t>
             </a:r>
           </a:p>
         </p:txBody>
@@ -8745,7 +8745,7 @@
                 </a:solidFill>
                 <a:latin typeface="Calibri"/>
               </a:rPr>
-              <a:t>2</a:t>
+              <a:t>B</a:t>
             </a:r>
           </a:p>
         </p:txBody>
@@ -8903,7 +8903,7 @@
                 </a:solidFill>
                 <a:latin typeface="Calibri"/>
               </a:rPr>
-              <a:t>3</a:t>
+              <a:t>C</a:t>
             </a:r>
           </a:p>
         </p:txBody>
@@ -9061,7 +9061,7 @@
                 </a:solidFill>
                 <a:latin typeface="Calibri"/>
               </a:rPr>
-              <a:t>4</a:t>
+              <a:t>D</a:t>
             </a:r>
           </a:p>
         </p:txBody>
@@ -10554,7 +10554,7 @@
                 </a:solidFill>
                 <a:latin typeface="Calibri"/>
               </a:rPr>
-              <a:t>Start every job the same way: </a:t>
+              <a:t>Steps 1-2: </a:t>
             </a:r>
             <a:r>
               <a:rPr sz="3000" b="1" i="0">
@@ -10957,7 +10957,7 @@
                 </a:solidFill>
                 <a:latin typeface="Calibri"/>
               </a:rPr>
-              <a:t>Decisions are made out loud; the next step writes them down</a:t>
+              <a:t>Decisions are said out loud, then written down</a:t>
             </a:r>
           </a:p>
         </p:txBody>
@@ -11162,7 +11162,7 @@
                 </a:solidFill>
                 <a:latin typeface="Calibri"/>
               </a:rPr>
-              <a:t>Then say </a:t>
+              <a:t>Step 3: say </a:t>
             </a:r>
             <a:r>
               <a:rPr sz="3000" b="1" i="0">
@@ -11171,7 +11171,7 @@
                 </a:solidFill>
                 <a:latin typeface="Calibri"/>
               </a:rPr>
-              <a:t>“initialize”: docs and project, done</a:t>
+              <a:t>“initialize”: docs and project</a:t>
             </a:r>
             <a:endParaRPr lang="en-US" sz="3000" dirty="0"/>
           </a:p>
@@ -13533,7 +13533,7 @@
                 </a:solidFill>
                 <a:latin typeface="Calibri"/>
               </a:rPr>
-              <a:t>progress.md</a:t>
+              <a:t>Step 5: progress.md</a:t>
             </a:r>
             <a:r>
               <a:rPr sz="3000" b="1" i="0">
@@ -13542,7 +13542,7 @@
                 </a:solidFill>
                 <a:latin typeface="Calibri"/>
               </a:rPr>
-              <a:t>: the file that drives the whole loop</a:t>
+              <a:t> drives the whole loop</a:t>
             </a:r>
             <a:endParaRPr lang="en-US" sz="3000" dirty="0"/>
           </a:p>
@@ -14447,7 +14447,7 @@
                 </a:solidFill>
                 <a:latin typeface="Calibri"/>
               </a:rPr>
-              <a:t>Each pass: build, verify, </a:t>
+              <a:t>Step 6: build, verify, </a:t>
             </a:r>
             <a:r>
               <a:rPr sz="3000" b="1" i="0">
@@ -14598,7 +14598,7 @@
                 </a:solidFill>
                 <a:latin typeface="Calibri"/>
               </a:rPr>
-              <a:t>1  Read</a:t>
+              <a:t>A  Read</a:t>
             </a:r>
           </a:p>
         </p:txBody>
@@ -14719,7 +14719,7 @@
                 </a:solidFill>
                 <a:latin typeface="Calibri"/>
               </a:rPr>
-              <a:t>2  Do</a:t>
+              <a:t>B  Do</a:t>
             </a:r>
           </a:p>
         </p:txBody>
@@ -14840,7 +14840,7 @@
                 </a:solidFill>
                 <a:latin typeface="Calibri"/>
               </a:rPr>
-              <a:t>3  Verify</a:t>
+              <a:t>C  Verify</a:t>
             </a:r>
           </a:p>
         </p:txBody>
@@ -15475,7 +15475,7 @@
                 </a:solidFill>
                 <a:latin typeface="Calibri"/>
               </a:rPr>
-              <a:t>Exit gates</a:t>
+              <a:t>Step 6 gates</a:t>
             </a:r>
             <a:r>
               <a:rPr sz="3000" b="1" i="0">
@@ -15484,7 +15484,7 @@
                 </a:solidFill>
                 <a:latin typeface="Calibri"/>
               </a:rPr>
-              <a:t>: a short pass-or-fail check for every phase</a:t>
+              <a:t>: a pass-or-fail check per phase</a:t>
             </a:r>
             <a:endParaRPr lang="en-US" sz="3000" dirty="0"/>
           </a:p>
@@ -16359,7 +16359,7 @@
                 </a:solidFill>
                 <a:latin typeface="Calibri"/>
               </a:rPr>
-              <a:t>One phase at a time, or </a:t>
+              <a:t>Step 7: one phase at a time, or </a:t>
             </a:r>
             <a:r>
               <a:rPr sz="3000" b="1" i="0">
@@ -16368,7 +16368,7 @@
                 </a:solidFill>
                 <a:latin typeface="Calibri"/>
               </a:rPr>
-              <a:t>all phases at once</a:t>
+              <a:t>all at once</a:t>
             </a:r>
             <a:endParaRPr lang="en-US" sz="3000" dirty="0"/>
           </a:p>
